--- a/AWEN_Final_Presentation_AF52.pptx
+++ b/AWEN_Final_Presentation_AF52.pptx
@@ -3153,7 +3153,7 @@
         <p:spPr>
           <a:xfrm>
             <a:off x="731520" y="548640"/>
-            <a:ext cx="4114800" cy="411480"/>
+            <a:ext cx="3108960" cy="411480"/>
           </a:xfrm>
           <a:prstGeom prst="rect">
             <a:avLst/>
@@ -3194,7 +3194,7 @@
               </a:defRPr>
             </a:pPr>
             <a:r>
-              <a:t>CAPSTONE FINAL VIVA | B.TECH CSE</a:t>
+              <a:t>CAPSTONE | B.TECH CSE</a:t>
             </a:r>
           </a:p>
         </p:txBody>

--- a/AWEN_Final_Presentation_AF52.pptx
+++ b/AWEN_Final_Presentation_AF52.pptx
@@ -3152,8 +3152,8 @@
         </p:nvSpPr>
         <p:spPr>
           <a:xfrm>
-            <a:off x="731520" y="548640"/>
-            <a:ext cx="3108960" cy="411480"/>
+            <a:off x="731520" y="502920"/>
+            <a:ext cx="2926080" cy="365760"/>
           </a:xfrm>
           <a:prstGeom prst="rect">
             <a:avLst/>
@@ -3186,7 +3186,7 @@
           <a:lstStyle/>
           <a:p>
             <a:pPr algn="ctr">
-              <a:defRPr sz="1300" b="1">
+              <a:defRPr sz="1200" b="1">
                 <a:solidFill>
                   <a:srgbClr val="111111"/>
                 </a:solidFill>
@@ -3207,8 +3207,8 @@
         </p:nvSpPr>
         <p:spPr>
           <a:xfrm>
-            <a:off x="731520" y="1097280"/>
-            <a:ext cx="10698480" cy="2560320"/>
+            <a:off x="731520" y="1051560"/>
+            <a:ext cx="10728655" cy="2103120"/>
           </a:xfrm>
           <a:prstGeom prst="rect">
             <a:avLst/>
@@ -3216,13 +3216,13 @@
           <a:noFill/>
         </p:spPr>
         <p:txBody>
-          <a:bodyPr wrap="square">
+          <a:bodyPr wrap="square" lIns="0" rIns="0" tIns="0" bIns="0">
             <a:spAutoFit/>
           </a:bodyPr>
           <a:lstStyle/>
           <a:p>
             <a:pPr>
-              <a:defRPr sz="3800" b="1">
+              <a:defRPr sz="3400" b="1">
                 <a:solidFill>
                   <a:srgbClr val="111111"/>
                 </a:solidFill>
@@ -3236,9 +3236,9 @@
           <a:p>
             <a:pPr>
               <a:spcBef>
-                <a:spcPts val="800"/>
+                <a:spcPts val="600"/>
               </a:spcBef>
-              <a:defRPr sz="1800">
+              <a:defRPr sz="1600">
                 <a:solidFill>
                   <a:srgbClr val="1E293B"/>
                 </a:solidFill>
@@ -3259,8 +3259,8 @@
         </p:nvSpPr>
         <p:spPr>
           <a:xfrm>
-            <a:off x="786384" y="3986784"/>
-            <a:ext cx="2560320" cy="2194560"/>
+            <a:off x="786384" y="3575304"/>
+            <a:ext cx="2560320" cy="2651760"/>
           </a:xfrm>
           <a:prstGeom prst="rect">
             <a:avLst/>
@@ -3302,8 +3302,8 @@
         </p:nvSpPr>
         <p:spPr>
           <a:xfrm>
-            <a:off x="731520" y="3931920"/>
-            <a:ext cx="2560320" cy="2194560"/>
+            <a:off x="731520" y="3520440"/>
+            <a:ext cx="2560320" cy="2651760"/>
           </a:xfrm>
           <a:prstGeom prst="rect">
             <a:avLst/>
@@ -3347,8 +3347,8 @@
         </p:nvSpPr>
         <p:spPr>
           <a:xfrm>
-            <a:off x="896112" y="4096512"/>
-            <a:ext cx="2231136" cy="1865376"/>
+            <a:off x="896112" y="3685032"/>
+            <a:ext cx="2231136" cy="2322576"/>
           </a:xfrm>
           <a:prstGeom prst="rect">
             <a:avLst/>
@@ -3356,13 +3356,13 @@
           <a:noFill/>
         </p:spPr>
         <p:txBody>
-          <a:bodyPr wrap="square">
+          <a:bodyPr wrap="square" tIns="50800" bIns="50800" lIns="50800" rIns="50800">
             <a:spAutoFit/>
           </a:bodyPr>
           <a:lstStyle/>
           <a:p>
             <a:pPr>
-              <a:defRPr sz="1500" b="1">
+              <a:defRPr sz="1350" b="1">
                 <a:solidFill>
                   <a:srgbClr val="111111"/>
                 </a:solidFill>
@@ -3376,9 +3376,9 @@
           <a:p>
             <a:pPr>
               <a:spcBef>
-                <a:spcPts val="1000"/>
+                <a:spcPts val="800"/>
               </a:spcBef>
-              <a:defRPr sz="1350">
+              <a:defRPr sz="1150">
                 <a:solidFill>
                   <a:srgbClr val="1E293B"/>
                 </a:solidFill>
@@ -3399,8 +3399,8 @@
         </p:nvSpPr>
         <p:spPr>
           <a:xfrm>
-            <a:off x="3483864" y="3986784"/>
-            <a:ext cx="2560320" cy="2194560"/>
+            <a:off x="3483864" y="3575304"/>
+            <a:ext cx="2560320" cy="2651760"/>
           </a:xfrm>
           <a:prstGeom prst="rect">
             <a:avLst/>
@@ -3442,8 +3442,8 @@
         </p:nvSpPr>
         <p:spPr>
           <a:xfrm>
-            <a:off x="3429000" y="3931920"/>
-            <a:ext cx="2560320" cy="2194560"/>
+            <a:off x="3429000" y="3520440"/>
+            <a:ext cx="2560320" cy="2651760"/>
           </a:xfrm>
           <a:prstGeom prst="rect">
             <a:avLst/>
@@ -3487,8 +3487,8 @@
         </p:nvSpPr>
         <p:spPr>
           <a:xfrm>
-            <a:off x="3593592" y="4096512"/>
-            <a:ext cx="2231136" cy="1865376"/>
+            <a:off x="3593592" y="3685032"/>
+            <a:ext cx="2231136" cy="2322576"/>
           </a:xfrm>
           <a:prstGeom prst="rect">
             <a:avLst/>
@@ -3496,13 +3496,13 @@
           <a:noFill/>
         </p:spPr>
         <p:txBody>
-          <a:bodyPr wrap="square">
+          <a:bodyPr wrap="square" tIns="50800" bIns="50800" lIns="50800" rIns="50800">
             <a:spAutoFit/>
           </a:bodyPr>
           <a:lstStyle/>
           <a:p>
             <a:pPr>
-              <a:defRPr sz="1500" b="1">
+              <a:defRPr sz="1350" b="1">
                 <a:solidFill>
                   <a:srgbClr val="111111"/>
                 </a:solidFill>
@@ -3516,9 +3516,9 @@
           <a:p>
             <a:pPr>
               <a:spcBef>
-                <a:spcPts val="1000"/>
+                <a:spcPts val="800"/>
               </a:spcBef>
-              <a:defRPr sz="1350">
+              <a:defRPr sz="1150">
                 <a:solidFill>
                   <a:srgbClr val="1E293B"/>
                 </a:solidFill>
@@ -3526,7 +3526,7 @@
               </a:defRPr>
             </a:pPr>
             <a:r>
-              <a:t>Compares your body to YOUR OWN baseline, not to a generic one-size-fits-all number.</a:t>
+              <a:t>Compares your body to YOUR OWN baseline, not to a generic one-size-fits-all medical cutoff.</a:t>
             </a:r>
           </a:p>
         </p:txBody>
@@ -3539,8 +3539,8 @@
         </p:nvSpPr>
         <p:spPr>
           <a:xfrm>
-            <a:off x="6181344" y="3986784"/>
-            <a:ext cx="2560320" cy="2194560"/>
+            <a:off x="6181344" y="3575304"/>
+            <a:ext cx="2560320" cy="2651760"/>
           </a:xfrm>
           <a:prstGeom prst="rect">
             <a:avLst/>
@@ -3582,8 +3582,8 @@
         </p:nvSpPr>
         <p:spPr>
           <a:xfrm>
-            <a:off x="6126480" y="3931920"/>
-            <a:ext cx="2560320" cy="2194560"/>
+            <a:off x="6126480" y="3520440"/>
+            <a:ext cx="2560320" cy="2651760"/>
           </a:xfrm>
           <a:prstGeom prst="rect">
             <a:avLst/>
@@ -3627,8 +3627,8 @@
         </p:nvSpPr>
         <p:spPr>
           <a:xfrm>
-            <a:off x="6291072" y="4096512"/>
-            <a:ext cx="2231136" cy="1865376"/>
+            <a:off x="6291072" y="3685032"/>
+            <a:ext cx="2231136" cy="2322576"/>
           </a:xfrm>
           <a:prstGeom prst="rect">
             <a:avLst/>
@@ -3636,13 +3636,13 @@
           <a:noFill/>
         </p:spPr>
         <p:txBody>
-          <a:bodyPr wrap="square">
+          <a:bodyPr wrap="square" tIns="50800" bIns="50800" lIns="50800" rIns="50800">
             <a:spAutoFit/>
           </a:bodyPr>
           <a:lstStyle/>
           <a:p>
             <a:pPr>
-              <a:defRPr sz="1500" b="1">
+              <a:defRPr sz="1350" b="1">
                 <a:solidFill>
                   <a:srgbClr val="111111"/>
                 </a:solidFill>
@@ -3656,9 +3656,9 @@
           <a:p>
             <a:pPr>
               <a:spcBef>
-                <a:spcPts val="1000"/>
+                <a:spcPts val="800"/>
               </a:spcBef>
-              <a:defRPr sz="1350">
+              <a:defRPr sz="1150">
                 <a:solidFill>
                   <a:srgbClr val="1E293B"/>
                 </a:solidFill>
@@ -3679,8 +3679,8 @@
         </p:nvSpPr>
         <p:spPr>
           <a:xfrm>
-            <a:off x="8878824" y="3986784"/>
-            <a:ext cx="2560320" cy="2194560"/>
+            <a:off x="8878824" y="3575304"/>
+            <a:ext cx="2560320" cy="2651760"/>
           </a:xfrm>
           <a:prstGeom prst="rect">
             <a:avLst/>
@@ -3722,8 +3722,8 @@
         </p:nvSpPr>
         <p:spPr>
           <a:xfrm>
-            <a:off x="8823960" y="3931920"/>
-            <a:ext cx="2560320" cy="2194560"/>
+            <a:off x="8823960" y="3520440"/>
+            <a:ext cx="2560320" cy="2651760"/>
           </a:xfrm>
           <a:prstGeom prst="rect">
             <a:avLst/>
@@ -3767,8 +3767,8 @@
         </p:nvSpPr>
         <p:spPr>
           <a:xfrm>
-            <a:off x="8988552" y="4096512"/>
-            <a:ext cx="2231136" cy="1865376"/>
+            <a:off x="8988552" y="3685032"/>
+            <a:ext cx="2231136" cy="2322576"/>
           </a:xfrm>
           <a:prstGeom prst="rect">
             <a:avLst/>
@@ -3776,13 +3776,13 @@
           <a:noFill/>
         </p:spPr>
         <p:txBody>
-          <a:bodyPr wrap="square">
+          <a:bodyPr wrap="square" tIns="50800" bIns="50800" lIns="50800" rIns="50800">
             <a:spAutoFit/>
           </a:bodyPr>
           <a:lstStyle/>
           <a:p>
             <a:pPr>
-              <a:defRPr sz="1500" b="1">
+              <a:defRPr sz="1350" b="1">
                 <a:solidFill>
                   <a:srgbClr val="111111"/>
                 </a:solidFill>
@@ -3796,9 +3796,9 @@
           <a:p>
             <a:pPr>
               <a:spcBef>
-                <a:spcPts val="1000"/>
+                <a:spcPts val="800"/>
               </a:spcBef>
-              <a:defRPr sz="1350">
+              <a:defRPr sz="1150">
                 <a:solidFill>
                   <a:srgbClr val="1E293B"/>
                 </a:solidFill>
@@ -3806,7 +3806,7 @@
               </a:defRPr>
             </a:pPr>
             <a:r>
-              <a:t>Saved right on your own laptop in local SQLite. Zero data leaves your machine.</a:t>
+              <a:t>Saved right on your own laptop in local SQLite. Zero biometric data leaves your machine.</a:t>
             </a:r>
           </a:p>
         </p:txBody>
@@ -3880,8 +3880,8 @@
         </p:nvSpPr>
         <p:spPr>
           <a:xfrm>
-            <a:off x="731520" y="365760"/>
-            <a:ext cx="2212848" cy="384048"/>
+            <a:off x="731520" y="320040"/>
+            <a:ext cx="1883664" cy="320040"/>
           </a:xfrm>
           <a:prstGeom prst="rect">
             <a:avLst/>
@@ -3910,11 +3910,11 @@
           </a:fontRef>
         </p:style>
         <p:txBody>
-          <a:bodyPr rtlCol="0" anchor="ctr"/>
+          <a:bodyPr rtlCol="0" anchor="ctr" wrap="none" tIns="25400" bIns="25400" lIns="50800" rIns="50800"/>
           <a:lstStyle/>
           <a:p>
             <a:pPr algn="ctr">
-              <a:defRPr sz="1100" b="1">
+              <a:defRPr sz="1050" b="1">
                 <a:solidFill>
                   <a:srgbClr val="111111"/>
                 </a:solidFill>
@@ -3935,8 +3935,8 @@
         </p:nvSpPr>
         <p:spPr>
           <a:xfrm>
-            <a:off x="731520" y="804672"/>
-            <a:ext cx="10698480" cy="594360"/>
+            <a:off x="731520" y="713232"/>
+            <a:ext cx="10728655" cy="1143000"/>
           </a:xfrm>
           <a:prstGeom prst="rect">
             <a:avLst/>
@@ -3944,13 +3944,13 @@
           <a:noFill/>
         </p:spPr>
         <p:txBody>
-          <a:bodyPr wrap="square">
+          <a:bodyPr wrap="square" tIns="0" bIns="0" lIns="0" rIns="0">
             <a:spAutoFit/>
           </a:bodyPr>
           <a:lstStyle/>
           <a:p>
             <a:pPr>
-              <a:defRPr sz="2800" b="1">
+              <a:defRPr sz="2400" b="1">
                 <a:solidFill>
                   <a:srgbClr val="111111"/>
                 </a:solidFill>
@@ -3961,32 +3961,12 @@
               <a:t>Meet Awen: 5 Simple Colors That Show How You Feel</a:t>
             </a:r>
           </a:p>
-        </p:txBody>
-      </p:sp>
-      <p:sp>
-        <p:nvSpPr>
-          <p:cNvPr id="5" name="TextBox 4"/>
-          <p:cNvSpPr txBox="1"/>
-          <p:nvPr/>
-        </p:nvSpPr>
-        <p:spPr>
-          <a:xfrm>
-            <a:off x="731520" y="1371600"/>
-            <a:ext cx="10698480" cy="411480"/>
-          </a:xfrm>
-          <a:prstGeom prst="rect">
-            <a:avLst/>
-          </a:prstGeom>
-          <a:noFill/>
-        </p:spPr>
-        <p:txBody>
-          <a:bodyPr wrap="square">
-            <a:spAutoFit/>
-          </a:bodyPr>
-          <a:lstStyle/>
-          <a:p>
-            <a:pPr>
-              <a:defRPr sz="1500">
+          <a:p>
+            <a:pPr>
+              <a:spcBef>
+                <a:spcPts val="300"/>
+              </a:spcBef>
+              <a:defRPr sz="1300">
                 <a:solidFill>
                   <a:srgbClr val="1E293B"/>
                 </a:solidFill>
@@ -4001,14 +3981,14 @@
       </p:sp>
       <p:sp>
         <p:nvSpPr>
-          <p:cNvPr id="6" name="Rectangle 5"/>
+          <p:cNvPr id="5" name="Rectangle 4"/>
           <p:cNvSpPr/>
           <p:nvPr/>
         </p:nvSpPr>
         <p:spPr>
           <a:xfrm>
-            <a:off x="786384" y="2066544"/>
-            <a:ext cx="2057400" cy="4114800"/>
+            <a:off x="786384" y="2020824"/>
+            <a:ext cx="2029968" cy="4389120"/>
           </a:xfrm>
           <a:prstGeom prst="rect">
             <a:avLst/>
@@ -4044,14 +4024,14 @@
       </p:sp>
       <p:sp>
         <p:nvSpPr>
-          <p:cNvPr id="7" name="Rectangle 6"/>
+          <p:cNvPr id="6" name="Rectangle 5"/>
           <p:cNvSpPr/>
           <p:nvPr/>
         </p:nvSpPr>
         <p:spPr>
           <a:xfrm>
-            <a:off x="731520" y="2011680"/>
-            <a:ext cx="2057400" cy="4114800"/>
+            <a:off x="731520" y="1965960"/>
+            <a:ext cx="2029968" cy="4389120"/>
           </a:xfrm>
           <a:prstGeom prst="rect">
             <a:avLst/>
@@ -4089,14 +4069,14 @@
       </p:sp>
       <p:sp>
         <p:nvSpPr>
-          <p:cNvPr id="8" name="TextBox 7"/>
+          <p:cNvPr id="7" name="TextBox 6"/>
           <p:cNvSpPr txBox="1"/>
           <p:nvPr/>
         </p:nvSpPr>
         <p:spPr>
           <a:xfrm>
-            <a:off x="868680" y="2194560"/>
-            <a:ext cx="1783080" cy="3749039"/>
+            <a:off x="859536" y="2130552"/>
+            <a:ext cx="1773936" cy="4059936"/>
           </a:xfrm>
           <a:prstGeom prst="rect">
             <a:avLst/>
@@ -4104,13 +4084,13 @@
           <a:noFill/>
         </p:spPr>
         <p:txBody>
-          <a:bodyPr wrap="square">
+          <a:bodyPr wrap="square" tIns="25400" bIns="25400" lIns="25400" rIns="25400">
             <a:spAutoFit/>
           </a:bodyPr>
           <a:lstStyle/>
           <a:p>
             <a:pPr>
-              <a:defRPr sz="1500" b="1">
+              <a:defRPr sz="1350" b="1">
                 <a:solidFill>
                   <a:srgbClr val="111111"/>
                 </a:solidFill>
@@ -4119,6 +4099,22 @@
             </a:pPr>
             <a:r>
               <a:t>BALANCED</a:t>
+            </a:r>
+          </a:p>
+          <a:p>
+            <a:pPr>
+              <a:spcBef>
+                <a:spcPts val="400"/>
+              </a:spcBef>
+              <a:defRPr sz="1100" b="1">
+                <a:solidFill>
+                  <a:srgbClr val="1E293B"/>
+                </a:solidFill>
+                <a:latin typeface="Arial"/>
+              </a:defRPr>
+            </a:pPr>
+            <a:r>
+              <a:t>Green (#32E875)</a:t>
             </a:r>
           </a:p>
           <a:p>
@@ -4126,7 +4122,7 @@
               <a:spcBef>
                 <a:spcPts val="600"/>
               </a:spcBef>
-              <a:defRPr sz="1300" b="1">
+              <a:defRPr sz="1050">
                 <a:solidFill>
                   <a:srgbClr val="1E293B"/>
                 </a:solidFill>
@@ -4134,22 +4130,6 @@
               </a:defRPr>
             </a:pPr>
             <a:r>
-              <a:t>Green (#32E875)</a:t>
-            </a:r>
-          </a:p>
-          <a:p>
-            <a:pPr>
-              <a:spcBef>
-                <a:spcPts val="1000"/>
-              </a:spcBef>
-              <a:defRPr sz="1300">
-                <a:solidFill>
-                  <a:srgbClr val="1E293B"/>
-                </a:solidFill>
-                <a:latin typeface="Arial"/>
-              </a:defRPr>
-            </a:pPr>
-            <a:r>
               <a:t>Resting heart rate inside your normal comfort zone. Gentle breathing animation.</a:t>
             </a:r>
           </a:p>
@@ -4157,14 +4137,14 @@
       </p:sp>
       <p:sp>
         <p:nvSpPr>
-          <p:cNvPr id="9" name="Rectangle 8"/>
+          <p:cNvPr id="8" name="Rectangle 7"/>
           <p:cNvSpPr/>
           <p:nvPr/>
         </p:nvSpPr>
         <p:spPr>
           <a:xfrm>
-            <a:off x="2962655" y="2066544"/>
-            <a:ext cx="2057400" cy="4114800"/>
+            <a:off x="2962655" y="2020824"/>
+            <a:ext cx="2029968" cy="4389120"/>
           </a:xfrm>
           <a:prstGeom prst="rect">
             <a:avLst/>
@@ -4200,14 +4180,14 @@
       </p:sp>
       <p:sp>
         <p:nvSpPr>
-          <p:cNvPr id="10" name="Rectangle 9"/>
+          <p:cNvPr id="9" name="Rectangle 8"/>
           <p:cNvSpPr/>
           <p:nvPr/>
         </p:nvSpPr>
         <p:spPr>
           <a:xfrm>
-            <a:off x="2907791" y="2011680"/>
-            <a:ext cx="2057400" cy="4114800"/>
+            <a:off x="2907791" y="1965960"/>
+            <a:ext cx="2029968" cy="4389120"/>
           </a:xfrm>
           <a:prstGeom prst="rect">
             <a:avLst/>
@@ -4245,14 +4225,14 @@
       </p:sp>
       <p:sp>
         <p:nvSpPr>
-          <p:cNvPr id="11" name="TextBox 10"/>
+          <p:cNvPr id="10" name="TextBox 9"/>
           <p:cNvSpPr txBox="1"/>
           <p:nvPr/>
         </p:nvSpPr>
         <p:spPr>
           <a:xfrm>
-            <a:off x="3044951" y="2194560"/>
-            <a:ext cx="1783080" cy="3749039"/>
+            <a:off x="3035807" y="2130552"/>
+            <a:ext cx="1773936" cy="4059936"/>
           </a:xfrm>
           <a:prstGeom prst="rect">
             <a:avLst/>
@@ -4260,13 +4240,13 @@
           <a:noFill/>
         </p:spPr>
         <p:txBody>
-          <a:bodyPr wrap="square">
+          <a:bodyPr wrap="square" tIns="25400" bIns="25400" lIns="25400" rIns="25400">
             <a:spAutoFit/>
           </a:bodyPr>
           <a:lstStyle/>
           <a:p>
             <a:pPr>
-              <a:defRPr sz="1500" b="1">
+              <a:defRPr sz="1350" b="1">
                 <a:solidFill>
                   <a:srgbClr val="111111"/>
                 </a:solidFill>
@@ -4275,6 +4255,22 @@
             </a:pPr>
             <a:r>
               <a:t>LEARNING</a:t>
+            </a:r>
+          </a:p>
+          <a:p>
+            <a:pPr>
+              <a:spcBef>
+                <a:spcPts val="400"/>
+              </a:spcBef>
+              <a:defRPr sz="1100" b="1">
+                <a:solidFill>
+                  <a:srgbClr val="1E293B"/>
+                </a:solidFill>
+                <a:latin typeface="Arial"/>
+              </a:defRPr>
+            </a:pPr>
+            <a:r>
+              <a:t>Lavender (#C084FC)</a:t>
             </a:r>
           </a:p>
           <a:p>
@@ -4282,7 +4278,7 @@
               <a:spcBef>
                 <a:spcPts val="600"/>
               </a:spcBef>
-              <a:defRPr sz="1300" b="1">
+              <a:defRPr sz="1050">
                 <a:solidFill>
                   <a:srgbClr val="1E293B"/>
                 </a:solidFill>
@@ -4290,22 +4286,6 @@
               </a:defRPr>
             </a:pPr>
             <a:r>
-              <a:t>Lavender (#C084FC)</a:t>
-            </a:r>
-          </a:p>
-          <a:p>
-            <a:pPr>
-              <a:spcBef>
-                <a:spcPts val="1000"/>
-              </a:spcBef>
-              <a:defRPr sz="1300">
-                <a:solidFill>
-                  <a:srgbClr val="1E293B"/>
-                </a:solidFill>
-                <a:latin typeface="Arial"/>
-              </a:defRPr>
-            </a:pPr>
-            <a:r>
               <a:t>Observation Mode active (Day 1-3). Learning your daily habits.</a:t>
             </a:r>
           </a:p>
@@ -4313,14 +4293,14 @@
       </p:sp>
       <p:sp>
         <p:nvSpPr>
-          <p:cNvPr id="12" name="Rectangle 11"/>
+          <p:cNvPr id="11" name="Rectangle 10"/>
           <p:cNvSpPr/>
           <p:nvPr/>
         </p:nvSpPr>
         <p:spPr>
           <a:xfrm>
-            <a:off x="5138928" y="2066544"/>
-            <a:ext cx="2057400" cy="4114800"/>
+            <a:off x="5138928" y="2020824"/>
+            <a:ext cx="2029968" cy="4389120"/>
           </a:xfrm>
           <a:prstGeom prst="rect">
             <a:avLst/>
@@ -4356,14 +4336,14 @@
       </p:sp>
       <p:sp>
         <p:nvSpPr>
-          <p:cNvPr id="13" name="Rectangle 12"/>
+          <p:cNvPr id="12" name="Rectangle 11"/>
           <p:cNvSpPr/>
           <p:nvPr/>
         </p:nvSpPr>
         <p:spPr>
           <a:xfrm>
-            <a:off x="5084064" y="2011680"/>
-            <a:ext cx="2057400" cy="4114800"/>
+            <a:off x="5084064" y="1965960"/>
+            <a:ext cx="2029968" cy="4389120"/>
           </a:xfrm>
           <a:prstGeom prst="rect">
             <a:avLst/>
@@ -4401,14 +4381,14 @@
       </p:sp>
       <p:sp>
         <p:nvSpPr>
-          <p:cNvPr id="14" name="TextBox 13"/>
+          <p:cNvPr id="13" name="TextBox 12"/>
           <p:cNvSpPr txBox="1"/>
           <p:nvPr/>
         </p:nvSpPr>
         <p:spPr>
           <a:xfrm>
-            <a:off x="5221224" y="2194560"/>
-            <a:ext cx="1783080" cy="3749039"/>
+            <a:off x="5212080" y="2130552"/>
+            <a:ext cx="1773936" cy="4059936"/>
           </a:xfrm>
           <a:prstGeom prst="rect">
             <a:avLst/>
@@ -4416,13 +4396,13 @@
           <a:noFill/>
         </p:spPr>
         <p:txBody>
-          <a:bodyPr wrap="square">
+          <a:bodyPr wrap="square" tIns="25400" bIns="25400" lIns="25400" rIns="25400">
             <a:spAutoFit/>
           </a:bodyPr>
           <a:lstStyle/>
           <a:p>
             <a:pPr>
-              <a:defRPr sz="1500" b="1">
+              <a:defRPr sz="1350" b="1">
                 <a:solidFill>
                   <a:srgbClr val="111111"/>
                 </a:solidFill>
@@ -4431,6 +4411,22 @@
             </a:pPr>
             <a:r>
               <a:t>ACTIVE</a:t>
+            </a:r>
+          </a:p>
+          <a:p>
+            <a:pPr>
+              <a:spcBef>
+                <a:spcPts val="400"/>
+              </a:spcBef>
+              <a:defRPr sz="1100" b="1">
+                <a:solidFill>
+                  <a:srgbClr val="1E293B"/>
+                </a:solidFill>
+                <a:latin typeface="Arial"/>
+              </a:defRPr>
+            </a:pPr>
+            <a:r>
+              <a:t>Yellow (#FFD027)</a:t>
             </a:r>
           </a:p>
           <a:p>
@@ -4438,7 +4434,7 @@
               <a:spcBef>
                 <a:spcPts val="600"/>
               </a:spcBef>
-              <a:defRPr sz="1300" b="1">
+              <a:defRPr sz="1050">
                 <a:solidFill>
                   <a:srgbClr val="1E293B"/>
                 </a:solidFill>
@@ -4446,22 +4442,6 @@
               </a:defRPr>
             </a:pPr>
             <a:r>
-              <a:t>Yellow (#FFD027)</a:t>
-            </a:r>
-          </a:p>
-          <a:p>
-            <a:pPr>
-              <a:spcBef>
-                <a:spcPts val="1000"/>
-              </a:spcBef>
-              <a:defRPr sz="1300">
-                <a:solidFill>
-                  <a:srgbClr val="1E293B"/>
-                </a:solidFill>
-                <a:latin typeface="Arial"/>
-              </a:defRPr>
-            </a:pPr>
-            <a:r>
               <a:t>Movement detected. Awen celebrates healthy exercise and walking.</a:t>
             </a:r>
           </a:p>
@@ -4469,14 +4449,14 @@
       </p:sp>
       <p:sp>
         <p:nvSpPr>
-          <p:cNvPr id="15" name="Rectangle 14"/>
+          <p:cNvPr id="14" name="Rectangle 13"/>
           <p:cNvSpPr/>
           <p:nvPr/>
         </p:nvSpPr>
         <p:spPr>
           <a:xfrm>
-            <a:off x="7315200" y="2066544"/>
-            <a:ext cx="2057400" cy="4114800"/>
+            <a:off x="7315200" y="2020824"/>
+            <a:ext cx="2029968" cy="4389120"/>
           </a:xfrm>
           <a:prstGeom prst="rect">
             <a:avLst/>
@@ -4512,14 +4492,14 @@
       </p:sp>
       <p:sp>
         <p:nvSpPr>
-          <p:cNvPr id="16" name="Rectangle 15"/>
+          <p:cNvPr id="15" name="Rectangle 14"/>
           <p:cNvSpPr/>
           <p:nvPr/>
         </p:nvSpPr>
         <p:spPr>
           <a:xfrm>
-            <a:off x="7260336" y="2011680"/>
-            <a:ext cx="2057400" cy="4114800"/>
+            <a:off x="7260336" y="1965960"/>
+            <a:ext cx="2029968" cy="4389120"/>
           </a:xfrm>
           <a:prstGeom prst="rect">
             <a:avLst/>
@@ -4557,14 +4537,14 @@
       </p:sp>
       <p:sp>
         <p:nvSpPr>
-          <p:cNvPr id="17" name="TextBox 16"/>
+          <p:cNvPr id="16" name="TextBox 15"/>
           <p:cNvSpPr txBox="1"/>
           <p:nvPr/>
         </p:nvSpPr>
         <p:spPr>
           <a:xfrm>
-            <a:off x="7397496" y="2194560"/>
-            <a:ext cx="1783080" cy="3749039"/>
+            <a:off x="7388352" y="2130552"/>
+            <a:ext cx="1773936" cy="4059936"/>
           </a:xfrm>
           <a:prstGeom prst="rect">
             <a:avLst/>
@@ -4572,13 +4552,13 @@
           <a:noFill/>
         </p:spPr>
         <p:txBody>
-          <a:bodyPr wrap="square">
+          <a:bodyPr wrap="square" tIns="25400" bIns="25400" lIns="25400" rIns="25400">
             <a:spAutoFit/>
           </a:bodyPr>
           <a:lstStyle/>
           <a:p>
             <a:pPr>
-              <a:defRPr sz="1500" b="1">
+              <a:defRPr sz="1350" b="1">
                 <a:solidFill>
                   <a:srgbClr val="111111"/>
                 </a:solidFill>
@@ -4587,6 +4567,22 @@
             </a:pPr>
             <a:r>
               <a:t>WATCHFUL</a:t>
+            </a:r>
+          </a:p>
+          <a:p>
+            <a:pPr>
+              <a:spcBef>
+                <a:spcPts val="400"/>
+              </a:spcBef>
+              <a:defRPr sz="1100" b="1">
+                <a:solidFill>
+                  <a:srgbClr val="1E293B"/>
+                </a:solidFill>
+                <a:latin typeface="Arial"/>
+              </a:defRPr>
+            </a:pPr>
+            <a:r>
+              <a:t>Amber (#F97316)</a:t>
             </a:r>
           </a:p>
           <a:p>
@@ -4594,7 +4590,7 @@
               <a:spcBef>
                 <a:spcPts val="600"/>
               </a:spcBef>
-              <a:defRPr sz="1300" b="1">
+              <a:defRPr sz="1050">
                 <a:solidFill>
                   <a:srgbClr val="1E293B"/>
                 </a:solidFill>
@@ -4602,22 +4598,6 @@
               </a:defRPr>
             </a:pPr>
             <a:r>
-              <a:t>Amber (#F97316)</a:t>
-            </a:r>
-          </a:p>
-          <a:p>
-            <a:pPr>
-              <a:spcBef>
-                <a:spcPts val="1000"/>
-              </a:spcBef>
-              <a:defRPr sz="1300">
-                <a:solidFill>
-                  <a:srgbClr val="1E293B"/>
-                </a:solidFill>
-                <a:latin typeface="Arial"/>
-              </a:defRPr>
-            </a:pPr>
-            <a:r>
               <a:t>Resting pulse is high without motion. Awen offers a calm breathing check-in.</a:t>
             </a:r>
           </a:p>
@@ -4625,14 +4605,14 @@
       </p:sp>
       <p:sp>
         <p:nvSpPr>
-          <p:cNvPr id="18" name="Rectangle 17"/>
+          <p:cNvPr id="17" name="Rectangle 16"/>
           <p:cNvSpPr/>
           <p:nvPr/>
         </p:nvSpPr>
         <p:spPr>
           <a:xfrm>
-            <a:off x="9491472" y="2066544"/>
-            <a:ext cx="2057400" cy="4114800"/>
+            <a:off x="9491472" y="2020824"/>
+            <a:ext cx="2029968" cy="4389120"/>
           </a:xfrm>
           <a:prstGeom prst="rect">
             <a:avLst/>
@@ -4668,14 +4648,14 @@
       </p:sp>
       <p:sp>
         <p:nvSpPr>
-          <p:cNvPr id="19" name="Rectangle 18"/>
+          <p:cNvPr id="18" name="Rectangle 17"/>
           <p:cNvSpPr/>
           <p:nvPr/>
         </p:nvSpPr>
         <p:spPr>
           <a:xfrm>
-            <a:off x="9436608" y="2011680"/>
-            <a:ext cx="2057400" cy="4114800"/>
+            <a:off x="9436608" y="1965960"/>
+            <a:ext cx="2029968" cy="4389120"/>
           </a:xfrm>
           <a:prstGeom prst="rect">
             <a:avLst/>
@@ -4713,14 +4693,14 @@
       </p:sp>
       <p:sp>
         <p:nvSpPr>
-          <p:cNvPr id="20" name="TextBox 19"/>
+          <p:cNvPr id="19" name="TextBox 18"/>
           <p:cNvSpPr txBox="1"/>
           <p:nvPr/>
         </p:nvSpPr>
         <p:spPr>
           <a:xfrm>
-            <a:off x="9573768" y="2194560"/>
-            <a:ext cx="1783080" cy="3749039"/>
+            <a:off x="9564624" y="2130552"/>
+            <a:ext cx="1773936" cy="4059936"/>
           </a:xfrm>
           <a:prstGeom prst="rect">
             <a:avLst/>
@@ -4728,13 +4708,13 @@
           <a:noFill/>
         </p:spPr>
         <p:txBody>
-          <a:bodyPr wrap="square">
+          <a:bodyPr wrap="square" tIns="25400" bIns="25400" lIns="25400" rIns="25400">
             <a:spAutoFit/>
           </a:bodyPr>
           <a:lstStyle/>
           <a:p>
             <a:pPr>
-              <a:defRPr sz="1500" b="1">
+              <a:defRPr sz="1350" b="1">
                 <a:solidFill>
                   <a:srgbClr val="111111"/>
                 </a:solidFill>
@@ -4743,6 +4723,22 @@
             </a:pPr>
             <a:r>
               <a:t>WIND DOWN</a:t>
+            </a:r>
+          </a:p>
+          <a:p>
+            <a:pPr>
+              <a:spcBef>
+                <a:spcPts val="400"/>
+              </a:spcBef>
+              <a:defRPr sz="1100" b="1">
+                <a:solidFill>
+                  <a:srgbClr val="1E293B"/>
+                </a:solidFill>
+                <a:latin typeface="Arial"/>
+              </a:defRPr>
+            </a:pPr>
+            <a:r>
+              <a:t>Indigo (#818CF8)</a:t>
             </a:r>
           </a:p>
           <a:p>
@@ -4750,23 +4746,7 @@
               <a:spcBef>
                 <a:spcPts val="600"/>
               </a:spcBef>
-              <a:defRPr sz="1300" b="1">
-                <a:solidFill>
-                  <a:srgbClr val="1E293B"/>
-                </a:solidFill>
-                <a:latin typeface="Arial"/>
-              </a:defRPr>
-            </a:pPr>
-            <a:r>
-              <a:t>Indigo (#818CF8)</a:t>
-            </a:r>
-          </a:p>
-          <a:p>
-            <a:pPr>
-              <a:spcBef>
-                <a:spcPts val="1000"/>
-              </a:spcBef>
-              <a:defRPr sz="1300">
+              <a:defRPr sz="1050">
                 <a:solidFill>
                   <a:srgbClr val="1E293B"/>
                 </a:solidFill>
@@ -4848,8 +4828,8 @@
         </p:nvSpPr>
         <p:spPr>
           <a:xfrm>
-            <a:off x="731520" y="365760"/>
-            <a:ext cx="2468880" cy="384048"/>
+            <a:off x="731520" y="320040"/>
+            <a:ext cx="2103120" cy="320040"/>
           </a:xfrm>
           <a:prstGeom prst="rect">
             <a:avLst/>
@@ -4878,11 +4858,11 @@
           </a:fontRef>
         </p:style>
         <p:txBody>
-          <a:bodyPr rtlCol="0" anchor="ctr"/>
+          <a:bodyPr rtlCol="0" anchor="ctr" wrap="none" tIns="25400" bIns="25400" lIns="50800" rIns="50800"/>
           <a:lstStyle/>
           <a:p>
             <a:pPr algn="ctr">
-              <a:defRPr sz="1100" b="1">
+              <a:defRPr sz="1050" b="1">
                 <a:solidFill>
                   <a:srgbClr val="111111"/>
                 </a:solidFill>
@@ -4903,8 +4883,8 @@
         </p:nvSpPr>
         <p:spPr>
           <a:xfrm>
-            <a:off x="731520" y="804672"/>
-            <a:ext cx="10698480" cy="594360"/>
+            <a:off x="731520" y="713232"/>
+            <a:ext cx="10728655" cy="1143000"/>
           </a:xfrm>
           <a:prstGeom prst="rect">
             <a:avLst/>
@@ -4912,13 +4892,13 @@
           <a:noFill/>
         </p:spPr>
         <p:txBody>
-          <a:bodyPr wrap="square">
+          <a:bodyPr wrap="square" tIns="0" bIns="0" lIns="0" rIns="0">
             <a:spAutoFit/>
           </a:bodyPr>
           <a:lstStyle/>
           <a:p>
             <a:pPr>
-              <a:defRPr sz="2800" b="1">
+              <a:defRPr sz="2400" b="1">
                 <a:solidFill>
                   <a:srgbClr val="111111"/>
                 </a:solidFill>
@@ -4929,32 +4909,12 @@
               <a:t>The 7 Clean Screens in Our Application</a:t>
             </a:r>
           </a:p>
-        </p:txBody>
-      </p:sp>
-      <p:sp>
-        <p:nvSpPr>
-          <p:cNvPr id="5" name="TextBox 4"/>
-          <p:cNvSpPr txBox="1"/>
-          <p:nvPr/>
-        </p:nvSpPr>
-        <p:spPr>
-          <a:xfrm>
-            <a:off x="731520" y="1371600"/>
-            <a:ext cx="10698480" cy="411480"/>
-          </a:xfrm>
-          <a:prstGeom prst="rect">
-            <a:avLst/>
-          </a:prstGeom>
-          <a:noFill/>
-        </p:spPr>
-        <p:txBody>
-          <a:bodyPr wrap="square">
-            <a:spAutoFit/>
-          </a:bodyPr>
-          <a:lstStyle/>
-          <a:p>
-            <a:pPr>
-              <a:defRPr sz="1500">
+          <a:p>
+            <a:pPr>
+              <a:spcBef>
+                <a:spcPts val="300"/>
+              </a:spcBef>
+              <a:defRPr sz="1300">
                 <a:solidFill>
                   <a:srgbClr val="1E293B"/>
                 </a:solidFill>
@@ -4969,14 +4929,14 @@
       </p:sp>
       <p:sp>
         <p:nvSpPr>
-          <p:cNvPr id="6" name="Rectangle 5"/>
+          <p:cNvPr id="5" name="Rectangle 4"/>
           <p:cNvSpPr/>
           <p:nvPr/>
         </p:nvSpPr>
         <p:spPr>
           <a:xfrm>
-            <a:off x="786384" y="2066544"/>
-            <a:ext cx="3474720" cy="2057400"/>
+            <a:off x="786384" y="2020824"/>
+            <a:ext cx="3429000" cy="2057400"/>
           </a:xfrm>
           <a:prstGeom prst="rect">
             <a:avLst/>
@@ -5012,14 +4972,14 @@
       </p:sp>
       <p:sp>
         <p:nvSpPr>
-          <p:cNvPr id="7" name="Rectangle 6"/>
+          <p:cNvPr id="6" name="Rectangle 5"/>
           <p:cNvSpPr/>
           <p:nvPr/>
         </p:nvSpPr>
         <p:spPr>
           <a:xfrm>
-            <a:off x="731520" y="2011680"/>
-            <a:ext cx="3474720" cy="2057400"/>
+            <a:off x="731520" y="1965960"/>
+            <a:ext cx="3429000" cy="2057400"/>
           </a:xfrm>
           <a:prstGeom prst="rect">
             <a:avLst/>
@@ -5057,14 +5017,14 @@
       </p:sp>
       <p:sp>
         <p:nvSpPr>
-          <p:cNvPr id="8" name="TextBox 7"/>
+          <p:cNvPr id="7" name="TextBox 6"/>
           <p:cNvSpPr txBox="1"/>
           <p:nvPr/>
         </p:nvSpPr>
         <p:spPr>
           <a:xfrm>
-            <a:off x="914400" y="2176272"/>
-            <a:ext cx="3108960" cy="1691640"/>
+            <a:off x="914400" y="2130552"/>
+            <a:ext cx="3063240" cy="1691640"/>
           </a:xfrm>
           <a:prstGeom prst="rect">
             <a:avLst/>
@@ -5072,13 +5032,13 @@
           <a:noFill/>
         </p:spPr>
         <p:txBody>
-          <a:bodyPr wrap="square">
+          <a:bodyPr wrap="square" tIns="25400" bIns="25400" lIns="25400" rIns="25400">
             <a:spAutoFit/>
           </a:bodyPr>
           <a:lstStyle/>
           <a:p>
             <a:pPr>
-              <a:defRPr sz="1700" b="1">
+              <a:defRPr sz="1400" b="1">
                 <a:solidFill>
                   <a:srgbClr val="111111"/>
                 </a:solidFill>
@@ -5092,9 +5052,9 @@
           <a:p>
             <a:pPr>
               <a:spcBef>
-                <a:spcPts val="600"/>
+                <a:spcPts val="400"/>
               </a:spcBef>
-              <a:defRPr sz="1350">
+              <a:defRPr sz="1100">
                 <a:solidFill>
                   <a:srgbClr val="1E293B"/>
                 </a:solidFill>
@@ -5109,14 +5069,14 @@
       </p:sp>
       <p:sp>
         <p:nvSpPr>
-          <p:cNvPr id="9" name="Rectangle 8"/>
+          <p:cNvPr id="8" name="Rectangle 7"/>
           <p:cNvSpPr/>
           <p:nvPr/>
         </p:nvSpPr>
         <p:spPr>
           <a:xfrm>
-            <a:off x="4398264" y="2066544"/>
-            <a:ext cx="3474720" cy="2057400"/>
+            <a:off x="4398264" y="2020824"/>
+            <a:ext cx="3429000" cy="2057400"/>
           </a:xfrm>
           <a:prstGeom prst="rect">
             <a:avLst/>
@@ -5152,14 +5112,14 @@
       </p:sp>
       <p:sp>
         <p:nvSpPr>
-          <p:cNvPr id="10" name="Rectangle 9"/>
+          <p:cNvPr id="9" name="Rectangle 8"/>
           <p:cNvSpPr/>
           <p:nvPr/>
         </p:nvSpPr>
         <p:spPr>
           <a:xfrm>
-            <a:off x="4343400" y="2011680"/>
-            <a:ext cx="3474720" cy="2057400"/>
+            <a:off x="4343400" y="1965960"/>
+            <a:ext cx="3429000" cy="2057400"/>
           </a:xfrm>
           <a:prstGeom prst="rect">
             <a:avLst/>
@@ -5197,14 +5157,14 @@
       </p:sp>
       <p:sp>
         <p:nvSpPr>
-          <p:cNvPr id="11" name="TextBox 10"/>
+          <p:cNvPr id="10" name="TextBox 9"/>
           <p:cNvSpPr txBox="1"/>
           <p:nvPr/>
         </p:nvSpPr>
         <p:spPr>
           <a:xfrm>
-            <a:off x="4526280" y="2176272"/>
-            <a:ext cx="3108960" cy="1691640"/>
+            <a:off x="4526280" y="2130552"/>
+            <a:ext cx="3063240" cy="1691640"/>
           </a:xfrm>
           <a:prstGeom prst="rect">
             <a:avLst/>
@@ -5212,13 +5172,13 @@
           <a:noFill/>
         </p:spPr>
         <p:txBody>
-          <a:bodyPr wrap="square">
+          <a:bodyPr wrap="square" tIns="25400" bIns="25400" lIns="25400" rIns="25400">
             <a:spAutoFit/>
           </a:bodyPr>
           <a:lstStyle/>
           <a:p>
             <a:pPr>
-              <a:defRPr sz="1700" b="1">
+              <a:defRPr sz="1400" b="1">
                 <a:solidFill>
                   <a:srgbClr val="111111"/>
                 </a:solidFill>
@@ -5232,9 +5192,9 @@
           <a:p>
             <a:pPr>
               <a:spcBef>
-                <a:spcPts val="600"/>
+                <a:spcPts val="400"/>
               </a:spcBef>
-              <a:defRPr sz="1350">
+              <a:defRPr sz="1100">
                 <a:solidFill>
                   <a:srgbClr val="1E293B"/>
                 </a:solidFill>
@@ -5249,14 +5209,14 @@
       </p:sp>
       <p:sp>
         <p:nvSpPr>
-          <p:cNvPr id="12" name="Rectangle 11"/>
+          <p:cNvPr id="11" name="Rectangle 10"/>
           <p:cNvSpPr/>
           <p:nvPr/>
         </p:nvSpPr>
         <p:spPr>
           <a:xfrm>
-            <a:off x="8010144" y="2066544"/>
-            <a:ext cx="3474720" cy="2057400"/>
+            <a:off x="8010144" y="2020824"/>
+            <a:ext cx="3429000" cy="2057400"/>
           </a:xfrm>
           <a:prstGeom prst="rect">
             <a:avLst/>
@@ -5292,14 +5252,14 @@
       </p:sp>
       <p:sp>
         <p:nvSpPr>
-          <p:cNvPr id="13" name="Rectangle 12"/>
+          <p:cNvPr id="12" name="Rectangle 11"/>
           <p:cNvSpPr/>
           <p:nvPr/>
         </p:nvSpPr>
         <p:spPr>
           <a:xfrm>
-            <a:off x="7955280" y="2011680"/>
-            <a:ext cx="3474720" cy="2057400"/>
+            <a:off x="7955280" y="1965960"/>
+            <a:ext cx="3429000" cy="2057400"/>
           </a:xfrm>
           <a:prstGeom prst="rect">
             <a:avLst/>
@@ -5337,14 +5297,14 @@
       </p:sp>
       <p:sp>
         <p:nvSpPr>
-          <p:cNvPr id="14" name="TextBox 13"/>
+          <p:cNvPr id="13" name="TextBox 12"/>
           <p:cNvSpPr txBox="1"/>
           <p:nvPr/>
         </p:nvSpPr>
         <p:spPr>
           <a:xfrm>
-            <a:off x="8138160" y="2176272"/>
-            <a:ext cx="3108960" cy="1691640"/>
+            <a:off x="8138160" y="2130552"/>
+            <a:ext cx="3063240" cy="1691640"/>
           </a:xfrm>
           <a:prstGeom prst="rect">
             <a:avLst/>
@@ -5352,13 +5312,13 @@
           <a:noFill/>
         </p:spPr>
         <p:txBody>
-          <a:bodyPr wrap="square">
+          <a:bodyPr wrap="square" tIns="25400" bIns="25400" lIns="25400" rIns="25400">
             <a:spAutoFit/>
           </a:bodyPr>
           <a:lstStyle/>
           <a:p>
             <a:pPr>
-              <a:defRPr sz="1700" b="1">
+              <a:defRPr sz="1400" b="1">
                 <a:solidFill>
                   <a:srgbClr val="111111"/>
                 </a:solidFill>
@@ -5372,9 +5332,9 @@
           <a:p>
             <a:pPr>
               <a:spcBef>
-                <a:spcPts val="600"/>
+                <a:spcPts val="400"/>
               </a:spcBef>
-              <a:defRPr sz="1350">
+              <a:defRPr sz="1100">
                 <a:solidFill>
                   <a:srgbClr val="1E293B"/>
                 </a:solidFill>
@@ -5389,14 +5349,14 @@
       </p:sp>
       <p:sp>
         <p:nvSpPr>
-          <p:cNvPr id="15" name="Rectangle 14"/>
+          <p:cNvPr id="14" name="Rectangle 13"/>
           <p:cNvSpPr/>
           <p:nvPr/>
         </p:nvSpPr>
         <p:spPr>
           <a:xfrm>
-            <a:off x="786384" y="4306824"/>
-            <a:ext cx="3474720" cy="2057400"/>
+            <a:off x="786384" y="4261104"/>
+            <a:ext cx="3429000" cy="2057400"/>
           </a:xfrm>
           <a:prstGeom prst="rect">
             <a:avLst/>
@@ -5432,14 +5392,14 @@
       </p:sp>
       <p:sp>
         <p:nvSpPr>
-          <p:cNvPr id="16" name="Rectangle 15"/>
+          <p:cNvPr id="15" name="Rectangle 14"/>
           <p:cNvSpPr/>
           <p:nvPr/>
         </p:nvSpPr>
         <p:spPr>
           <a:xfrm>
-            <a:off x="731520" y="4251960"/>
-            <a:ext cx="3474720" cy="2057400"/>
+            <a:off x="731520" y="4206240"/>
+            <a:ext cx="3429000" cy="2057400"/>
           </a:xfrm>
           <a:prstGeom prst="rect">
             <a:avLst/>
@@ -5477,14 +5437,14 @@
       </p:sp>
       <p:sp>
         <p:nvSpPr>
-          <p:cNvPr id="17" name="TextBox 16"/>
+          <p:cNvPr id="16" name="TextBox 15"/>
           <p:cNvSpPr txBox="1"/>
           <p:nvPr/>
         </p:nvSpPr>
         <p:spPr>
           <a:xfrm>
-            <a:off x="914400" y="4416552"/>
-            <a:ext cx="3108960" cy="1691640"/>
+            <a:off x="914400" y="4370832"/>
+            <a:ext cx="3063240" cy="1691640"/>
           </a:xfrm>
           <a:prstGeom prst="rect">
             <a:avLst/>
@@ -5492,13 +5452,13 @@
           <a:noFill/>
         </p:spPr>
         <p:txBody>
-          <a:bodyPr wrap="square">
+          <a:bodyPr wrap="square" tIns="25400" bIns="25400" lIns="25400" rIns="25400">
             <a:spAutoFit/>
           </a:bodyPr>
           <a:lstStyle/>
           <a:p>
             <a:pPr>
-              <a:defRPr sz="1700" b="1">
+              <a:defRPr sz="1400" b="1">
                 <a:solidFill>
                   <a:srgbClr val="111111"/>
                 </a:solidFill>
@@ -5512,9 +5472,9 @@
           <a:p>
             <a:pPr>
               <a:spcBef>
-                <a:spcPts val="600"/>
+                <a:spcPts val="400"/>
               </a:spcBef>
-              <a:defRPr sz="1350">
+              <a:defRPr sz="1100">
                 <a:solidFill>
                   <a:srgbClr val="1E293B"/>
                 </a:solidFill>
@@ -5529,14 +5489,14 @@
       </p:sp>
       <p:sp>
         <p:nvSpPr>
-          <p:cNvPr id="18" name="Rectangle 17"/>
+          <p:cNvPr id="17" name="Rectangle 16"/>
           <p:cNvSpPr/>
           <p:nvPr/>
         </p:nvSpPr>
         <p:spPr>
           <a:xfrm>
-            <a:off x="4398264" y="4306824"/>
-            <a:ext cx="3474720" cy="2057400"/>
+            <a:off x="4398264" y="4261104"/>
+            <a:ext cx="3429000" cy="2057400"/>
           </a:xfrm>
           <a:prstGeom prst="rect">
             <a:avLst/>
@@ -5572,14 +5532,14 @@
       </p:sp>
       <p:sp>
         <p:nvSpPr>
-          <p:cNvPr id="19" name="Rectangle 18"/>
+          <p:cNvPr id="18" name="Rectangle 17"/>
           <p:cNvSpPr/>
           <p:nvPr/>
         </p:nvSpPr>
         <p:spPr>
           <a:xfrm>
-            <a:off x="4343400" y="4251960"/>
-            <a:ext cx="3474720" cy="2057400"/>
+            <a:off x="4343400" y="4206240"/>
+            <a:ext cx="3429000" cy="2057400"/>
           </a:xfrm>
           <a:prstGeom prst="rect">
             <a:avLst/>
@@ -5617,14 +5577,14 @@
       </p:sp>
       <p:sp>
         <p:nvSpPr>
-          <p:cNvPr id="20" name="TextBox 19"/>
+          <p:cNvPr id="19" name="TextBox 18"/>
           <p:cNvSpPr txBox="1"/>
           <p:nvPr/>
         </p:nvSpPr>
         <p:spPr>
           <a:xfrm>
-            <a:off x="4526280" y="4416552"/>
-            <a:ext cx="3108960" cy="1691640"/>
+            <a:off x="4526280" y="4370832"/>
+            <a:ext cx="3063240" cy="1691640"/>
           </a:xfrm>
           <a:prstGeom prst="rect">
             <a:avLst/>
@@ -5632,13 +5592,13 @@
           <a:noFill/>
         </p:spPr>
         <p:txBody>
-          <a:bodyPr wrap="square">
+          <a:bodyPr wrap="square" tIns="25400" bIns="25400" lIns="25400" rIns="25400">
             <a:spAutoFit/>
           </a:bodyPr>
           <a:lstStyle/>
           <a:p>
             <a:pPr>
-              <a:defRPr sz="1700" b="1">
+              <a:defRPr sz="1400" b="1">
                 <a:solidFill>
                   <a:srgbClr val="111111"/>
                 </a:solidFill>
@@ -5652,9 +5612,9 @@
           <a:p>
             <a:pPr>
               <a:spcBef>
-                <a:spcPts val="600"/>
+                <a:spcPts val="400"/>
               </a:spcBef>
-              <a:defRPr sz="1350">
+              <a:defRPr sz="1100">
                 <a:solidFill>
                   <a:srgbClr val="1E293B"/>
                 </a:solidFill>
@@ -5662,21 +5622,21 @@
               </a:defRPr>
             </a:pPr>
             <a:r>
-              <a:t>Live ESP32 telemetry inspector, Wi-Fi configuration (172.20.168.254), and USB serial monitor.</a:t>
-            </a:r>
-          </a:p>
-        </p:txBody>
-      </p:sp>
-      <p:sp>
-        <p:nvSpPr>
-          <p:cNvPr id="21" name="Rectangle 20"/>
+              <a:t>Live ESP32 telemetry inspector, Wi-Fi configuration (10.201.146.254), and USB serial monitor.</a:t>
+            </a:r>
+          </a:p>
+        </p:txBody>
+      </p:sp>
+      <p:sp>
+        <p:nvSpPr>
+          <p:cNvPr id="20" name="Rectangle 19"/>
           <p:cNvSpPr/>
           <p:nvPr/>
         </p:nvSpPr>
         <p:spPr>
           <a:xfrm>
-            <a:off x="8010144" y="4306824"/>
-            <a:ext cx="3474720" cy="2057400"/>
+            <a:off x="8010144" y="4261104"/>
+            <a:ext cx="3429000" cy="2057400"/>
           </a:xfrm>
           <a:prstGeom prst="rect">
             <a:avLst/>
@@ -5712,14 +5672,14 @@
       </p:sp>
       <p:sp>
         <p:nvSpPr>
-          <p:cNvPr id="22" name="Rectangle 21"/>
+          <p:cNvPr id="21" name="Rectangle 20"/>
           <p:cNvSpPr/>
           <p:nvPr/>
         </p:nvSpPr>
         <p:spPr>
           <a:xfrm>
-            <a:off x="7955280" y="4251960"/>
-            <a:ext cx="3474720" cy="2057400"/>
+            <a:off x="7955280" y="4206240"/>
+            <a:ext cx="3429000" cy="2057400"/>
           </a:xfrm>
           <a:prstGeom prst="rect">
             <a:avLst/>
@@ -5757,14 +5717,14 @@
       </p:sp>
       <p:sp>
         <p:nvSpPr>
-          <p:cNvPr id="23" name="TextBox 22"/>
+          <p:cNvPr id="22" name="TextBox 21"/>
           <p:cNvSpPr txBox="1"/>
           <p:nvPr/>
         </p:nvSpPr>
         <p:spPr>
           <a:xfrm>
-            <a:off x="8138160" y="4416552"/>
-            <a:ext cx="3108960" cy="1691640"/>
+            <a:off x="8138160" y="4370832"/>
+            <a:ext cx="3063240" cy="1691640"/>
           </a:xfrm>
           <a:prstGeom prst="rect">
             <a:avLst/>
@@ -5772,13 +5732,13 @@
           <a:noFill/>
         </p:spPr>
         <p:txBody>
-          <a:bodyPr wrap="square">
+          <a:bodyPr wrap="square" tIns="25400" bIns="25400" lIns="25400" rIns="25400">
             <a:spAutoFit/>
           </a:bodyPr>
           <a:lstStyle/>
           <a:p>
             <a:pPr>
-              <a:defRPr sz="1700" b="1">
+              <a:defRPr sz="1400" b="1">
                 <a:solidFill>
                   <a:srgbClr val="111111"/>
                 </a:solidFill>
@@ -5792,9 +5752,9 @@
           <a:p>
             <a:pPr>
               <a:spcBef>
-                <a:spcPts val="600"/>
+                <a:spcPts val="400"/>
               </a:spcBef>
-              <a:defRPr sz="1350">
+              <a:defRPr sz="1100">
                 <a:solidFill>
                   <a:srgbClr val="1E293B"/>
                 </a:solidFill>
@@ -5876,8 +5836,8 @@
         </p:nvSpPr>
         <p:spPr>
           <a:xfrm>
-            <a:off x="731520" y="365760"/>
-            <a:ext cx="2212848" cy="384048"/>
+            <a:off x="731520" y="320040"/>
+            <a:ext cx="1883664" cy="320040"/>
           </a:xfrm>
           <a:prstGeom prst="rect">
             <a:avLst/>
@@ -5906,11 +5866,11 @@
           </a:fontRef>
         </p:style>
         <p:txBody>
-          <a:bodyPr rtlCol="0" anchor="ctr"/>
+          <a:bodyPr rtlCol="0" anchor="ctr" wrap="none" tIns="25400" bIns="25400" lIns="50800" rIns="50800"/>
           <a:lstStyle/>
           <a:p>
             <a:pPr algn="ctr">
-              <a:defRPr sz="1100" b="1">
+              <a:defRPr sz="1050" b="1">
                 <a:solidFill>
                   <a:srgbClr val="111111"/>
                 </a:solidFill>
@@ -5931,8 +5891,8 @@
         </p:nvSpPr>
         <p:spPr>
           <a:xfrm>
-            <a:off x="731520" y="804672"/>
-            <a:ext cx="10698480" cy="594360"/>
+            <a:off x="731520" y="713232"/>
+            <a:ext cx="10728655" cy="1143000"/>
           </a:xfrm>
           <a:prstGeom prst="rect">
             <a:avLst/>
@@ -5940,13 +5900,13 @@
           <a:noFill/>
         </p:spPr>
         <p:txBody>
-          <a:bodyPr wrap="square">
+          <a:bodyPr wrap="square" tIns="0" bIns="0" lIns="0" rIns="0">
             <a:spAutoFit/>
           </a:bodyPr>
           <a:lstStyle/>
           <a:p>
             <a:pPr>
-              <a:defRPr sz="2800" b="1">
+              <a:defRPr sz="2400" b="1">
                 <a:solidFill>
                   <a:srgbClr val="111111"/>
                 </a:solidFill>
@@ -5957,32 +5917,12 @@
               <a:t>100% Private: Your Data Never Leaves Your Computer</a:t>
             </a:r>
           </a:p>
-        </p:txBody>
-      </p:sp>
-      <p:sp>
-        <p:nvSpPr>
-          <p:cNvPr id="5" name="TextBox 4"/>
-          <p:cNvSpPr txBox="1"/>
-          <p:nvPr/>
-        </p:nvSpPr>
-        <p:spPr>
-          <a:xfrm>
-            <a:off x="731520" y="1371600"/>
-            <a:ext cx="10698480" cy="411480"/>
-          </a:xfrm>
-          <a:prstGeom prst="rect">
-            <a:avLst/>
-          </a:prstGeom>
-          <a:noFill/>
-        </p:spPr>
-        <p:txBody>
-          <a:bodyPr wrap="square">
-            <a:spAutoFit/>
-          </a:bodyPr>
-          <a:lstStyle/>
-          <a:p>
-            <a:pPr>
-              <a:defRPr sz="1500">
+          <a:p>
+            <a:pPr>
+              <a:spcBef>
+                <a:spcPts val="300"/>
+              </a:spcBef>
+              <a:defRPr sz="1300">
                 <a:solidFill>
                   <a:srgbClr val="1E293B"/>
                 </a:solidFill>
@@ -5997,14 +5937,14 @@
       </p:sp>
       <p:sp>
         <p:nvSpPr>
-          <p:cNvPr id="6" name="Rectangle 5"/>
+          <p:cNvPr id="5" name="Rectangle 4"/>
           <p:cNvSpPr/>
           <p:nvPr/>
         </p:nvSpPr>
         <p:spPr>
           <a:xfrm>
-            <a:off x="786384" y="2066544"/>
-            <a:ext cx="3383280" cy="4114800"/>
+            <a:off x="786384" y="2020824"/>
+            <a:ext cx="3383280" cy="4389120"/>
           </a:xfrm>
           <a:prstGeom prst="rect">
             <a:avLst/>
@@ -6040,14 +5980,14 @@
       </p:sp>
       <p:sp>
         <p:nvSpPr>
-          <p:cNvPr id="7" name="Rectangle 6"/>
+          <p:cNvPr id="6" name="Rectangle 5"/>
           <p:cNvSpPr/>
           <p:nvPr/>
         </p:nvSpPr>
         <p:spPr>
           <a:xfrm>
-            <a:off x="731520" y="2011680"/>
-            <a:ext cx="3383280" cy="4114800"/>
+            <a:off x="731520" y="1965960"/>
+            <a:ext cx="3383280" cy="4389120"/>
           </a:xfrm>
           <a:prstGeom prst="rect">
             <a:avLst/>
@@ -6085,14 +6025,14 @@
       </p:sp>
       <p:sp>
         <p:nvSpPr>
-          <p:cNvPr id="8" name="TextBox 7"/>
+          <p:cNvPr id="7" name="TextBox 6"/>
           <p:cNvSpPr txBox="1"/>
           <p:nvPr/>
         </p:nvSpPr>
         <p:spPr>
           <a:xfrm>
-            <a:off x="960120" y="2240280"/>
-            <a:ext cx="2926080" cy="3657600"/>
+            <a:off x="932688" y="2167128"/>
+            <a:ext cx="2980944" cy="3986784"/>
           </a:xfrm>
           <a:prstGeom prst="rect">
             <a:avLst/>
@@ -6100,13 +6040,13 @@
           <a:noFill/>
         </p:spPr>
         <p:txBody>
-          <a:bodyPr wrap="square">
+          <a:bodyPr wrap="square" tIns="50800" bIns="50800" lIns="50800" rIns="50800">
             <a:spAutoFit/>
           </a:bodyPr>
           <a:lstStyle/>
           <a:p>
             <a:pPr>
-              <a:defRPr sz="1800" b="1">
+              <a:defRPr sz="1500" b="1">
                 <a:solidFill>
                   <a:srgbClr val="111111"/>
                 </a:solidFill>
@@ -6120,9 +6060,9 @@
           <a:p>
             <a:pPr>
               <a:spcBef>
-                <a:spcPts val="1200"/>
+                <a:spcPts val="600"/>
               </a:spcBef>
-              <a:defRPr sz="1400">
+              <a:defRPr sz="1150">
                 <a:solidFill>
                   <a:srgbClr val="1E293B"/>
                 </a:solidFill>
@@ -6132,11 +6072,35 @@
             <a:r>
               <a:t>• All sensor feeds and check-ins stay on your own laptop.</a:t>
             </a:r>
-            <a:br/>
+          </a:p>
+          <a:p>
+            <a:pPr>
+              <a:spcBef>
+                <a:spcPts val="600"/>
+              </a:spcBef>
+              <a:defRPr sz="1150">
+                <a:solidFill>
+                  <a:srgbClr val="1E293B"/>
+                </a:solidFill>
+                <a:latin typeface="Arial"/>
+              </a:defRPr>
+            </a:pPr>
             <a:r>
               <a:t>• Zero danger of cloud database hacks or leaks.</a:t>
             </a:r>
-            <a:br/>
+          </a:p>
+          <a:p>
+            <a:pPr>
+              <a:spcBef>
+                <a:spcPts val="600"/>
+              </a:spcBef>
+              <a:defRPr sz="1150">
+                <a:solidFill>
+                  <a:srgbClr val="1E293B"/>
+                </a:solidFill>
+                <a:latin typeface="Arial"/>
+              </a:defRPr>
+            </a:pPr>
             <a:r>
               <a:t>• You can export or delete your database with one click.</a:t>
             </a:r>
@@ -6145,14 +6109,14 @@
       </p:sp>
       <p:sp>
         <p:nvSpPr>
-          <p:cNvPr id="9" name="Rectangle 8"/>
+          <p:cNvPr id="8" name="Rectangle 7"/>
           <p:cNvSpPr/>
           <p:nvPr/>
         </p:nvSpPr>
         <p:spPr>
           <a:xfrm>
-            <a:off x="4443984" y="2066544"/>
-            <a:ext cx="3383280" cy="4114800"/>
+            <a:off x="4443984" y="2020824"/>
+            <a:ext cx="3383280" cy="4389120"/>
           </a:xfrm>
           <a:prstGeom prst="rect">
             <a:avLst/>
@@ -6188,14 +6152,14 @@
       </p:sp>
       <p:sp>
         <p:nvSpPr>
-          <p:cNvPr id="10" name="Rectangle 9"/>
+          <p:cNvPr id="9" name="Rectangle 8"/>
           <p:cNvSpPr/>
           <p:nvPr/>
         </p:nvSpPr>
         <p:spPr>
           <a:xfrm>
-            <a:off x="4389120" y="2011680"/>
-            <a:ext cx="3383280" cy="4114800"/>
+            <a:off x="4389120" y="1965960"/>
+            <a:ext cx="3383280" cy="4389120"/>
           </a:xfrm>
           <a:prstGeom prst="rect">
             <a:avLst/>
@@ -6233,14 +6197,14 @@
       </p:sp>
       <p:sp>
         <p:nvSpPr>
-          <p:cNvPr id="11" name="TextBox 10"/>
+          <p:cNvPr id="10" name="TextBox 9"/>
           <p:cNvSpPr txBox="1"/>
           <p:nvPr/>
         </p:nvSpPr>
         <p:spPr>
           <a:xfrm>
-            <a:off x="4617720" y="2240280"/>
-            <a:ext cx="2926080" cy="3657600"/>
+            <a:off x="4590288" y="2167128"/>
+            <a:ext cx="2980944" cy="3986784"/>
           </a:xfrm>
           <a:prstGeom prst="rect">
             <a:avLst/>
@@ -6248,13 +6212,13 @@
           <a:noFill/>
         </p:spPr>
         <p:txBody>
-          <a:bodyPr wrap="square">
+          <a:bodyPr wrap="square" tIns="50800" bIns="50800" lIns="50800" rIns="50800">
             <a:spAutoFit/>
           </a:bodyPr>
           <a:lstStyle/>
           <a:p>
             <a:pPr>
-              <a:defRPr sz="1800" b="1">
+              <a:defRPr sz="1500" b="1">
                 <a:solidFill>
                   <a:srgbClr val="111111"/>
                 </a:solidFill>
@@ -6268,9 +6232,9 @@
           <a:p>
             <a:pPr>
               <a:spcBef>
-                <a:spcPts val="1200"/>
+                <a:spcPts val="600"/>
               </a:spcBef>
-              <a:defRPr sz="1400">
+              <a:defRPr sz="1150">
                 <a:solidFill>
                   <a:srgbClr val="1E293B"/>
                 </a:solidFill>
@@ -6280,27 +6244,51 @@
             <a:r>
               <a:t>• No third-party health trackers or advertising beacons.</a:t>
             </a:r>
-            <a:br/>
-            <a:r>
-              <a:t>• The ESP32 communicates purely across your local Wi-Fi hotspot or direct USB cable.</a:t>
-            </a:r>
-            <a:br/>
-            <a:r>
-              <a:t>• Zero internet needed to operate.</a:t>
-            </a:r>
-          </a:p>
-        </p:txBody>
-      </p:sp>
-      <p:sp>
-        <p:nvSpPr>
-          <p:cNvPr id="12" name="Rectangle 11"/>
+          </a:p>
+          <a:p>
+            <a:pPr>
+              <a:spcBef>
+                <a:spcPts val="600"/>
+              </a:spcBef>
+              <a:defRPr sz="1150">
+                <a:solidFill>
+                  <a:srgbClr val="1E293B"/>
+                </a:solidFill>
+                <a:latin typeface="Arial"/>
+              </a:defRPr>
+            </a:pPr>
+            <a:r>
+              <a:t>• The ESP32 communicates purely across your local Wi-Fi or USB.</a:t>
+            </a:r>
+          </a:p>
+          <a:p>
+            <a:pPr>
+              <a:spcBef>
+                <a:spcPts val="600"/>
+              </a:spcBef>
+              <a:defRPr sz="1150">
+                <a:solidFill>
+                  <a:srgbClr val="1E293B"/>
+                </a:solidFill>
+                <a:latin typeface="Arial"/>
+              </a:defRPr>
+            </a:pPr>
+            <a:r>
+              <a:t>• Zero internet connection required to operate.</a:t>
+            </a:r>
+          </a:p>
+        </p:txBody>
+      </p:sp>
+      <p:sp>
+        <p:nvSpPr>
+          <p:cNvPr id="11" name="Rectangle 10"/>
           <p:cNvSpPr/>
           <p:nvPr/>
         </p:nvSpPr>
         <p:spPr>
           <a:xfrm>
-            <a:off x="8101584" y="2066544"/>
-            <a:ext cx="3383280" cy="4114800"/>
+            <a:off x="8101584" y="2020824"/>
+            <a:ext cx="3383280" cy="4389120"/>
           </a:xfrm>
           <a:prstGeom prst="rect">
             <a:avLst/>
@@ -6336,14 +6324,14 @@
       </p:sp>
       <p:sp>
         <p:nvSpPr>
-          <p:cNvPr id="13" name="Rectangle 12"/>
+          <p:cNvPr id="12" name="Rectangle 11"/>
           <p:cNvSpPr/>
           <p:nvPr/>
         </p:nvSpPr>
         <p:spPr>
           <a:xfrm>
-            <a:off x="8046720" y="2011680"/>
-            <a:ext cx="3383280" cy="4114800"/>
+            <a:off x="8046720" y="1965960"/>
+            <a:ext cx="3383280" cy="4389120"/>
           </a:xfrm>
           <a:prstGeom prst="rect">
             <a:avLst/>
@@ -6381,14 +6369,14 @@
       </p:sp>
       <p:sp>
         <p:nvSpPr>
-          <p:cNvPr id="14" name="TextBox 13"/>
+          <p:cNvPr id="13" name="TextBox 12"/>
           <p:cNvSpPr txBox="1"/>
           <p:nvPr/>
         </p:nvSpPr>
         <p:spPr>
           <a:xfrm>
-            <a:off x="8275320" y="2240280"/>
-            <a:ext cx="2926080" cy="3657600"/>
+            <a:off x="8247888" y="2167128"/>
+            <a:ext cx="2980944" cy="3986784"/>
           </a:xfrm>
           <a:prstGeom prst="rect">
             <a:avLst/>
@@ -6396,13 +6384,13 @@
           <a:noFill/>
         </p:spPr>
         <p:txBody>
-          <a:bodyPr wrap="square">
+          <a:bodyPr wrap="square" tIns="50800" bIns="50800" lIns="50800" rIns="50800">
             <a:spAutoFit/>
           </a:bodyPr>
           <a:lstStyle/>
           <a:p>
             <a:pPr>
-              <a:defRPr sz="1800" b="1">
+              <a:defRPr sz="1500" b="1">
                 <a:solidFill>
                   <a:srgbClr val="111111"/>
                 </a:solidFill>
@@ -6416,9 +6404,9 @@
           <a:p>
             <a:pPr>
               <a:spcBef>
-                <a:spcPts val="1200"/>
+                <a:spcPts val="600"/>
               </a:spcBef>
-              <a:defRPr sz="1400">
+              <a:defRPr sz="1150">
                 <a:solidFill>
                   <a:srgbClr val="1E293B"/>
                 </a:solidFill>
@@ -6428,9 +6416,21 @@
             <a:r>
               <a:t>• AWEN strictly provides supportive wellness reflections, never unauthorized medical diagnoses.</a:t>
             </a:r>
-            <a:br/>
-            <a:r>
-              <a:t>• Calm, reassuring tone prevents anxiety.</a:t>
+          </a:p>
+          <a:p>
+            <a:pPr>
+              <a:spcBef>
+                <a:spcPts val="600"/>
+              </a:spcBef>
+              <a:defRPr sz="1150">
+                <a:solidFill>
+                  <a:srgbClr val="1E293B"/>
+                </a:solidFill>
+                <a:latin typeface="Arial"/>
+              </a:defRPr>
+            </a:pPr>
+            <a:r>
+              <a:t>• Calm, reassuring tone prevents medical panic.</a:t>
             </a:r>
           </a:p>
         </p:txBody>
@@ -6504,8 +6504,8 @@
         </p:nvSpPr>
         <p:spPr>
           <a:xfrm>
-            <a:off x="731520" y="365760"/>
-            <a:ext cx="3493008" cy="384048"/>
+            <a:off x="731520" y="320040"/>
+            <a:ext cx="2980944" cy="320040"/>
           </a:xfrm>
           <a:prstGeom prst="rect">
             <a:avLst/>
@@ -6534,11 +6534,11 @@
           </a:fontRef>
         </p:style>
         <p:txBody>
-          <a:bodyPr rtlCol="0" anchor="ctr"/>
+          <a:bodyPr rtlCol="0" anchor="ctr" wrap="none" tIns="25400" bIns="25400" lIns="50800" rIns="50800"/>
           <a:lstStyle/>
           <a:p>
             <a:pPr algn="ctr">
-              <a:defRPr sz="1100" b="1">
+              <a:defRPr sz="1050" b="1">
                 <a:solidFill>
                   <a:srgbClr val="111111"/>
                 </a:solidFill>
@@ -6559,8 +6559,8 @@
         </p:nvSpPr>
         <p:spPr>
           <a:xfrm>
-            <a:off x="731520" y="804672"/>
-            <a:ext cx="10698480" cy="594360"/>
+            <a:off x="731520" y="713232"/>
+            <a:ext cx="10728655" cy="1143000"/>
           </a:xfrm>
           <a:prstGeom prst="rect">
             <a:avLst/>
@@ -6568,13 +6568,13 @@
           <a:noFill/>
         </p:spPr>
         <p:txBody>
-          <a:bodyPr wrap="square">
+          <a:bodyPr wrap="square" tIns="0" bIns="0" lIns="0" rIns="0">
             <a:spAutoFit/>
           </a:bodyPr>
           <a:lstStyle/>
           <a:p>
             <a:pPr>
-              <a:defRPr sz="2800" b="1">
+              <a:defRPr sz="2400" b="1">
                 <a:solidFill>
                   <a:srgbClr val="111111"/>
                 </a:solidFill>
@@ -6585,32 +6585,12 @@
               <a:t>Testing Results: Fast, Accurate &amp; Zero False Alarms</a:t>
             </a:r>
           </a:p>
-        </p:txBody>
-      </p:sp>
-      <p:sp>
-        <p:nvSpPr>
-          <p:cNvPr id="5" name="TextBox 4"/>
-          <p:cNvSpPr txBox="1"/>
-          <p:nvPr/>
-        </p:nvSpPr>
-        <p:spPr>
-          <a:xfrm>
-            <a:off x="731520" y="1371600"/>
-            <a:ext cx="10698480" cy="411480"/>
-          </a:xfrm>
-          <a:prstGeom prst="rect">
-            <a:avLst/>
-          </a:prstGeom>
-          <a:noFill/>
-        </p:spPr>
-        <p:txBody>
-          <a:bodyPr wrap="square">
-            <a:spAutoFit/>
-          </a:bodyPr>
-          <a:lstStyle/>
-          <a:p>
-            <a:pPr>
-              <a:defRPr sz="1500">
+          <a:p>
+            <a:pPr>
+              <a:spcBef>
+                <a:spcPts val="300"/>
+              </a:spcBef>
+              <a:defRPr sz="1300">
                 <a:solidFill>
                   <a:srgbClr val="1E293B"/>
                 </a:solidFill>
@@ -6625,13 +6605,13 @@
       </p:sp>
       <p:sp>
         <p:nvSpPr>
-          <p:cNvPr id="6" name="Rectangle 5"/>
+          <p:cNvPr id="5" name="Rectangle 4"/>
           <p:cNvSpPr/>
           <p:nvPr/>
         </p:nvSpPr>
         <p:spPr>
           <a:xfrm>
-            <a:off x="786384" y="2066544"/>
+            <a:off x="786384" y="2020824"/>
             <a:ext cx="5257800" cy="2057400"/>
           </a:xfrm>
           <a:prstGeom prst="rect">
@@ -6668,13 +6648,13 @@
       </p:sp>
       <p:sp>
         <p:nvSpPr>
-          <p:cNvPr id="7" name="Rectangle 6"/>
+          <p:cNvPr id="6" name="Rectangle 5"/>
           <p:cNvSpPr/>
           <p:nvPr/>
         </p:nvSpPr>
         <p:spPr>
           <a:xfrm>
-            <a:off x="731520" y="2011680"/>
+            <a:off x="731520" y="1965960"/>
             <a:ext cx="5257800" cy="2057400"/>
           </a:xfrm>
           <a:prstGeom prst="rect">
@@ -6713,14 +6693,14 @@
       </p:sp>
       <p:sp>
         <p:nvSpPr>
-          <p:cNvPr id="8" name="TextBox 7"/>
+          <p:cNvPr id="7" name="TextBox 6"/>
           <p:cNvSpPr txBox="1"/>
           <p:nvPr/>
         </p:nvSpPr>
         <p:spPr>
           <a:xfrm>
-            <a:off x="1005840" y="2176272"/>
-            <a:ext cx="4709160" cy="1737360"/>
+            <a:off x="960120" y="2130552"/>
+            <a:ext cx="4800600" cy="1737360"/>
           </a:xfrm>
           <a:prstGeom prst="rect">
             <a:avLst/>
@@ -6728,13 +6708,13 @@
           <a:noFill/>
         </p:spPr>
         <p:txBody>
-          <a:bodyPr wrap="square">
+          <a:bodyPr wrap="square" tIns="25400" bIns="25400" lIns="25400" rIns="25400">
             <a:spAutoFit/>
           </a:bodyPr>
           <a:lstStyle/>
           <a:p>
             <a:pPr>
-              <a:defRPr sz="3600" b="1">
+              <a:defRPr sz="2800" b="1">
                 <a:solidFill>
                   <a:srgbClr val="111111"/>
                 </a:solidFill>
@@ -6750,7 +6730,7 @@
               <a:spcBef>
                 <a:spcPts val="200"/>
               </a:spcBef>
-              <a:defRPr sz="1600" b="1">
+              <a:defRPr sz="1350" b="1">
                 <a:solidFill>
                   <a:srgbClr val="111111"/>
                 </a:solidFill>
@@ -6764,9 +6744,9 @@
           <a:p>
             <a:pPr>
               <a:spcBef>
-                <a:spcPts val="400"/>
+                <a:spcPts val="300"/>
               </a:spcBef>
-              <a:defRPr sz="1350">
+              <a:defRPr sz="1100">
                 <a:solidFill>
                   <a:srgbClr val="1E293B"/>
                 </a:solidFill>
@@ -6774,20 +6754,20 @@
               </a:defRPr>
             </a:pPr>
             <a:r>
-              <a:t>From optical sensor sampling on your finger to live screen update.</a:t>
-            </a:r>
-          </a:p>
-        </p:txBody>
-      </p:sp>
-      <p:sp>
-        <p:nvSpPr>
-          <p:cNvPr id="9" name="Rectangle 8"/>
+              <a:t>From optical sensor sampling on your finger to live screen update over local Wi-Fi.</a:t>
+            </a:r>
+          </a:p>
+        </p:txBody>
+      </p:sp>
+      <p:sp>
+        <p:nvSpPr>
+          <p:cNvPr id="8" name="Rectangle 7"/>
           <p:cNvSpPr/>
           <p:nvPr/>
         </p:nvSpPr>
         <p:spPr>
           <a:xfrm>
-            <a:off x="6227064" y="2066544"/>
+            <a:off x="6227064" y="2020824"/>
             <a:ext cx="5257800" cy="2057400"/>
           </a:xfrm>
           <a:prstGeom prst="rect">
@@ -6824,13 +6804,13 @@
       </p:sp>
       <p:sp>
         <p:nvSpPr>
-          <p:cNvPr id="10" name="Rectangle 9"/>
+          <p:cNvPr id="9" name="Rectangle 8"/>
           <p:cNvSpPr/>
           <p:nvPr/>
         </p:nvSpPr>
         <p:spPr>
           <a:xfrm>
-            <a:off x="6172200" y="2011680"/>
+            <a:off x="6172200" y="1965960"/>
             <a:ext cx="5257800" cy="2057400"/>
           </a:xfrm>
           <a:prstGeom prst="rect">
@@ -6869,14 +6849,14 @@
       </p:sp>
       <p:sp>
         <p:nvSpPr>
-          <p:cNvPr id="11" name="TextBox 10"/>
+          <p:cNvPr id="10" name="TextBox 9"/>
           <p:cNvSpPr txBox="1"/>
           <p:nvPr/>
         </p:nvSpPr>
         <p:spPr>
           <a:xfrm>
-            <a:off x="6446520" y="2176272"/>
-            <a:ext cx="4709160" cy="1737360"/>
+            <a:off x="6400800" y="2130552"/>
+            <a:ext cx="4800600" cy="1737360"/>
           </a:xfrm>
           <a:prstGeom prst="rect">
             <a:avLst/>
@@ -6884,13 +6864,13 @@
           <a:noFill/>
         </p:spPr>
         <p:txBody>
-          <a:bodyPr wrap="square">
+          <a:bodyPr wrap="square" tIns="25400" bIns="25400" lIns="25400" rIns="25400">
             <a:spAutoFit/>
           </a:bodyPr>
           <a:lstStyle/>
           <a:p>
             <a:pPr>
-              <a:defRPr sz="3600" b="1">
+              <a:defRPr sz="2800" b="1">
                 <a:solidFill>
                   <a:srgbClr val="111111"/>
                 </a:solidFill>
@@ -6906,7 +6886,7 @@
               <a:spcBef>
                 <a:spcPts val="200"/>
               </a:spcBef>
-              <a:defRPr sz="1600" b="1">
+              <a:defRPr sz="1350" b="1">
                 <a:solidFill>
                   <a:srgbClr val="111111"/>
                 </a:solidFill>
@@ -6920,9 +6900,9 @@
           <a:p>
             <a:pPr>
               <a:spcBef>
-                <a:spcPts val="400"/>
+                <a:spcPts val="300"/>
               </a:spcBef>
-              <a:defRPr sz="1350">
+              <a:defRPr sz="1100">
                 <a:solidFill>
                   <a:srgbClr val="1E293B"/>
                 </a:solidFill>
@@ -6937,13 +6917,13 @@
       </p:sp>
       <p:sp>
         <p:nvSpPr>
-          <p:cNvPr id="12" name="Rectangle 11"/>
+          <p:cNvPr id="11" name="Rectangle 10"/>
           <p:cNvSpPr/>
           <p:nvPr/>
         </p:nvSpPr>
         <p:spPr>
           <a:xfrm>
-            <a:off x="786384" y="4306824"/>
+            <a:off x="786384" y="4261104"/>
             <a:ext cx="5257800" cy="2057400"/>
           </a:xfrm>
           <a:prstGeom prst="rect">
@@ -6980,13 +6960,13 @@
       </p:sp>
       <p:sp>
         <p:nvSpPr>
-          <p:cNvPr id="13" name="Rectangle 12"/>
+          <p:cNvPr id="12" name="Rectangle 11"/>
           <p:cNvSpPr/>
           <p:nvPr/>
         </p:nvSpPr>
         <p:spPr>
           <a:xfrm>
-            <a:off x="731520" y="4251960"/>
+            <a:off x="731520" y="4206240"/>
             <a:ext cx="5257800" cy="2057400"/>
           </a:xfrm>
           <a:prstGeom prst="rect">
@@ -7025,14 +7005,14 @@
       </p:sp>
       <p:sp>
         <p:nvSpPr>
-          <p:cNvPr id="14" name="TextBox 13"/>
+          <p:cNvPr id="13" name="TextBox 12"/>
           <p:cNvSpPr txBox="1"/>
           <p:nvPr/>
         </p:nvSpPr>
         <p:spPr>
           <a:xfrm>
-            <a:off x="1005840" y="4416552"/>
-            <a:ext cx="4709160" cy="1737360"/>
+            <a:off x="960120" y="4370832"/>
+            <a:ext cx="4800600" cy="1737360"/>
           </a:xfrm>
           <a:prstGeom prst="rect">
             <a:avLst/>
@@ -7040,13 +7020,13 @@
           <a:noFill/>
         </p:spPr>
         <p:txBody>
-          <a:bodyPr wrap="square">
+          <a:bodyPr wrap="square" tIns="25400" bIns="25400" lIns="25400" rIns="25400">
             <a:spAutoFit/>
           </a:bodyPr>
           <a:lstStyle/>
           <a:p>
             <a:pPr>
-              <a:defRPr sz="3600" b="1">
+              <a:defRPr sz="2800" b="1">
                 <a:solidFill>
                   <a:srgbClr val="111111"/>
                 </a:solidFill>
@@ -7062,7 +7042,7 @@
               <a:spcBef>
                 <a:spcPts val="200"/>
               </a:spcBef>
-              <a:defRPr sz="1600" b="1">
+              <a:defRPr sz="1350" b="1">
                 <a:solidFill>
                   <a:srgbClr val="111111"/>
                 </a:solidFill>
@@ -7076,9 +7056,9 @@
           <a:p>
             <a:pPr>
               <a:spcBef>
-                <a:spcPts val="400"/>
+                <a:spcPts val="300"/>
               </a:spcBef>
-              <a:defRPr sz="1350">
+              <a:defRPr sz="1100">
                 <a:solidFill>
                   <a:srgbClr val="1E293B"/>
                 </a:solidFill>
@@ -7093,13 +7073,13 @@
       </p:sp>
       <p:sp>
         <p:nvSpPr>
-          <p:cNvPr id="15" name="Rectangle 14"/>
+          <p:cNvPr id="14" name="Rectangle 13"/>
           <p:cNvSpPr/>
           <p:nvPr/>
         </p:nvSpPr>
         <p:spPr>
           <a:xfrm>
-            <a:off x="6227064" y="4306824"/>
+            <a:off x="6227064" y="4261104"/>
             <a:ext cx="5257800" cy="2057400"/>
           </a:xfrm>
           <a:prstGeom prst="rect">
@@ -7136,13 +7116,13 @@
       </p:sp>
       <p:sp>
         <p:nvSpPr>
-          <p:cNvPr id="16" name="Rectangle 15"/>
+          <p:cNvPr id="15" name="Rectangle 14"/>
           <p:cNvSpPr/>
           <p:nvPr/>
         </p:nvSpPr>
         <p:spPr>
           <a:xfrm>
-            <a:off x="6172200" y="4251960"/>
+            <a:off x="6172200" y="4206240"/>
             <a:ext cx="5257800" cy="2057400"/>
           </a:xfrm>
           <a:prstGeom prst="rect">
@@ -7181,14 +7161,14 @@
       </p:sp>
       <p:sp>
         <p:nvSpPr>
-          <p:cNvPr id="17" name="TextBox 16"/>
+          <p:cNvPr id="16" name="TextBox 15"/>
           <p:cNvSpPr txBox="1"/>
           <p:nvPr/>
         </p:nvSpPr>
         <p:spPr>
           <a:xfrm>
-            <a:off x="6446520" y="4416552"/>
-            <a:ext cx="4709160" cy="1737360"/>
+            <a:off x="6400800" y="4370832"/>
+            <a:ext cx="4800600" cy="1737360"/>
           </a:xfrm>
           <a:prstGeom prst="rect">
             <a:avLst/>
@@ -7196,13 +7176,13 @@
           <a:noFill/>
         </p:spPr>
         <p:txBody>
-          <a:bodyPr wrap="square">
+          <a:bodyPr wrap="square" tIns="25400" bIns="25400" lIns="25400" rIns="25400">
             <a:spAutoFit/>
           </a:bodyPr>
           <a:lstStyle/>
           <a:p>
             <a:pPr>
-              <a:defRPr sz="3600" b="1">
+              <a:defRPr sz="2800" b="1">
                 <a:solidFill>
                   <a:srgbClr val="111111"/>
                 </a:solidFill>
@@ -7218,7 +7198,7 @@
               <a:spcBef>
                 <a:spcPts val="200"/>
               </a:spcBef>
-              <a:defRPr sz="1600" b="1">
+              <a:defRPr sz="1350" b="1">
                 <a:solidFill>
                   <a:srgbClr val="111111"/>
                 </a:solidFill>
@@ -7232,9 +7212,9 @@
           <a:p>
             <a:pPr>
               <a:spcBef>
-                <a:spcPts val="400"/>
+                <a:spcPts val="300"/>
               </a:spcBef>
-              <a:defRPr sz="1350">
+              <a:defRPr sz="1100">
                 <a:solidFill>
                   <a:srgbClr val="1E293B"/>
                 </a:solidFill>
@@ -7316,8 +7296,8 @@
         </p:nvSpPr>
         <p:spPr>
           <a:xfrm>
-            <a:off x="731520" y="365760"/>
-            <a:ext cx="2980944" cy="384048"/>
+            <a:off x="731520" y="320040"/>
+            <a:ext cx="2542032" cy="320040"/>
           </a:xfrm>
           <a:prstGeom prst="rect">
             <a:avLst/>
@@ -7346,11 +7326,11 @@
           </a:fontRef>
         </p:style>
         <p:txBody>
-          <a:bodyPr rtlCol="0" anchor="ctr"/>
+          <a:bodyPr rtlCol="0" anchor="ctr" wrap="none" tIns="25400" bIns="25400" lIns="50800" rIns="50800"/>
           <a:lstStyle/>
           <a:p>
             <a:pPr algn="ctr">
-              <a:defRPr sz="1100" b="1">
+              <a:defRPr sz="1050" b="1">
                 <a:solidFill>
                   <a:srgbClr val="111111"/>
                 </a:solidFill>
@@ -7371,8 +7351,8 @@
         </p:nvSpPr>
         <p:spPr>
           <a:xfrm>
-            <a:off x="731520" y="804672"/>
-            <a:ext cx="10698480" cy="594360"/>
+            <a:off x="731520" y="713232"/>
+            <a:ext cx="10728655" cy="1143000"/>
           </a:xfrm>
           <a:prstGeom prst="rect">
             <a:avLst/>
@@ -7380,13 +7360,13 @@
           <a:noFill/>
         </p:spPr>
         <p:txBody>
-          <a:bodyPr wrap="square">
+          <a:bodyPr wrap="square" tIns="0" bIns="0" lIns="0" rIns="0">
             <a:spAutoFit/>
           </a:bodyPr>
           <a:lstStyle/>
           <a:p>
             <a:pPr>
-              <a:defRPr sz="2800" b="1">
+              <a:defRPr sz="2400" b="1">
                 <a:solidFill>
                   <a:srgbClr val="111111"/>
                 </a:solidFill>
@@ -7397,32 +7377,12 @@
               <a:t>Conclusion &amp; Next-Generation Roadmap</a:t>
             </a:r>
           </a:p>
-        </p:txBody>
-      </p:sp>
-      <p:sp>
-        <p:nvSpPr>
-          <p:cNvPr id="5" name="TextBox 4"/>
-          <p:cNvSpPr txBox="1"/>
-          <p:nvPr/>
-        </p:nvSpPr>
-        <p:spPr>
-          <a:xfrm>
-            <a:off x="731520" y="1371600"/>
-            <a:ext cx="10698480" cy="411480"/>
-          </a:xfrm>
-          <a:prstGeom prst="rect">
-            <a:avLst/>
-          </a:prstGeom>
-          <a:noFill/>
-        </p:spPr>
-        <p:txBody>
-          <a:bodyPr wrap="square">
-            <a:spAutoFit/>
-          </a:bodyPr>
-          <a:lstStyle/>
-          <a:p>
-            <a:pPr>
-              <a:defRPr sz="1500">
+          <a:p>
+            <a:pPr>
+              <a:spcBef>
+                <a:spcPts val="300"/>
+              </a:spcBef>
+              <a:defRPr sz="1300">
                 <a:solidFill>
                   <a:srgbClr val="1E293B"/>
                 </a:solidFill>
@@ -7437,14 +7397,14 @@
       </p:sp>
       <p:sp>
         <p:nvSpPr>
-          <p:cNvPr id="6" name="Rectangle 5"/>
+          <p:cNvPr id="5" name="Rectangle 4"/>
           <p:cNvSpPr/>
           <p:nvPr/>
         </p:nvSpPr>
         <p:spPr>
           <a:xfrm>
-            <a:off x="786384" y="2066544"/>
-            <a:ext cx="5257800" cy="4114800"/>
+            <a:off x="786384" y="2020824"/>
+            <a:ext cx="5257800" cy="4389120"/>
           </a:xfrm>
           <a:prstGeom prst="rect">
             <a:avLst/>
@@ -7480,14 +7440,14 @@
       </p:sp>
       <p:sp>
         <p:nvSpPr>
-          <p:cNvPr id="7" name="Rectangle 6"/>
+          <p:cNvPr id="6" name="Rectangle 5"/>
           <p:cNvSpPr/>
           <p:nvPr/>
         </p:nvSpPr>
         <p:spPr>
           <a:xfrm>
-            <a:off x="731520" y="2011680"/>
-            <a:ext cx="5257800" cy="4114800"/>
+            <a:off x="731520" y="1965960"/>
+            <a:ext cx="5257800" cy="4389120"/>
           </a:xfrm>
           <a:prstGeom prst="rect">
             <a:avLst/>
@@ -7525,14 +7485,14 @@
       </p:sp>
       <p:sp>
         <p:nvSpPr>
-          <p:cNvPr id="8" name="TextBox 7"/>
+          <p:cNvPr id="7" name="TextBox 6"/>
           <p:cNvSpPr txBox="1"/>
           <p:nvPr/>
         </p:nvSpPr>
         <p:spPr>
           <a:xfrm>
-            <a:off x="1005840" y="2240280"/>
-            <a:ext cx="4709160" cy="3657600"/>
+            <a:off x="960120" y="2167128"/>
+            <a:ext cx="4800600" cy="3986784"/>
           </a:xfrm>
           <a:prstGeom prst="rect">
             <a:avLst/>
@@ -7540,13 +7500,13 @@
           <a:noFill/>
         </p:spPr>
         <p:txBody>
-          <a:bodyPr wrap="square">
+          <a:bodyPr wrap="square" tIns="50800" bIns="50800" lIns="50800" rIns="50800">
             <a:spAutoFit/>
           </a:bodyPr>
           <a:lstStyle/>
           <a:p>
             <a:pPr>
-              <a:defRPr sz="1800" b="1">
+              <a:defRPr sz="1500" b="1">
                 <a:solidFill>
                   <a:srgbClr val="111111"/>
                 </a:solidFill>
@@ -7560,9 +7520,9 @@
           <a:p>
             <a:pPr>
               <a:spcBef>
-                <a:spcPts val="1400"/>
+                <a:spcPts val="500"/>
               </a:spcBef>
-              <a:defRPr sz="1400">
+              <a:defRPr sz="1120">
                 <a:solidFill>
                   <a:srgbClr val="1E293B"/>
                 </a:solidFill>
@@ -7572,23 +7532,67 @@
             <a:r>
               <a:t>✔ Working ESP32 Sensor Pod with MAX30102, MPU-6050, LM35 &amp; OLED.</a:t>
             </a:r>
-            <a:br/>
-            <a:br/>
-            <a:r>
-              <a:t>✔ Dual-Path Streaming: Local Wi-Fi (172.20.168.254) + Web Serial USB.</a:t>
-            </a:r>
-            <a:br/>
-            <a:br/>
+          </a:p>
+          <a:p>
+            <a:pPr>
+              <a:spcBef>
+                <a:spcPts val="500"/>
+              </a:spcBef>
+              <a:defRPr sz="1120">
+                <a:solidFill>
+                  <a:srgbClr val="1E293B"/>
+                </a:solidFill>
+                <a:latin typeface="Arial"/>
+              </a:defRPr>
+            </a:pPr>
+            <a:r>
+              <a:t>✔ Dual-Path Streaming: Local Wi-Fi (10.201.146.254) + Web Serial USB.</a:t>
+            </a:r>
+          </a:p>
+          <a:p>
+            <a:pPr>
+              <a:spcBef>
+                <a:spcPts val="500"/>
+              </a:spcBef>
+              <a:defRPr sz="1120">
+                <a:solidFill>
+                  <a:srgbClr val="1E293B"/>
+                </a:solidFill>
+                <a:latin typeface="Arial"/>
+              </a:defRPr>
+            </a:pPr>
             <a:r>
               <a:t>✔ Motion-aware Exertion Filter &amp; 60s buzzer cooldown.</a:t>
             </a:r>
-            <a:br/>
-            <a:br/>
+          </a:p>
+          <a:p>
+            <a:pPr>
+              <a:spcBef>
+                <a:spcPts val="500"/>
+              </a:spcBef>
+              <a:defRPr sz="1120">
+                <a:solidFill>
+                  <a:srgbClr val="1E293B"/>
+                </a:solidFill>
+                <a:latin typeface="Arial"/>
+              </a:defRPr>
+            </a:pPr>
             <a:r>
               <a:t>✔ Dynamic Personal Baseline Corridor (μ ± 2σ) statistical calculation.</a:t>
             </a:r>
-            <a:br/>
-            <a:br/>
+          </a:p>
+          <a:p>
+            <a:pPr>
+              <a:spcBef>
+                <a:spcPts val="500"/>
+              </a:spcBef>
+              <a:defRPr sz="1120">
+                <a:solidFill>
+                  <a:srgbClr val="1E293B"/>
+                </a:solidFill>
+                <a:latin typeface="Arial"/>
+              </a:defRPr>
+            </a:pPr>
             <a:r>
               <a:t>✔ React 19 Frontend with 5-State Living Mascot &amp; 7-Screen Ecosystem.</a:t>
             </a:r>
@@ -7597,14 +7601,14 @@
       </p:sp>
       <p:sp>
         <p:nvSpPr>
-          <p:cNvPr id="9" name="Rectangle 8"/>
+          <p:cNvPr id="8" name="Rectangle 7"/>
           <p:cNvSpPr/>
           <p:nvPr/>
         </p:nvSpPr>
         <p:spPr>
           <a:xfrm>
-            <a:off x="6227064" y="2066544"/>
-            <a:ext cx="5257800" cy="4114800"/>
+            <a:off x="6227064" y="2020824"/>
+            <a:ext cx="5257800" cy="4389120"/>
           </a:xfrm>
           <a:prstGeom prst="rect">
             <a:avLst/>
@@ -7640,14 +7644,14 @@
       </p:sp>
       <p:sp>
         <p:nvSpPr>
-          <p:cNvPr id="10" name="Rectangle 9"/>
+          <p:cNvPr id="9" name="Rectangle 8"/>
           <p:cNvSpPr/>
           <p:nvPr/>
         </p:nvSpPr>
         <p:spPr>
           <a:xfrm>
-            <a:off x="6172200" y="2011680"/>
-            <a:ext cx="5257800" cy="4114800"/>
+            <a:off x="6172200" y="1965960"/>
+            <a:ext cx="5257800" cy="4389120"/>
           </a:xfrm>
           <a:prstGeom prst="rect">
             <a:avLst/>
@@ -7685,14 +7689,14 @@
       </p:sp>
       <p:sp>
         <p:nvSpPr>
-          <p:cNvPr id="11" name="TextBox 10"/>
+          <p:cNvPr id="10" name="TextBox 9"/>
           <p:cNvSpPr txBox="1"/>
           <p:nvPr/>
         </p:nvSpPr>
         <p:spPr>
           <a:xfrm>
-            <a:off x="6446520" y="2240280"/>
-            <a:ext cx="4709160" cy="3657600"/>
+            <a:off x="6400800" y="2167128"/>
+            <a:ext cx="4800600" cy="3986784"/>
           </a:xfrm>
           <a:prstGeom prst="rect">
             <a:avLst/>
@@ -7700,13 +7704,13 @@
           <a:noFill/>
         </p:spPr>
         <p:txBody>
-          <a:bodyPr wrap="square">
+          <a:bodyPr wrap="square" tIns="50800" bIns="50800" lIns="50800" rIns="50800">
             <a:spAutoFit/>
           </a:bodyPr>
           <a:lstStyle/>
           <a:p>
             <a:pPr>
-              <a:defRPr sz="1800" b="1">
+              <a:defRPr sz="1500" b="1">
                 <a:solidFill>
                   <a:srgbClr val="111111"/>
                 </a:solidFill>
@@ -7720,9 +7724,9 @@
           <a:p>
             <a:pPr>
               <a:spcBef>
-                <a:spcPts val="1400"/>
+                <a:spcPts val="500"/>
               </a:spcBef>
-              <a:defRPr sz="1400">
+              <a:defRPr sz="1120">
                 <a:solidFill>
                   <a:srgbClr val="1E293B"/>
                 </a:solidFill>
@@ -7732,23 +7736,67 @@
             <a:r>
               <a:t>• Smart Ring Form Factor: Miniaturized multi-layer flex PCB.</a:t>
             </a:r>
-            <a:br/>
-            <a:br/>
+          </a:p>
+          <a:p>
+            <a:pPr>
+              <a:spcBef>
+                <a:spcPts val="500"/>
+              </a:spcBef>
+              <a:defRPr sz="1120">
+                <a:solidFill>
+                  <a:srgbClr val="1E293B"/>
+                </a:solidFill>
+                <a:latin typeface="Arial"/>
+              </a:defRPr>
+            </a:pPr>
             <a:r>
               <a:t>• Bluetooth Low Energy (BLE 5.0): Low-power wireless sync.</a:t>
             </a:r>
-            <a:br/>
-            <a:br/>
+          </a:p>
+          <a:p>
+            <a:pPr>
+              <a:spcBef>
+                <a:spcPts val="500"/>
+              </a:spcBef>
+              <a:defRPr sz="1120">
+                <a:solidFill>
+                  <a:srgbClr val="1E293B"/>
+                </a:solidFill>
+                <a:latin typeface="Arial"/>
+              </a:defRPr>
+            </a:pPr>
             <a:r>
               <a:t>• TinyML On-Device Models: Running TensorFlow Lite micro-models on chip.</a:t>
             </a:r>
-            <a:br/>
-            <a:br/>
+          </a:p>
+          <a:p>
+            <a:pPr>
+              <a:spcBef>
+                <a:spcPts val="500"/>
+              </a:spcBef>
+              <a:defRPr sz="1120">
+                <a:solidFill>
+                  <a:srgbClr val="1E293B"/>
+                </a:solidFill>
+                <a:latin typeface="Arial"/>
+              </a:defRPr>
+            </a:pPr>
             <a:r>
               <a:t>• Sleep Stage Tracking: Measuring autonomic recovery and RMSSD HRV overnight.</a:t>
             </a:r>
-            <a:br/>
-            <a:br/>
+          </a:p>
+          <a:p>
+            <a:pPr>
+              <a:spcBef>
+                <a:spcPts val="500"/>
+              </a:spcBef>
+              <a:defRPr sz="1120">
+                <a:solidFill>
+                  <a:srgbClr val="1E293B"/>
+                </a:solidFill>
+                <a:latin typeface="Arial"/>
+              </a:defRPr>
+            </a:pPr>
             <a:r>
               <a:t>• University Campus Pilot: Helping students manage exam stress.</a:t>
             </a:r>
@@ -7824,8 +7872,8 @@
         </p:nvSpPr>
         <p:spPr>
           <a:xfrm>
-            <a:off x="731520" y="365760"/>
-            <a:ext cx="2596896" cy="384048"/>
+            <a:off x="731520" y="320040"/>
+            <a:ext cx="2212848" cy="320040"/>
           </a:xfrm>
           <a:prstGeom prst="rect">
             <a:avLst/>
@@ -7854,11 +7902,11 @@
           </a:fontRef>
         </p:style>
         <p:txBody>
-          <a:bodyPr rtlCol="0" anchor="ctr"/>
+          <a:bodyPr rtlCol="0" anchor="ctr" wrap="none" tIns="25400" bIns="25400" lIns="50800" rIns="50800"/>
           <a:lstStyle/>
           <a:p>
             <a:pPr algn="ctr">
-              <a:defRPr sz="1100" b="1">
+              <a:defRPr sz="1050" b="1">
                 <a:solidFill>
                   <a:srgbClr val="111111"/>
                 </a:solidFill>
@@ -7879,8 +7927,8 @@
         </p:nvSpPr>
         <p:spPr>
           <a:xfrm>
-            <a:off x="731520" y="804672"/>
-            <a:ext cx="10698480" cy="594360"/>
+            <a:off x="731520" y="713232"/>
+            <a:ext cx="10728655" cy="1143000"/>
           </a:xfrm>
           <a:prstGeom prst="rect">
             <a:avLst/>
@@ -7888,13 +7936,13 @@
           <a:noFill/>
         </p:spPr>
         <p:txBody>
-          <a:bodyPr wrap="square">
+          <a:bodyPr wrap="square" tIns="0" bIns="0" lIns="0" rIns="0">
             <a:spAutoFit/>
           </a:bodyPr>
           <a:lstStyle/>
           <a:p>
             <a:pPr>
-              <a:defRPr sz="2800" b="1">
+              <a:defRPr sz="2400" b="1">
                 <a:solidFill>
                   <a:srgbClr val="111111"/>
                 </a:solidFill>
@@ -7905,32 +7953,12 @@
               <a:t>Why Do Normal Fitness Watches Annoy Users?</a:t>
             </a:r>
           </a:p>
-        </p:txBody>
-      </p:sp>
-      <p:sp>
-        <p:nvSpPr>
-          <p:cNvPr id="5" name="TextBox 4"/>
-          <p:cNvSpPr txBox="1"/>
-          <p:nvPr/>
-        </p:nvSpPr>
-        <p:spPr>
-          <a:xfrm>
-            <a:off x="731520" y="1371600"/>
-            <a:ext cx="10698480" cy="411480"/>
-          </a:xfrm>
-          <a:prstGeom prst="rect">
-            <a:avLst/>
-          </a:prstGeom>
-          <a:noFill/>
-        </p:spPr>
-        <p:txBody>
-          <a:bodyPr wrap="square">
-            <a:spAutoFit/>
-          </a:bodyPr>
-          <a:lstStyle/>
-          <a:p>
-            <a:pPr>
-              <a:defRPr sz="1500">
+          <a:p>
+            <a:pPr>
+              <a:spcBef>
+                <a:spcPts val="300"/>
+              </a:spcBef>
+              <a:defRPr sz="1300">
                 <a:solidFill>
                   <a:srgbClr val="1E293B"/>
                 </a:solidFill>
@@ -7945,14 +7973,14 @@
       </p:sp>
       <p:sp>
         <p:nvSpPr>
-          <p:cNvPr id="6" name="Rectangle 5"/>
+          <p:cNvPr id="5" name="Rectangle 4"/>
           <p:cNvSpPr/>
           <p:nvPr/>
         </p:nvSpPr>
         <p:spPr>
           <a:xfrm>
-            <a:off x="786384" y="2066544"/>
-            <a:ext cx="3383280" cy="4114800"/>
+            <a:off x="786384" y="2020824"/>
+            <a:ext cx="3383280" cy="4389120"/>
           </a:xfrm>
           <a:prstGeom prst="rect">
             <a:avLst/>
@@ -7988,14 +8016,14 @@
       </p:sp>
       <p:sp>
         <p:nvSpPr>
-          <p:cNvPr id="7" name="Rectangle 6"/>
+          <p:cNvPr id="6" name="Rectangle 5"/>
           <p:cNvSpPr/>
           <p:nvPr/>
         </p:nvSpPr>
         <p:spPr>
           <a:xfrm>
-            <a:off x="731520" y="2011680"/>
-            <a:ext cx="3383280" cy="4114800"/>
+            <a:off x="731520" y="1965960"/>
+            <a:ext cx="3383280" cy="4389120"/>
           </a:xfrm>
           <a:prstGeom prst="rect">
             <a:avLst/>
@@ -8033,14 +8061,14 @@
       </p:sp>
       <p:sp>
         <p:nvSpPr>
-          <p:cNvPr id="8" name="TextBox 7"/>
+          <p:cNvPr id="7" name="TextBox 6"/>
           <p:cNvSpPr txBox="1"/>
           <p:nvPr/>
         </p:nvSpPr>
         <p:spPr>
           <a:xfrm>
-            <a:off x="960120" y="2240280"/>
-            <a:ext cx="2926080" cy="3657600"/>
+            <a:off x="932688" y="2167128"/>
+            <a:ext cx="2980944" cy="3986784"/>
           </a:xfrm>
           <a:prstGeom prst="rect">
             <a:avLst/>
@@ -8048,13 +8076,13 @@
           <a:noFill/>
         </p:spPr>
         <p:txBody>
-          <a:bodyPr wrap="square">
+          <a:bodyPr wrap="square" tIns="50800" bIns="50800" lIns="50800" rIns="50800">
             <a:spAutoFit/>
           </a:bodyPr>
           <a:lstStyle/>
           <a:p>
             <a:pPr>
-              <a:defRPr sz="1800" b="1">
+              <a:defRPr sz="1600" b="1">
                 <a:solidFill>
                   <a:srgbClr val="111111"/>
                 </a:solidFill>
@@ -8068,9 +8096,9 @@
           <a:p>
             <a:pPr>
               <a:spcBef>
-                <a:spcPts val="1400"/>
+                <a:spcPts val="800"/>
               </a:spcBef>
-              <a:defRPr sz="1400">
+              <a:defRPr sz="1200">
                 <a:solidFill>
                   <a:srgbClr val="1E293B"/>
                 </a:solidFill>
@@ -8078,34 +8106,53 @@
               </a:defRPr>
             </a:pPr>
             <a:r>
-              <a:t>Standard watches flag any heart rate over 100 BPM as dangerous.</a:t>
-            </a:r>
-            <a:br/>
-            <a:br/>
-            <a:r>
-              <a:t>• But an athlete's resting pulse is 50 BPM.</a:t>
-            </a:r>
-            <a:br/>
-            <a:r>
-              <a:t>• A busy student's normal resting pulse is 80 BPM.</a:t>
-            </a:r>
-            <a:br/>
-            <a:r>
-              <a:t>• A single fixed number cannot fit both people!</a:t>
-            </a:r>
-          </a:p>
-        </p:txBody>
-      </p:sp>
-      <p:sp>
-        <p:nvSpPr>
-          <p:cNvPr id="9" name="Rectangle 8"/>
+              <a:t>Standard watches flag any heart rate over 100 BPM as dangerous tachycardia.</a:t>
+            </a:r>
+          </a:p>
+          <a:p>
+            <a:pPr>
+              <a:spcBef>
+                <a:spcPts val="600"/>
+              </a:spcBef>
+              <a:defRPr sz="1150">
+                <a:solidFill>
+                  <a:srgbClr val="1E293B"/>
+                </a:solidFill>
+                <a:latin typeface="Arial"/>
+              </a:defRPr>
+            </a:pPr>
+            <a:r>
+              <a:t>• Ignores individual physiology: An athlete rests at 50 BPM, while a student rests at 80 BPM.</a:t>
+            </a:r>
+          </a:p>
+          <a:p>
+            <a:pPr>
+              <a:spcBef>
+                <a:spcPts val="600"/>
+              </a:spcBef>
+              <a:defRPr sz="1150">
+                <a:solidFill>
+                  <a:srgbClr val="1E293B"/>
+                </a:solidFill>
+                <a:latin typeface="Arial"/>
+              </a:defRPr>
+            </a:pPr>
+            <a:r>
+              <a:t>• A single fixed medical cutoff cannot fit both people!</a:t>
+            </a:r>
+          </a:p>
+        </p:txBody>
+      </p:sp>
+      <p:sp>
+        <p:nvSpPr>
+          <p:cNvPr id="8" name="Rectangle 7"/>
           <p:cNvSpPr/>
           <p:nvPr/>
         </p:nvSpPr>
         <p:spPr>
           <a:xfrm>
-            <a:off x="4443984" y="2066544"/>
-            <a:ext cx="3383280" cy="4114800"/>
+            <a:off x="4443984" y="2020824"/>
+            <a:ext cx="3383280" cy="4389120"/>
           </a:xfrm>
           <a:prstGeom prst="rect">
             <a:avLst/>
@@ -8141,14 +8188,14 @@
       </p:sp>
       <p:sp>
         <p:nvSpPr>
-          <p:cNvPr id="10" name="Rectangle 9"/>
+          <p:cNvPr id="9" name="Rectangle 8"/>
           <p:cNvSpPr/>
           <p:nvPr/>
         </p:nvSpPr>
         <p:spPr>
           <a:xfrm>
-            <a:off x="4389120" y="2011680"/>
-            <a:ext cx="3383280" cy="4114800"/>
+            <a:off x="4389120" y="1965960"/>
+            <a:ext cx="3383280" cy="4389120"/>
           </a:xfrm>
           <a:prstGeom prst="rect">
             <a:avLst/>
@@ -8186,14 +8233,14 @@
       </p:sp>
       <p:sp>
         <p:nvSpPr>
-          <p:cNvPr id="11" name="TextBox 10"/>
+          <p:cNvPr id="10" name="TextBox 9"/>
           <p:cNvSpPr txBox="1"/>
           <p:nvPr/>
         </p:nvSpPr>
         <p:spPr>
           <a:xfrm>
-            <a:off x="4617720" y="2240280"/>
-            <a:ext cx="2926080" cy="3657600"/>
+            <a:off x="4590288" y="2167128"/>
+            <a:ext cx="2980944" cy="3986784"/>
           </a:xfrm>
           <a:prstGeom prst="rect">
             <a:avLst/>
@@ -8201,13 +8248,13 @@
           <a:noFill/>
         </p:spPr>
         <p:txBody>
-          <a:bodyPr wrap="square">
+          <a:bodyPr wrap="square" tIns="50800" bIns="50800" lIns="50800" rIns="50800">
             <a:spAutoFit/>
           </a:bodyPr>
           <a:lstStyle/>
           <a:p>
             <a:pPr>
-              <a:defRPr sz="1800" b="1">
+              <a:defRPr sz="1600" b="1">
                 <a:solidFill>
                   <a:srgbClr val="111111"/>
                 </a:solidFill>
@@ -8221,9 +8268,9 @@
           <a:p>
             <a:pPr>
               <a:spcBef>
-                <a:spcPts val="1400"/>
+                <a:spcPts val="800"/>
               </a:spcBef>
-              <a:defRPr sz="1400">
+              <a:defRPr sz="1200">
                 <a:solidFill>
                   <a:srgbClr val="1E293B"/>
                 </a:solidFill>
@@ -8233,12 +8280,35 @@
             <a:r>
               <a:t>When you climb stairs or walk quickly, your heart naturally beats faster.</a:t>
             </a:r>
-            <a:br/>
-            <a:br/>
-            <a:r>
-              <a:t>• Normal watches cannot tell if you are moving or sitting.</a:t>
-            </a:r>
-            <a:br/>
+          </a:p>
+          <a:p>
+            <a:pPr>
+              <a:spcBef>
+                <a:spcPts val="600"/>
+              </a:spcBef>
+              <a:defRPr sz="1150">
+                <a:solidFill>
+                  <a:srgbClr val="1E293B"/>
+                </a:solidFill>
+                <a:latin typeface="Arial"/>
+              </a:defRPr>
+            </a:pPr>
+            <a:r>
+              <a:t>• Watches are motion-blind: They cannot tell if you are moving or sitting still.</a:t>
+            </a:r>
+          </a:p>
+          <a:p>
+            <a:pPr>
+              <a:spcBef>
+                <a:spcPts val="600"/>
+              </a:spcBef>
+              <a:defRPr sz="1150">
+                <a:solidFill>
+                  <a:srgbClr val="1E293B"/>
+                </a:solidFill>
+                <a:latin typeface="Arial"/>
+              </a:defRPr>
+            </a:pPr>
             <a:r>
               <a:t>• They falsely beep: 'You are stressed!' when you were just walking!</a:t>
             </a:r>
@@ -8247,14 +8317,14 @@
       </p:sp>
       <p:sp>
         <p:nvSpPr>
-          <p:cNvPr id="12" name="Rectangle 11"/>
+          <p:cNvPr id="11" name="Rectangle 10"/>
           <p:cNvSpPr/>
           <p:nvPr/>
         </p:nvSpPr>
         <p:spPr>
           <a:xfrm>
-            <a:off x="8101584" y="2066544"/>
-            <a:ext cx="3383280" cy="4114800"/>
+            <a:off x="8101584" y="2020824"/>
+            <a:ext cx="3383280" cy="4389120"/>
           </a:xfrm>
           <a:prstGeom prst="rect">
             <a:avLst/>
@@ -8290,14 +8360,14 @@
       </p:sp>
       <p:sp>
         <p:nvSpPr>
-          <p:cNvPr id="13" name="Rectangle 12"/>
+          <p:cNvPr id="12" name="Rectangle 11"/>
           <p:cNvSpPr/>
           <p:nvPr/>
         </p:nvSpPr>
         <p:spPr>
           <a:xfrm>
-            <a:off x="8046720" y="2011680"/>
-            <a:ext cx="3383280" cy="4114800"/>
+            <a:off x="8046720" y="1965960"/>
+            <a:ext cx="3383280" cy="4389120"/>
           </a:xfrm>
           <a:prstGeom prst="rect">
             <a:avLst/>
@@ -8335,14 +8405,14 @@
       </p:sp>
       <p:sp>
         <p:nvSpPr>
-          <p:cNvPr id="14" name="TextBox 13"/>
+          <p:cNvPr id="13" name="TextBox 12"/>
           <p:cNvSpPr txBox="1"/>
           <p:nvPr/>
         </p:nvSpPr>
         <p:spPr>
           <a:xfrm>
-            <a:off x="8275320" y="2240280"/>
-            <a:ext cx="2926080" cy="3657600"/>
+            <a:off x="8247888" y="2167128"/>
+            <a:ext cx="2980944" cy="3986784"/>
           </a:xfrm>
           <a:prstGeom prst="rect">
             <a:avLst/>
@@ -8350,13 +8420,13 @@
           <a:noFill/>
         </p:spPr>
         <p:txBody>
-          <a:bodyPr wrap="square">
+          <a:bodyPr wrap="square" tIns="50800" bIns="50800" lIns="50800" rIns="50800">
             <a:spAutoFit/>
           </a:bodyPr>
           <a:lstStyle/>
           <a:p>
             <a:pPr>
-              <a:defRPr sz="1800" b="1">
+              <a:defRPr sz="1600" b="1">
                 <a:solidFill>
                   <a:srgbClr val="111111"/>
                 </a:solidFill>
@@ -8370,9 +8440,9 @@
           <a:p>
             <a:pPr>
               <a:spcBef>
-                <a:spcPts val="1400"/>
+                <a:spcPts val="800"/>
               </a:spcBef>
-              <a:defRPr sz="1400">
+              <a:defRPr sz="1200">
                 <a:solidFill>
                   <a:srgbClr val="1E293B"/>
                 </a:solidFill>
@@ -8382,10 +8452,37 @@
             <a:r>
               <a:t>Sudden red alarms create anxiety and fear instead of helping you feel calm.</a:t>
             </a:r>
-            <a:br/>
-            <a:br/>
-            <a:r>
-              <a:t>• In addition, your private medical data gets sent to corporate cloud servers for marketing.</a:t>
+          </a:p>
+          <a:p>
+            <a:pPr>
+              <a:spcBef>
+                <a:spcPts val="600"/>
+              </a:spcBef>
+              <a:defRPr sz="1150">
+                <a:solidFill>
+                  <a:srgbClr val="1E293B"/>
+                </a:solidFill>
+                <a:latin typeface="Arial"/>
+              </a:defRPr>
+            </a:pPr>
+            <a:r>
+              <a:t>• Alarms trigger acute panic loops rather than gentle guidance.</a:t>
+            </a:r>
+          </a:p>
+          <a:p>
+            <a:pPr>
+              <a:spcBef>
+                <a:spcPts val="600"/>
+              </a:spcBef>
+              <a:defRPr sz="1150">
+                <a:solidFill>
+                  <a:srgbClr val="1E293B"/>
+                </a:solidFill>
+                <a:latin typeface="Arial"/>
+              </a:defRPr>
+            </a:pPr>
+            <a:r>
+              <a:t>• In addition, private biometrics get shipped to commercial cloud servers for monetization.</a:t>
             </a:r>
           </a:p>
         </p:txBody>
@@ -8459,8 +8556,8 @@
         </p:nvSpPr>
         <p:spPr>
           <a:xfrm>
-            <a:off x="731520" y="365760"/>
-            <a:ext cx="2084832" cy="384048"/>
+            <a:off x="731520" y="320040"/>
+            <a:ext cx="1773936" cy="320040"/>
           </a:xfrm>
           <a:prstGeom prst="rect">
             <a:avLst/>
@@ -8489,11 +8586,11 @@
           </a:fontRef>
         </p:style>
         <p:txBody>
-          <a:bodyPr rtlCol="0" anchor="ctr"/>
+          <a:bodyPr rtlCol="0" anchor="ctr" wrap="none" tIns="25400" bIns="25400" lIns="50800" rIns="50800"/>
           <a:lstStyle/>
           <a:p>
             <a:pPr algn="ctr">
-              <a:defRPr sz="1100" b="1">
+              <a:defRPr sz="1050" b="1">
                 <a:solidFill>
                   <a:srgbClr val="111111"/>
                 </a:solidFill>
@@ -8514,8 +8611,8 @@
         </p:nvSpPr>
         <p:spPr>
           <a:xfrm>
-            <a:off x="731520" y="804672"/>
-            <a:ext cx="10698480" cy="594360"/>
+            <a:off x="731520" y="713232"/>
+            <a:ext cx="10728655" cy="1143000"/>
           </a:xfrm>
           <a:prstGeom prst="rect">
             <a:avLst/>
@@ -8523,13 +8620,13 @@
           <a:noFill/>
         </p:spPr>
         <p:txBody>
-          <a:bodyPr wrap="square">
+          <a:bodyPr wrap="square" tIns="0" bIns="0" lIns="0" rIns="0">
             <a:spAutoFit/>
           </a:bodyPr>
           <a:lstStyle/>
           <a:p>
             <a:pPr>
-              <a:defRPr sz="2800" b="1">
+              <a:defRPr sz="2400" b="1">
                 <a:solidFill>
                   <a:srgbClr val="111111"/>
                 </a:solidFill>
@@ -8540,32 +8637,12 @@
               <a:t>The AWEN Difference: Personal Normal + Caring Mascot</a:t>
             </a:r>
           </a:p>
-        </p:txBody>
-      </p:sp>
-      <p:sp>
-        <p:nvSpPr>
-          <p:cNvPr id="5" name="TextBox 4"/>
-          <p:cNvSpPr txBox="1"/>
-          <p:nvPr/>
-        </p:nvSpPr>
-        <p:spPr>
-          <a:xfrm>
-            <a:off x="731520" y="1371600"/>
-            <a:ext cx="10698480" cy="411480"/>
-          </a:xfrm>
-          <a:prstGeom prst="rect">
-            <a:avLst/>
-          </a:prstGeom>
-          <a:noFill/>
-        </p:spPr>
-        <p:txBody>
-          <a:bodyPr wrap="square">
-            <a:spAutoFit/>
-          </a:bodyPr>
-          <a:lstStyle/>
-          <a:p>
-            <a:pPr>
-              <a:defRPr sz="1500">
+          <a:p>
+            <a:pPr>
+              <a:spcBef>
+                <a:spcPts val="300"/>
+              </a:spcBef>
+              <a:defRPr sz="1300">
                 <a:solidFill>
                   <a:srgbClr val="1E293B"/>
                 </a:solidFill>
@@ -8580,13 +8657,13 @@
       </p:sp>
       <p:sp>
         <p:nvSpPr>
-          <p:cNvPr id="6" name="Rectangle 5"/>
+          <p:cNvPr id="5" name="Rectangle 4"/>
           <p:cNvSpPr/>
           <p:nvPr/>
         </p:nvSpPr>
         <p:spPr>
           <a:xfrm>
-            <a:off x="786384" y="2066544"/>
+            <a:off x="786384" y="2020824"/>
             <a:ext cx="5257800" cy="2057400"/>
           </a:xfrm>
           <a:prstGeom prst="rect">
@@ -8623,13 +8700,13 @@
       </p:sp>
       <p:sp>
         <p:nvSpPr>
-          <p:cNvPr id="7" name="Rectangle 6"/>
+          <p:cNvPr id="6" name="Rectangle 5"/>
           <p:cNvSpPr/>
           <p:nvPr/>
         </p:nvSpPr>
         <p:spPr>
           <a:xfrm>
-            <a:off x="731520" y="2011680"/>
+            <a:off x="731520" y="1965960"/>
             <a:ext cx="5257800" cy="2057400"/>
           </a:xfrm>
           <a:prstGeom prst="rect">
@@ -8668,14 +8745,14 @@
       </p:sp>
       <p:sp>
         <p:nvSpPr>
-          <p:cNvPr id="8" name="TextBox 7"/>
+          <p:cNvPr id="7" name="TextBox 6"/>
           <p:cNvSpPr txBox="1"/>
           <p:nvPr/>
         </p:nvSpPr>
         <p:spPr>
           <a:xfrm>
-            <a:off x="1005840" y="2194560"/>
-            <a:ext cx="4709160" cy="1691640"/>
+            <a:off x="960120" y="2148840"/>
+            <a:ext cx="4800600" cy="1691640"/>
           </a:xfrm>
           <a:prstGeom prst="rect">
             <a:avLst/>
@@ -8683,13 +8760,13 @@
           <a:noFill/>
         </p:spPr>
         <p:txBody>
-          <a:bodyPr wrap="square">
+          <a:bodyPr wrap="square" tIns="25400" bIns="25400" lIns="25400" rIns="25400">
             <a:spAutoFit/>
           </a:bodyPr>
           <a:lstStyle/>
           <a:p>
             <a:pPr>
-              <a:defRPr sz="1800" b="1">
+              <a:defRPr sz="1500" b="1">
                 <a:solidFill>
                   <a:srgbClr val="111111"/>
                 </a:solidFill>
@@ -8703,9 +8780,9 @@
           <a:p>
             <a:pPr>
               <a:spcBef>
-                <a:spcPts val="800"/>
+                <a:spcPts val="500"/>
               </a:spcBef>
-              <a:defRPr sz="1400">
+              <a:defRPr sz="1150">
                 <a:solidFill>
                   <a:srgbClr val="1E293B"/>
                 </a:solidFill>
@@ -8713,20 +8790,20 @@
               </a:defRPr>
             </a:pPr>
             <a:r>
-              <a:t>Over the first 3 to 7 days, AWEN watches your daily routine and calculates YOUR personal normal range. It asks: 'Is your body unusual for YOU?' instead of applying a generic hospital rule.</a:t>
-            </a:r>
-          </a:p>
-        </p:txBody>
-      </p:sp>
-      <p:sp>
-        <p:nvSpPr>
-          <p:cNvPr id="9" name="Rectangle 8"/>
+              <a:t>Over the first 3 to 7 days, AWEN observes your daily routine and calculates YOUR personal normal range (μ ± 2σ). It asks: 'Is your body unusual for YOU?' instead of applying generic rules.</a:t>
+            </a:r>
+          </a:p>
+        </p:txBody>
+      </p:sp>
+      <p:sp>
+        <p:nvSpPr>
+          <p:cNvPr id="8" name="Rectangle 7"/>
           <p:cNvSpPr/>
           <p:nvPr/>
         </p:nvSpPr>
         <p:spPr>
           <a:xfrm>
-            <a:off x="6227064" y="2066544"/>
+            <a:off x="6227064" y="2020824"/>
             <a:ext cx="5257800" cy="2057400"/>
           </a:xfrm>
           <a:prstGeom prst="rect">
@@ -8763,13 +8840,13 @@
       </p:sp>
       <p:sp>
         <p:nvSpPr>
-          <p:cNvPr id="10" name="Rectangle 9"/>
+          <p:cNvPr id="9" name="Rectangle 8"/>
           <p:cNvSpPr/>
           <p:nvPr/>
         </p:nvSpPr>
         <p:spPr>
           <a:xfrm>
-            <a:off x="6172200" y="2011680"/>
+            <a:off x="6172200" y="1965960"/>
             <a:ext cx="5257800" cy="2057400"/>
           </a:xfrm>
           <a:prstGeom prst="rect">
@@ -8808,14 +8885,14 @@
       </p:sp>
       <p:sp>
         <p:nvSpPr>
-          <p:cNvPr id="11" name="TextBox 10"/>
+          <p:cNvPr id="10" name="TextBox 9"/>
           <p:cNvSpPr txBox="1"/>
           <p:nvPr/>
         </p:nvSpPr>
         <p:spPr>
           <a:xfrm>
-            <a:off x="6446520" y="2194560"/>
-            <a:ext cx="4709160" cy="1691640"/>
+            <a:off x="6400800" y="2148840"/>
+            <a:ext cx="4800600" cy="1691640"/>
           </a:xfrm>
           <a:prstGeom prst="rect">
             <a:avLst/>
@@ -8823,13 +8900,13 @@
           <a:noFill/>
         </p:spPr>
         <p:txBody>
-          <a:bodyPr wrap="square">
+          <a:bodyPr wrap="square" tIns="25400" bIns="25400" lIns="25400" rIns="25400">
             <a:spAutoFit/>
           </a:bodyPr>
           <a:lstStyle/>
           <a:p>
             <a:pPr>
-              <a:defRPr sz="1800" b="1">
+              <a:defRPr sz="1500" b="1">
                 <a:solidFill>
                   <a:srgbClr val="111111"/>
                 </a:solidFill>
@@ -8843,9 +8920,9 @@
           <a:p>
             <a:pPr>
               <a:spcBef>
-                <a:spcPts val="800"/>
+                <a:spcPts val="500"/>
               </a:spcBef>
-              <a:defRPr sz="1400">
+              <a:defRPr sz="1150">
                 <a:solidFill>
                   <a:srgbClr val="1E293B"/>
                 </a:solidFill>
@@ -8853,20 +8930,20 @@
               </a:defRPr>
             </a:pPr>
             <a:r>
-              <a:t>We connect a pulse sensor AND a motion sensor. If your heart rate is high because you are walking, AWEN knows it is healthy exercise and stays completely quiet.</a:t>
-            </a:r>
-          </a:p>
-        </p:txBody>
-      </p:sp>
-      <p:sp>
-        <p:nvSpPr>
-          <p:cNvPr id="12" name="Rectangle 11"/>
+              <a:t>We connect an optical pulse sensor AND an MPU-6050 motion sensor. If your pulse rises while walking, AWEN knows it is healthy exertion and stays completely quiet.</a:t>
+            </a:r>
+          </a:p>
+        </p:txBody>
+      </p:sp>
+      <p:sp>
+        <p:nvSpPr>
+          <p:cNvPr id="11" name="Rectangle 10"/>
           <p:cNvSpPr/>
           <p:nvPr/>
         </p:nvSpPr>
         <p:spPr>
           <a:xfrm>
-            <a:off x="786384" y="4306824"/>
+            <a:off x="786384" y="4261104"/>
             <a:ext cx="5257800" cy="2057400"/>
           </a:xfrm>
           <a:prstGeom prst="rect">
@@ -8903,13 +8980,13 @@
       </p:sp>
       <p:sp>
         <p:nvSpPr>
-          <p:cNvPr id="13" name="Rectangle 12"/>
+          <p:cNvPr id="12" name="Rectangle 11"/>
           <p:cNvSpPr/>
           <p:nvPr/>
         </p:nvSpPr>
         <p:spPr>
           <a:xfrm>
-            <a:off x="731520" y="4251960"/>
+            <a:off x="731520" y="4206240"/>
             <a:ext cx="5257800" cy="2057400"/>
           </a:xfrm>
           <a:prstGeom prst="rect">
@@ -8948,14 +9025,14 @@
       </p:sp>
       <p:sp>
         <p:nvSpPr>
-          <p:cNvPr id="14" name="TextBox 13"/>
+          <p:cNvPr id="13" name="TextBox 12"/>
           <p:cNvSpPr txBox="1"/>
           <p:nvPr/>
         </p:nvSpPr>
         <p:spPr>
           <a:xfrm>
-            <a:off x="1005840" y="4434840"/>
-            <a:ext cx="4709160" cy="1691640"/>
+            <a:off x="960120" y="4389120"/>
+            <a:ext cx="4800600" cy="1691640"/>
           </a:xfrm>
           <a:prstGeom prst="rect">
             <a:avLst/>
@@ -8963,13 +9040,13 @@
           <a:noFill/>
         </p:spPr>
         <p:txBody>
-          <a:bodyPr wrap="square">
+          <a:bodyPr wrap="square" tIns="25400" bIns="25400" lIns="25400" rIns="25400">
             <a:spAutoFit/>
           </a:bodyPr>
           <a:lstStyle/>
           <a:p>
             <a:pPr>
-              <a:defRPr sz="1800" b="1">
+              <a:defRPr sz="1500" b="1">
                 <a:solidFill>
                   <a:srgbClr val="111111"/>
                 </a:solidFill>
@@ -8983,9 +9060,9 @@
           <a:p>
             <a:pPr>
               <a:spcBef>
-                <a:spcPts val="800"/>
+                <a:spcPts val="500"/>
               </a:spcBef>
-              <a:defRPr sz="1400">
+              <a:defRPr sz="1150">
                 <a:solidFill>
                   <a:srgbClr val="1E293B"/>
                 </a:solidFill>
@@ -9000,13 +9077,13 @@
       </p:sp>
       <p:sp>
         <p:nvSpPr>
-          <p:cNvPr id="15" name="Rectangle 14"/>
+          <p:cNvPr id="14" name="Rectangle 13"/>
           <p:cNvSpPr/>
           <p:nvPr/>
         </p:nvSpPr>
         <p:spPr>
           <a:xfrm>
-            <a:off x="6227064" y="4306824"/>
+            <a:off x="6227064" y="4261104"/>
             <a:ext cx="5257800" cy="2057400"/>
           </a:xfrm>
           <a:prstGeom prst="rect">
@@ -9043,13 +9120,13 @@
       </p:sp>
       <p:sp>
         <p:nvSpPr>
-          <p:cNvPr id="16" name="Rectangle 15"/>
+          <p:cNvPr id="15" name="Rectangle 14"/>
           <p:cNvSpPr/>
           <p:nvPr/>
         </p:nvSpPr>
         <p:spPr>
           <a:xfrm>
-            <a:off x="6172200" y="4251960"/>
+            <a:off x="6172200" y="4206240"/>
             <a:ext cx="5257800" cy="2057400"/>
           </a:xfrm>
           <a:prstGeom prst="rect">
@@ -9088,14 +9165,14 @@
       </p:sp>
       <p:sp>
         <p:nvSpPr>
-          <p:cNvPr id="17" name="TextBox 16"/>
+          <p:cNvPr id="16" name="TextBox 15"/>
           <p:cNvSpPr txBox="1"/>
           <p:nvPr/>
         </p:nvSpPr>
         <p:spPr>
           <a:xfrm>
-            <a:off x="6446520" y="4434840"/>
-            <a:ext cx="4709160" cy="1691640"/>
+            <a:off x="6400800" y="4389120"/>
+            <a:ext cx="4800600" cy="1691640"/>
           </a:xfrm>
           <a:prstGeom prst="rect">
             <a:avLst/>
@@ -9103,13 +9180,13 @@
           <a:noFill/>
         </p:spPr>
         <p:txBody>
-          <a:bodyPr wrap="square">
+          <a:bodyPr wrap="square" tIns="25400" bIns="25400" lIns="25400" rIns="25400">
             <a:spAutoFit/>
           </a:bodyPr>
           <a:lstStyle/>
           <a:p>
             <a:pPr>
-              <a:defRPr sz="1800" b="1">
+              <a:defRPr sz="1500" b="1">
                 <a:solidFill>
                   <a:srgbClr val="111111"/>
                 </a:solidFill>
@@ -9117,15 +9194,15 @@
               </a:defRPr>
             </a:pPr>
             <a:r>
-              <a:t>4. 100% Private on Your Own Machine</a:t>
+              <a:t>4. 100% Private on Your Machine</a:t>
             </a:r>
           </a:p>
           <a:p>
             <a:pPr>
               <a:spcBef>
-                <a:spcPts val="800"/>
+                <a:spcPts val="500"/>
               </a:spcBef>
-              <a:defRPr sz="1400">
+              <a:defRPr sz="1150">
                 <a:solidFill>
                   <a:srgbClr val="1E293B"/>
                 </a:solidFill>
@@ -9133,7 +9210,7 @@
               </a:defRPr>
             </a:pPr>
             <a:r>
-              <a:t>No cloud database leaks. All sensor readings and check-ins are saved on your own computer in local SQLite (awen.db). Complete data privacy guaranteed.</a:t>
+              <a:t>Zero cloud databases. All sensor readings and reflections stay safely in a local SQLite database (awen.db) on your own laptop. Complete data sovereignty guaranteed.</a:t>
             </a:r>
           </a:p>
         </p:txBody>
@@ -9207,8 +9284,8 @@
         </p:nvSpPr>
         <p:spPr>
           <a:xfrm>
-            <a:off x="731520" y="365760"/>
-            <a:ext cx="2468880" cy="384048"/>
+            <a:off x="731520" y="320040"/>
+            <a:ext cx="2103120" cy="320040"/>
           </a:xfrm>
           <a:prstGeom prst="rect">
             <a:avLst/>
@@ -9237,11 +9314,11 @@
           </a:fontRef>
         </p:style>
         <p:txBody>
-          <a:bodyPr rtlCol="0" anchor="ctr"/>
+          <a:bodyPr rtlCol="0" anchor="ctr" wrap="none" tIns="25400" bIns="25400" lIns="50800" rIns="50800"/>
           <a:lstStyle/>
           <a:p>
             <a:pPr algn="ctr">
-              <a:defRPr sz="1100" b="1">
+              <a:defRPr sz="1050" b="1">
                 <a:solidFill>
                   <a:srgbClr val="111111"/>
                 </a:solidFill>
@@ -9262,8 +9339,8 @@
         </p:nvSpPr>
         <p:spPr>
           <a:xfrm>
-            <a:off x="731520" y="804672"/>
-            <a:ext cx="10698480" cy="594360"/>
+            <a:off x="731520" y="713232"/>
+            <a:ext cx="10728655" cy="1143000"/>
           </a:xfrm>
           <a:prstGeom prst="rect">
             <a:avLst/>
@@ -9271,13 +9348,13 @@
           <a:noFill/>
         </p:spPr>
         <p:txBody>
-          <a:bodyPr wrap="square">
+          <a:bodyPr wrap="square" tIns="0" bIns="0" lIns="0" rIns="0">
             <a:spAutoFit/>
           </a:bodyPr>
           <a:lstStyle/>
           <a:p>
             <a:pPr>
-              <a:defRPr sz="2800" b="1">
+              <a:defRPr sz="2400" b="1">
                 <a:solidFill>
                   <a:srgbClr val="111111"/>
                 </a:solidFill>
@@ -9288,32 +9365,12 @@
               <a:t>How The Whole System Works in 3 Clear Steps</a:t>
             </a:r>
           </a:p>
-        </p:txBody>
-      </p:sp>
-      <p:sp>
-        <p:nvSpPr>
-          <p:cNvPr id="5" name="TextBox 4"/>
-          <p:cNvSpPr txBox="1"/>
-          <p:nvPr/>
-        </p:nvSpPr>
-        <p:spPr>
-          <a:xfrm>
-            <a:off x="731520" y="1371600"/>
-            <a:ext cx="10698480" cy="411480"/>
-          </a:xfrm>
-          <a:prstGeom prst="rect">
-            <a:avLst/>
-          </a:prstGeom>
-          <a:noFill/>
-        </p:spPr>
-        <p:txBody>
-          <a:bodyPr wrap="square">
-            <a:spAutoFit/>
-          </a:bodyPr>
-          <a:lstStyle/>
-          <a:p>
-            <a:pPr>
-              <a:defRPr sz="1500">
+          <a:p>
+            <a:pPr>
+              <a:spcBef>
+                <a:spcPts val="300"/>
+              </a:spcBef>
+              <a:defRPr sz="1300">
                 <a:solidFill>
                   <a:srgbClr val="1E293B"/>
                 </a:solidFill>
@@ -9328,14 +9385,14 @@
       </p:sp>
       <p:sp>
         <p:nvSpPr>
-          <p:cNvPr id="6" name="Rectangle 5"/>
+          <p:cNvPr id="5" name="Rectangle 4"/>
           <p:cNvSpPr/>
           <p:nvPr/>
         </p:nvSpPr>
         <p:spPr>
           <a:xfrm>
-            <a:off x="786384" y="2066544"/>
-            <a:ext cx="3383280" cy="4114800"/>
+            <a:off x="786384" y="2020824"/>
+            <a:ext cx="3383280" cy="4389120"/>
           </a:xfrm>
           <a:prstGeom prst="rect">
             <a:avLst/>
@@ -9371,14 +9428,14 @@
       </p:sp>
       <p:sp>
         <p:nvSpPr>
-          <p:cNvPr id="7" name="Rectangle 6"/>
+          <p:cNvPr id="6" name="Rectangle 5"/>
           <p:cNvSpPr/>
           <p:nvPr/>
         </p:nvSpPr>
         <p:spPr>
           <a:xfrm>
-            <a:off x="731520" y="2011680"/>
-            <a:ext cx="3383280" cy="4114800"/>
+            <a:off x="731520" y="1965960"/>
+            <a:ext cx="3383280" cy="4389120"/>
           </a:xfrm>
           <a:prstGeom prst="rect">
             <a:avLst/>
@@ -9416,14 +9473,14 @@
       </p:sp>
       <p:sp>
         <p:nvSpPr>
-          <p:cNvPr id="8" name="TextBox 7"/>
+          <p:cNvPr id="7" name="TextBox 6"/>
           <p:cNvSpPr txBox="1"/>
           <p:nvPr/>
         </p:nvSpPr>
         <p:spPr>
           <a:xfrm>
-            <a:off x="960120" y="2240280"/>
-            <a:ext cx="2926080" cy="3657600"/>
+            <a:off x="932688" y="2167128"/>
+            <a:ext cx="2980944" cy="3986784"/>
           </a:xfrm>
           <a:prstGeom prst="rect">
             <a:avLst/>
@@ -9431,13 +9488,13 @@
           <a:noFill/>
         </p:spPr>
         <p:txBody>
-          <a:bodyPr wrap="square">
+          <a:bodyPr wrap="square" tIns="50800" bIns="50800" lIns="50800" rIns="50800">
             <a:spAutoFit/>
           </a:bodyPr>
           <a:lstStyle/>
           <a:p>
             <a:pPr>
-              <a:defRPr sz="1700" b="1">
+              <a:defRPr sz="1450" b="1">
                 <a:solidFill>
                   <a:srgbClr val="111111"/>
                 </a:solidFill>
@@ -9451,9 +9508,9 @@
           <a:p>
             <a:pPr>
               <a:spcBef>
-                <a:spcPts val="1200"/>
+                <a:spcPts val="600"/>
               </a:spcBef>
-              <a:defRPr sz="1400">
+              <a:defRPr sz="1200" b="1">
                 <a:solidFill>
                   <a:srgbClr val="1E293B"/>
                 </a:solidFill>
@@ -9463,40 +9520,99 @@
             <a:r>
               <a:t>ESP32 Microcontroller Pod</a:t>
             </a:r>
-            <a:br/>
-            <a:br/>
-            <a:r>
-              <a:t>• MAX30102: Reads pulse and oxygen.</a:t>
-            </a:r>
-            <a:br/>
-            <a:r>
-              <a:t>• MPU-6050: Detects if you are moving.</a:t>
-            </a:r>
-            <a:br/>
-            <a:r>
-              <a:t>• LM35: Measures skin temperature.</a:t>
-            </a:r>
-            <a:br/>
-            <a:r>
-              <a:t>• OLED Screen: Shows live pulse on wrist.</a:t>
-            </a:r>
-            <a:br/>
-            <a:r>
-              <a:t>• Sends data over Wi-Fi or USB cable.</a:t>
-            </a:r>
-          </a:p>
-        </p:txBody>
-      </p:sp>
-      <p:sp>
-        <p:nvSpPr>
-          <p:cNvPr id="9" name="Rectangle 8"/>
+          </a:p>
+          <a:p>
+            <a:pPr>
+              <a:spcBef>
+                <a:spcPts val="400"/>
+              </a:spcBef>
+              <a:defRPr sz="1100">
+                <a:solidFill>
+                  <a:srgbClr val="1E293B"/>
+                </a:solidFill>
+                <a:latin typeface="Arial"/>
+              </a:defRPr>
+            </a:pPr>
+            <a:r>
+              <a:t>• MAX30102: Reads pulse and oxygen (SpO2).</a:t>
+            </a:r>
+          </a:p>
+          <a:p>
+            <a:pPr>
+              <a:spcBef>
+                <a:spcPts val="400"/>
+              </a:spcBef>
+              <a:defRPr sz="1100">
+                <a:solidFill>
+                  <a:srgbClr val="1E293B"/>
+                </a:solidFill>
+                <a:latin typeface="Arial"/>
+              </a:defRPr>
+            </a:pPr>
+            <a:r>
+              <a:t>• MPU-6050: 3-axis motion sensor checks movement.</a:t>
+            </a:r>
+          </a:p>
+          <a:p>
+            <a:pPr>
+              <a:spcBef>
+                <a:spcPts val="400"/>
+              </a:spcBef>
+              <a:defRPr sz="1100">
+                <a:solidFill>
+                  <a:srgbClr val="1E293B"/>
+                </a:solidFill>
+                <a:latin typeface="Arial"/>
+              </a:defRPr>
+            </a:pPr>
+            <a:r>
+              <a:t>• LM35: Measures direct skin temperature.</a:t>
+            </a:r>
+          </a:p>
+          <a:p>
+            <a:pPr>
+              <a:spcBef>
+                <a:spcPts val="400"/>
+              </a:spcBef>
+              <a:defRPr sz="1100">
+                <a:solidFill>
+                  <a:srgbClr val="1E293B"/>
+                </a:solidFill>
+                <a:latin typeface="Arial"/>
+              </a:defRPr>
+            </a:pPr>
+            <a:r>
+              <a:t>• OLED Screen: Live pulse right on your wrist.</a:t>
+            </a:r>
+          </a:p>
+          <a:p>
+            <a:pPr>
+              <a:spcBef>
+                <a:spcPts val="400"/>
+              </a:spcBef>
+              <a:defRPr sz="1100">
+                <a:solidFill>
+                  <a:srgbClr val="1E293B"/>
+                </a:solidFill>
+                <a:latin typeface="Arial"/>
+              </a:defRPr>
+            </a:pPr>
+            <a:r>
+              <a:t>• Streams over local Wi-Fi or direct USB cable.</a:t>
+            </a:r>
+          </a:p>
+        </p:txBody>
+      </p:sp>
+      <p:sp>
+        <p:nvSpPr>
+          <p:cNvPr id="8" name="Rectangle 7"/>
           <p:cNvSpPr/>
           <p:nvPr/>
         </p:nvSpPr>
         <p:spPr>
           <a:xfrm>
-            <a:off x="4443984" y="2066544"/>
-            <a:ext cx="3383280" cy="4114800"/>
+            <a:off x="4443984" y="2020824"/>
+            <a:ext cx="3383280" cy="4389120"/>
           </a:xfrm>
           <a:prstGeom prst="rect">
             <a:avLst/>
@@ -9532,14 +9648,14 @@
       </p:sp>
       <p:sp>
         <p:nvSpPr>
-          <p:cNvPr id="10" name="Rectangle 9"/>
+          <p:cNvPr id="9" name="Rectangle 8"/>
           <p:cNvSpPr/>
           <p:nvPr/>
         </p:nvSpPr>
         <p:spPr>
           <a:xfrm>
-            <a:off x="4389120" y="2011680"/>
-            <a:ext cx="3383280" cy="4114800"/>
+            <a:off x="4389120" y="1965960"/>
+            <a:ext cx="3383280" cy="4389120"/>
           </a:xfrm>
           <a:prstGeom prst="rect">
             <a:avLst/>
@@ -9577,14 +9693,14 @@
       </p:sp>
       <p:sp>
         <p:nvSpPr>
-          <p:cNvPr id="11" name="TextBox 10"/>
+          <p:cNvPr id="10" name="TextBox 9"/>
           <p:cNvSpPr txBox="1"/>
           <p:nvPr/>
         </p:nvSpPr>
         <p:spPr>
           <a:xfrm>
-            <a:off x="4617720" y="2240280"/>
-            <a:ext cx="2926080" cy="3657600"/>
+            <a:off x="4590288" y="2167128"/>
+            <a:ext cx="2980944" cy="3986784"/>
           </a:xfrm>
           <a:prstGeom prst="rect">
             <a:avLst/>
@@ -9592,13 +9708,13 @@
           <a:noFill/>
         </p:spPr>
         <p:txBody>
-          <a:bodyPr wrap="square">
+          <a:bodyPr wrap="square" tIns="50800" bIns="50800" lIns="50800" rIns="50800">
             <a:spAutoFit/>
           </a:bodyPr>
           <a:lstStyle/>
           <a:p>
             <a:pPr>
-              <a:defRPr sz="1700" b="1">
+              <a:defRPr sz="1450" b="1">
                 <a:solidFill>
                   <a:srgbClr val="111111"/>
                 </a:solidFill>
@@ -9612,9 +9728,9 @@
           <a:p>
             <a:pPr>
               <a:spcBef>
-                <a:spcPts val="1200"/>
+                <a:spcPts val="600"/>
               </a:spcBef>
-              <a:defRPr sz="1400">
+              <a:defRPr sz="1200" b="1">
                 <a:solidFill>
                   <a:srgbClr val="1E293B"/>
                 </a:solidFill>
@@ -9624,36 +9740,99 @@
             <a:r>
               <a:t>Fast Local Server on Port 8000</a:t>
             </a:r>
-            <a:br/>
-            <a:br/>
-            <a:r>
-              <a:t>• Receives sensor data every second.</a:t>
-            </a:r>
-            <a:br/>
-            <a:r>
-              <a:t>• Calculates your rolling personal normal.</a:t>
-            </a:r>
-            <a:br/>
-            <a:r>
-              <a:t>• Runs Isolation Forest Machine Learning to spot genuine stress.</a:t>
-            </a:r>
-            <a:br/>
-            <a:r>
-              <a:t>• Saves everything into local SQLite database.</a:t>
-            </a:r>
-          </a:p>
-        </p:txBody>
-      </p:sp>
-      <p:sp>
-        <p:nvSpPr>
-          <p:cNvPr id="12" name="Rectangle 11"/>
+          </a:p>
+          <a:p>
+            <a:pPr>
+              <a:spcBef>
+                <a:spcPts val="400"/>
+              </a:spcBef>
+              <a:defRPr sz="1100">
+                <a:solidFill>
+                  <a:srgbClr val="1E293B"/>
+                </a:solidFill>
+                <a:latin typeface="Arial"/>
+              </a:defRPr>
+            </a:pPr>
+            <a:r>
+              <a:t>• Ingests sensor data every second in real time.</a:t>
+            </a:r>
+          </a:p>
+          <a:p>
+            <a:pPr>
+              <a:spcBef>
+                <a:spcPts val="400"/>
+              </a:spcBef>
+              <a:defRPr sz="1100">
+                <a:solidFill>
+                  <a:srgbClr val="1E293B"/>
+                </a:solidFill>
+                <a:latin typeface="Arial"/>
+              </a:defRPr>
+            </a:pPr>
+            <a:r>
+              <a:t>• Calculates your rolling personal normal (μ ± 2σ).</a:t>
+            </a:r>
+          </a:p>
+          <a:p>
+            <a:pPr>
+              <a:spcBef>
+                <a:spcPts val="400"/>
+              </a:spcBef>
+              <a:defRPr sz="1100">
+                <a:solidFill>
+                  <a:srgbClr val="1E293B"/>
+                </a:solidFill>
+                <a:latin typeface="Arial"/>
+              </a:defRPr>
+            </a:pPr>
+            <a:r>
+              <a:t>• Runs Isolation Forest ML to detect real stress.</a:t>
+            </a:r>
+          </a:p>
+          <a:p>
+            <a:pPr>
+              <a:spcBef>
+                <a:spcPts val="400"/>
+              </a:spcBef>
+              <a:defRPr sz="1100">
+                <a:solidFill>
+                  <a:srgbClr val="1E293B"/>
+                </a:solidFill>
+                <a:latin typeface="Arial"/>
+              </a:defRPr>
+            </a:pPr>
+            <a:r>
+              <a:t>• Stores all history in local SQLite (awen.db).</a:t>
+            </a:r>
+          </a:p>
+          <a:p>
+            <a:pPr>
+              <a:spcBef>
+                <a:spcPts val="400"/>
+              </a:spcBef>
+              <a:defRPr sz="1100">
+                <a:solidFill>
+                  <a:srgbClr val="1E293B"/>
+                </a:solidFill>
+                <a:latin typeface="Arial"/>
+              </a:defRPr>
+            </a:pPr>
+            <a:r>
+              <a:t>• 100% offline, zero internet connection needed.</a:t>
+            </a:r>
+          </a:p>
+        </p:txBody>
+      </p:sp>
+      <p:sp>
+        <p:nvSpPr>
+          <p:cNvPr id="11" name="Rectangle 10"/>
           <p:cNvSpPr/>
           <p:nvPr/>
         </p:nvSpPr>
         <p:spPr>
           <a:xfrm>
-            <a:off x="8101584" y="2066544"/>
-            <a:ext cx="3383280" cy="4114800"/>
+            <a:off x="8101584" y="2020824"/>
+            <a:ext cx="3383280" cy="4389120"/>
           </a:xfrm>
           <a:prstGeom prst="rect">
             <a:avLst/>
@@ -9689,14 +9868,14 @@
       </p:sp>
       <p:sp>
         <p:nvSpPr>
-          <p:cNvPr id="13" name="Rectangle 12"/>
+          <p:cNvPr id="12" name="Rectangle 11"/>
           <p:cNvSpPr/>
           <p:nvPr/>
         </p:nvSpPr>
         <p:spPr>
           <a:xfrm>
-            <a:off x="8046720" y="2011680"/>
-            <a:ext cx="3383280" cy="4114800"/>
+            <a:off x="8046720" y="1965960"/>
+            <a:ext cx="3383280" cy="4389120"/>
           </a:xfrm>
           <a:prstGeom prst="rect">
             <a:avLst/>
@@ -9734,14 +9913,14 @@
       </p:sp>
       <p:sp>
         <p:nvSpPr>
-          <p:cNvPr id="14" name="TextBox 13"/>
+          <p:cNvPr id="13" name="TextBox 12"/>
           <p:cNvSpPr txBox="1"/>
           <p:nvPr/>
         </p:nvSpPr>
         <p:spPr>
           <a:xfrm>
-            <a:off x="8275320" y="2240280"/>
-            <a:ext cx="2926080" cy="3657600"/>
+            <a:off x="8247888" y="2167128"/>
+            <a:ext cx="2980944" cy="3986784"/>
           </a:xfrm>
           <a:prstGeom prst="rect">
             <a:avLst/>
@@ -9749,13 +9928,13 @@
           <a:noFill/>
         </p:spPr>
         <p:txBody>
-          <a:bodyPr wrap="square">
+          <a:bodyPr wrap="square" tIns="50800" bIns="50800" lIns="50800" rIns="50800">
             <a:spAutoFit/>
           </a:bodyPr>
           <a:lstStyle/>
           <a:p>
             <a:pPr>
-              <a:defRPr sz="1700" b="1">
+              <a:defRPr sz="1450" b="1">
                 <a:solidFill>
                   <a:srgbClr val="111111"/>
                 </a:solidFill>
@@ -9769,9 +9948,9 @@
           <a:p>
             <a:pPr>
               <a:spcBef>
-                <a:spcPts val="1200"/>
+                <a:spcPts val="600"/>
               </a:spcBef>
-              <a:defRPr sz="1400">
+              <a:defRPr sz="1200" b="1">
                 <a:solidFill>
                   <a:srgbClr val="1E293B"/>
                 </a:solidFill>
@@ -9779,28 +9958,87 @@
               </a:defRPr>
             </a:pPr>
             <a:r>
-              <a:t>Modern Interactive Screen</a:t>
-            </a:r>
-            <a:br/>
-            <a:br/>
-            <a:r>
-              <a:t>• Shows live 60 FPS pulse waveform.</a:t>
-            </a:r>
-            <a:br/>
-            <a:r>
-              <a:t>• Mascot changes colors dynamically.</a:t>
-            </a:r>
-            <a:br/>
-            <a:r>
-              <a:t>• 7-Day Journey shows your pattern.</a:t>
-            </a:r>
-            <a:br/>
-            <a:r>
-              <a:t>• Friendly check-ins and breathing guides.</a:t>
-            </a:r>
-            <a:br/>
-            <a:r>
-              <a:t>• Zero medical jargon or confusing terms.</a:t>
+              <a:t>Modern Interactive Interface</a:t>
+            </a:r>
+          </a:p>
+          <a:p>
+            <a:pPr>
+              <a:spcBef>
+                <a:spcPts val="400"/>
+              </a:spcBef>
+              <a:defRPr sz="1100">
+                <a:solidFill>
+                  <a:srgbClr val="1E293B"/>
+                </a:solidFill>
+                <a:latin typeface="Arial"/>
+              </a:defRPr>
+            </a:pPr>
+            <a:r>
+              <a:t>• Live 60 FPS pulse waveform oscilloscope.</a:t>
+            </a:r>
+          </a:p>
+          <a:p>
+            <a:pPr>
+              <a:spcBef>
+                <a:spcPts val="400"/>
+              </a:spcBef>
+              <a:defRPr sz="1100">
+                <a:solidFill>
+                  <a:srgbClr val="1E293B"/>
+                </a:solidFill>
+                <a:latin typeface="Arial"/>
+              </a:defRPr>
+            </a:pPr>
+            <a:r>
+              <a:t>• Living Mascot responds dynamically to vitals.</a:t>
+            </a:r>
+          </a:p>
+          <a:p>
+            <a:pPr>
+              <a:spcBef>
+                <a:spcPts val="400"/>
+              </a:spcBef>
+              <a:defRPr sz="1100">
+                <a:solidFill>
+                  <a:srgbClr val="1E293B"/>
+                </a:solidFill>
+                <a:latin typeface="Arial"/>
+              </a:defRPr>
+            </a:pPr>
+            <a:r>
+              <a:t>• 7-Day Journey displays your baseline corridor.</a:t>
+            </a:r>
+          </a:p>
+          <a:p>
+            <a:pPr>
+              <a:spcBef>
+                <a:spcPts val="400"/>
+              </a:spcBef>
+              <a:defRPr sz="1100">
+                <a:solidFill>
+                  <a:srgbClr val="1E293B"/>
+                </a:solidFill>
+                <a:latin typeface="Arial"/>
+              </a:defRPr>
+            </a:pPr>
+            <a:r>
+              <a:t>• Empathetic check-ins and breathing guides.</a:t>
+            </a:r>
+          </a:p>
+          <a:p>
+            <a:pPr>
+              <a:spcBef>
+                <a:spcPts val="400"/>
+              </a:spcBef>
+              <a:defRPr sz="1100">
+                <a:solidFill>
+                  <a:srgbClr val="1E293B"/>
+                </a:solidFill>
+                <a:latin typeface="Arial"/>
+              </a:defRPr>
+            </a:pPr>
+            <a:r>
+              <a:t>• Free of confusing medical jargon.</a:t>
             </a:r>
           </a:p>
         </p:txBody>
@@ -9874,8 +10112,8 @@
         </p:nvSpPr>
         <p:spPr>
           <a:xfrm>
-            <a:off x="731520" y="365760"/>
-            <a:ext cx="2084832" cy="384048"/>
+            <a:off x="731520" y="320040"/>
+            <a:ext cx="1773936" cy="320040"/>
           </a:xfrm>
           <a:prstGeom prst="rect">
             <a:avLst/>
@@ -9904,11 +10142,11 @@
           </a:fontRef>
         </p:style>
         <p:txBody>
-          <a:bodyPr rtlCol="0" anchor="ctr"/>
+          <a:bodyPr rtlCol="0" anchor="ctr" wrap="none" tIns="25400" bIns="25400" lIns="50800" rIns="50800"/>
           <a:lstStyle/>
           <a:p>
             <a:pPr algn="ctr">
-              <a:defRPr sz="1100" b="1">
+              <a:defRPr sz="1050" b="1">
                 <a:solidFill>
                   <a:srgbClr val="111111"/>
                 </a:solidFill>
@@ -9929,8 +10167,8 @@
         </p:nvSpPr>
         <p:spPr>
           <a:xfrm>
-            <a:off x="731520" y="804672"/>
-            <a:ext cx="10698480" cy="594360"/>
+            <a:off x="731520" y="713232"/>
+            <a:ext cx="10728655" cy="1143000"/>
           </a:xfrm>
           <a:prstGeom prst="rect">
             <a:avLst/>
@@ -9938,13 +10176,13 @@
           <a:noFill/>
         </p:spPr>
         <p:txBody>
-          <a:bodyPr wrap="square">
+          <a:bodyPr wrap="square" tIns="0" bIns="0" lIns="0" rIns="0">
             <a:spAutoFit/>
           </a:bodyPr>
           <a:lstStyle/>
           <a:p>
             <a:pPr>
-              <a:defRPr sz="2800" b="1">
+              <a:defRPr sz="2400" b="1">
                 <a:solidFill>
                   <a:srgbClr val="111111"/>
                 </a:solidFill>
@@ -9955,32 +10193,12 @@
               <a:t>The Physical Sensors We Connected &amp; Programmed</a:t>
             </a:r>
           </a:p>
-        </p:txBody>
-      </p:sp>
-      <p:sp>
-        <p:nvSpPr>
-          <p:cNvPr id="5" name="TextBox 4"/>
-          <p:cNvSpPr txBox="1"/>
-          <p:nvPr/>
-        </p:nvSpPr>
-        <p:spPr>
-          <a:xfrm>
-            <a:off x="731520" y="1371600"/>
-            <a:ext cx="10698480" cy="411480"/>
-          </a:xfrm>
-          <a:prstGeom prst="rect">
-            <a:avLst/>
-          </a:prstGeom>
-          <a:noFill/>
-        </p:spPr>
-        <p:txBody>
-          <a:bodyPr wrap="square">
-            <a:spAutoFit/>
-          </a:bodyPr>
-          <a:lstStyle/>
-          <a:p>
-            <a:pPr>
-              <a:defRPr sz="1500">
+          <a:p>
+            <a:pPr>
+              <a:spcBef>
+                <a:spcPts val="300"/>
+              </a:spcBef>
+              <a:defRPr sz="1300">
                 <a:solidFill>
                   <a:srgbClr val="1E293B"/>
                 </a:solidFill>
@@ -9995,14 +10213,14 @@
       </p:sp>
       <p:sp>
         <p:nvSpPr>
-          <p:cNvPr id="6" name="Rectangle 5"/>
+          <p:cNvPr id="5" name="Rectangle 4"/>
           <p:cNvSpPr/>
           <p:nvPr/>
         </p:nvSpPr>
         <p:spPr>
           <a:xfrm>
-            <a:off x="786384" y="2066544"/>
-            <a:ext cx="3474720" cy="2057400"/>
+            <a:off x="786384" y="2020824"/>
+            <a:ext cx="3429000" cy="2057400"/>
           </a:xfrm>
           <a:prstGeom prst="rect">
             <a:avLst/>
@@ -10038,14 +10256,14 @@
       </p:sp>
       <p:sp>
         <p:nvSpPr>
-          <p:cNvPr id="7" name="Rectangle 6"/>
+          <p:cNvPr id="6" name="Rectangle 5"/>
           <p:cNvSpPr/>
           <p:nvPr/>
         </p:nvSpPr>
         <p:spPr>
           <a:xfrm>
-            <a:off x="731520" y="2011680"/>
-            <a:ext cx="3474720" cy="2057400"/>
+            <a:off x="731520" y="1965960"/>
+            <a:ext cx="3429000" cy="2057400"/>
           </a:xfrm>
           <a:prstGeom prst="rect">
             <a:avLst/>
@@ -10083,14 +10301,14 @@
       </p:sp>
       <p:sp>
         <p:nvSpPr>
-          <p:cNvPr id="8" name="TextBox 7"/>
+          <p:cNvPr id="7" name="TextBox 6"/>
           <p:cNvSpPr txBox="1"/>
           <p:nvPr/>
         </p:nvSpPr>
         <p:spPr>
           <a:xfrm>
-            <a:off x="914400" y="2176272"/>
-            <a:ext cx="3108960" cy="1691640"/>
+            <a:off x="914400" y="2130552"/>
+            <a:ext cx="3063240" cy="1691640"/>
           </a:xfrm>
           <a:prstGeom prst="rect">
             <a:avLst/>
@@ -10098,13 +10316,13 @@
           <a:noFill/>
         </p:spPr>
         <p:txBody>
-          <a:bodyPr wrap="square">
+          <a:bodyPr wrap="square" tIns="25400" bIns="25400" lIns="25400" rIns="25400">
             <a:spAutoFit/>
           </a:bodyPr>
           <a:lstStyle/>
           <a:p>
             <a:pPr>
-              <a:defRPr sz="1700" b="1">
+              <a:defRPr sz="1400" b="1">
                 <a:solidFill>
                   <a:srgbClr val="111111"/>
                 </a:solidFill>
@@ -10118,9 +10336,9 @@
           <a:p>
             <a:pPr>
               <a:spcBef>
-                <a:spcPts val="600"/>
+                <a:spcPts val="400"/>
               </a:spcBef>
-              <a:defRPr sz="1350">
+              <a:defRPr sz="1100">
                 <a:solidFill>
                   <a:srgbClr val="1E293B"/>
                 </a:solidFill>
@@ -10128,21 +10346,21 @@
               </a:defRPr>
             </a:pPr>
             <a:r>
-              <a:t>The master brain. Dual-core 240MHz chip with built-in Wi-Fi and Bluetooth. Handles sensor reading and web streaming simultaneously.</a:t>
-            </a:r>
-          </a:p>
-        </p:txBody>
-      </p:sp>
-      <p:sp>
-        <p:nvSpPr>
-          <p:cNvPr id="9" name="Rectangle 8"/>
+              <a:t>Dual-core 240MHz chip with built-in Wi-Fi and Bluetooth. Handles sensor reading and web streaming simultaneously.</a:t>
+            </a:r>
+          </a:p>
+        </p:txBody>
+      </p:sp>
+      <p:sp>
+        <p:nvSpPr>
+          <p:cNvPr id="8" name="Rectangle 7"/>
           <p:cNvSpPr/>
           <p:nvPr/>
         </p:nvSpPr>
         <p:spPr>
           <a:xfrm>
-            <a:off x="4398264" y="2066544"/>
-            <a:ext cx="3474720" cy="2057400"/>
+            <a:off x="4398264" y="2020824"/>
+            <a:ext cx="3429000" cy="2057400"/>
           </a:xfrm>
           <a:prstGeom prst="rect">
             <a:avLst/>
@@ -10178,14 +10396,14 @@
       </p:sp>
       <p:sp>
         <p:nvSpPr>
-          <p:cNvPr id="10" name="Rectangle 9"/>
+          <p:cNvPr id="9" name="Rectangle 8"/>
           <p:cNvSpPr/>
           <p:nvPr/>
         </p:nvSpPr>
         <p:spPr>
           <a:xfrm>
-            <a:off x="4343400" y="2011680"/>
-            <a:ext cx="3474720" cy="2057400"/>
+            <a:off x="4343400" y="1965960"/>
+            <a:ext cx="3429000" cy="2057400"/>
           </a:xfrm>
           <a:prstGeom prst="rect">
             <a:avLst/>
@@ -10223,14 +10441,14 @@
       </p:sp>
       <p:sp>
         <p:nvSpPr>
-          <p:cNvPr id="11" name="TextBox 10"/>
+          <p:cNvPr id="10" name="TextBox 9"/>
           <p:cNvSpPr txBox="1"/>
           <p:nvPr/>
         </p:nvSpPr>
         <p:spPr>
           <a:xfrm>
-            <a:off x="4526280" y="2176272"/>
-            <a:ext cx="3108960" cy="1691640"/>
+            <a:off x="4526280" y="2130552"/>
+            <a:ext cx="3063240" cy="1691640"/>
           </a:xfrm>
           <a:prstGeom prst="rect">
             <a:avLst/>
@@ -10238,13 +10456,13 @@
           <a:noFill/>
         </p:spPr>
         <p:txBody>
-          <a:bodyPr wrap="square">
+          <a:bodyPr wrap="square" tIns="25400" bIns="25400" lIns="25400" rIns="25400">
             <a:spAutoFit/>
           </a:bodyPr>
           <a:lstStyle/>
           <a:p>
             <a:pPr>
-              <a:defRPr sz="1700" b="1">
+              <a:defRPr sz="1400" b="1">
                 <a:solidFill>
                   <a:srgbClr val="111111"/>
                 </a:solidFill>
@@ -10258,9 +10476,9 @@
           <a:p>
             <a:pPr>
               <a:spcBef>
-                <a:spcPts val="600"/>
+                <a:spcPts val="400"/>
               </a:spcBef>
-              <a:defRPr sz="1350">
+              <a:defRPr sz="1100">
                 <a:solidFill>
                   <a:srgbClr val="1E293B"/>
                 </a:solidFill>
@@ -10268,21 +10486,21 @@
               </a:defRPr>
             </a:pPr>
             <a:r>
-              <a:t>High-precision optical sensor. Uses red and infrared light to read arterial pulse and oxygen percentage at I2C address 0x57.</a:t>
-            </a:r>
-          </a:p>
-        </p:txBody>
-      </p:sp>
-      <p:sp>
-        <p:nvSpPr>
-          <p:cNvPr id="12" name="Rectangle 11"/>
+              <a:t>High-precision optical sensor. Uses red (660nm) and infrared (880nm) light to read pulse and SpO2 at I2C address 0x57.</a:t>
+            </a:r>
+          </a:p>
+        </p:txBody>
+      </p:sp>
+      <p:sp>
+        <p:nvSpPr>
+          <p:cNvPr id="11" name="Rectangle 10"/>
           <p:cNvSpPr/>
           <p:nvPr/>
         </p:nvSpPr>
         <p:spPr>
           <a:xfrm>
-            <a:off x="8010144" y="2066544"/>
-            <a:ext cx="3474720" cy="2057400"/>
+            <a:off x="8010144" y="2020824"/>
+            <a:ext cx="3429000" cy="2057400"/>
           </a:xfrm>
           <a:prstGeom prst="rect">
             <a:avLst/>
@@ -10318,14 +10536,14 @@
       </p:sp>
       <p:sp>
         <p:nvSpPr>
-          <p:cNvPr id="13" name="Rectangle 12"/>
+          <p:cNvPr id="12" name="Rectangle 11"/>
           <p:cNvSpPr/>
           <p:nvPr/>
         </p:nvSpPr>
         <p:spPr>
           <a:xfrm>
-            <a:off x="7955280" y="2011680"/>
-            <a:ext cx="3474720" cy="2057400"/>
+            <a:off x="7955280" y="1965960"/>
+            <a:ext cx="3429000" cy="2057400"/>
           </a:xfrm>
           <a:prstGeom prst="rect">
             <a:avLst/>
@@ -10363,14 +10581,14 @@
       </p:sp>
       <p:sp>
         <p:nvSpPr>
-          <p:cNvPr id="14" name="TextBox 13"/>
+          <p:cNvPr id="13" name="TextBox 12"/>
           <p:cNvSpPr txBox="1"/>
           <p:nvPr/>
         </p:nvSpPr>
         <p:spPr>
           <a:xfrm>
-            <a:off x="8138160" y="2176272"/>
-            <a:ext cx="3108960" cy="1691640"/>
+            <a:off x="8138160" y="2130552"/>
+            <a:ext cx="3063240" cy="1691640"/>
           </a:xfrm>
           <a:prstGeom prst="rect">
             <a:avLst/>
@@ -10378,13 +10596,13 @@
           <a:noFill/>
         </p:spPr>
         <p:txBody>
-          <a:bodyPr wrap="square">
+          <a:bodyPr wrap="square" tIns="25400" bIns="25400" lIns="25400" rIns="25400">
             <a:spAutoFit/>
           </a:bodyPr>
           <a:lstStyle/>
           <a:p>
             <a:pPr>
-              <a:defRPr sz="1700" b="1">
+              <a:defRPr sz="1400" b="1">
                 <a:solidFill>
                   <a:srgbClr val="111111"/>
                 </a:solidFill>
@@ -10398,9 +10616,9 @@
           <a:p>
             <a:pPr>
               <a:spcBef>
-                <a:spcPts val="600"/>
+                <a:spcPts val="400"/>
               </a:spcBef>
-              <a:defRPr sz="1350">
+              <a:defRPr sz="1100">
                 <a:solidFill>
                   <a:srgbClr val="1E293B"/>
                 </a:solidFill>
@@ -10408,21 +10626,21 @@
               </a:defRPr>
             </a:pPr>
             <a:r>
-              <a:t>3-axis accelerometer and gyro at I2C address 0x68. Measures total movement vector |a| to know when the user is moving.</a:t>
-            </a:r>
-          </a:p>
-        </p:txBody>
-      </p:sp>
-      <p:sp>
-        <p:nvSpPr>
-          <p:cNvPr id="15" name="Rectangle 14"/>
+              <a:t>3-axis accelerometer and gyro at I2C address 0x68. Computes total movement vector |a| to know when the user is moving.</a:t>
+            </a:r>
+          </a:p>
+        </p:txBody>
+      </p:sp>
+      <p:sp>
+        <p:nvSpPr>
+          <p:cNvPr id="14" name="Rectangle 13"/>
           <p:cNvSpPr/>
           <p:nvPr/>
         </p:nvSpPr>
         <p:spPr>
           <a:xfrm>
-            <a:off x="786384" y="4306824"/>
-            <a:ext cx="3474720" cy="2057400"/>
+            <a:off x="786384" y="4261104"/>
+            <a:ext cx="3429000" cy="2057400"/>
           </a:xfrm>
           <a:prstGeom prst="rect">
             <a:avLst/>
@@ -10458,14 +10676,14 @@
       </p:sp>
       <p:sp>
         <p:nvSpPr>
-          <p:cNvPr id="16" name="Rectangle 15"/>
+          <p:cNvPr id="15" name="Rectangle 14"/>
           <p:cNvSpPr/>
           <p:nvPr/>
         </p:nvSpPr>
         <p:spPr>
           <a:xfrm>
-            <a:off x="731520" y="4251960"/>
-            <a:ext cx="3474720" cy="2057400"/>
+            <a:off x="731520" y="4206240"/>
+            <a:ext cx="3429000" cy="2057400"/>
           </a:xfrm>
           <a:prstGeom prst="rect">
             <a:avLst/>
@@ -10503,14 +10721,14 @@
       </p:sp>
       <p:sp>
         <p:nvSpPr>
-          <p:cNvPr id="17" name="TextBox 16"/>
+          <p:cNvPr id="16" name="TextBox 15"/>
           <p:cNvSpPr txBox="1"/>
           <p:nvPr/>
         </p:nvSpPr>
         <p:spPr>
           <a:xfrm>
-            <a:off x="914400" y="4416552"/>
-            <a:ext cx="3108960" cy="1691640"/>
+            <a:off x="914400" y="4370832"/>
+            <a:ext cx="3063240" cy="1691640"/>
           </a:xfrm>
           <a:prstGeom prst="rect">
             <a:avLst/>
@@ -10518,13 +10736,13 @@
           <a:noFill/>
         </p:spPr>
         <p:txBody>
-          <a:bodyPr wrap="square">
+          <a:bodyPr wrap="square" tIns="25400" bIns="25400" lIns="25400" rIns="25400">
             <a:spAutoFit/>
           </a:bodyPr>
           <a:lstStyle/>
           <a:p>
             <a:pPr>
-              <a:defRPr sz="1700" b="1">
+              <a:defRPr sz="1400" b="1">
                 <a:solidFill>
                   <a:srgbClr val="111111"/>
                 </a:solidFill>
@@ -10538,9 +10756,9 @@
           <a:p>
             <a:pPr>
               <a:spcBef>
-                <a:spcPts val="600"/>
+                <a:spcPts val="400"/>
               </a:spcBef>
-              <a:defRPr sz="1350">
+              <a:defRPr sz="1100">
                 <a:solidFill>
                   <a:srgbClr val="1E293B"/>
                 </a:solidFill>
@@ -10548,21 +10766,21 @@
               </a:defRPr>
             </a:pPr>
             <a:r>
-              <a:t>Reads skin temperature directly in Celsius (+10 mV/°C) via ESP32 analog pin GPIO 34.</a:t>
-            </a:r>
-          </a:p>
-        </p:txBody>
-      </p:sp>
-      <p:sp>
-        <p:nvSpPr>
-          <p:cNvPr id="18" name="Rectangle 17"/>
+              <a:t>Measures skin temperature directly in Celsius (+10 mV/°C) via ESP32 analog pin GPIO 34 with noise filtering.</a:t>
+            </a:r>
+          </a:p>
+        </p:txBody>
+      </p:sp>
+      <p:sp>
+        <p:nvSpPr>
+          <p:cNvPr id="17" name="Rectangle 16"/>
           <p:cNvSpPr/>
           <p:nvPr/>
         </p:nvSpPr>
         <p:spPr>
           <a:xfrm>
-            <a:off x="4398264" y="4306824"/>
-            <a:ext cx="3474720" cy="2057400"/>
+            <a:off x="4398264" y="4261104"/>
+            <a:ext cx="3429000" cy="2057400"/>
           </a:xfrm>
           <a:prstGeom prst="rect">
             <a:avLst/>
@@ -10598,14 +10816,14 @@
       </p:sp>
       <p:sp>
         <p:nvSpPr>
-          <p:cNvPr id="19" name="Rectangle 18"/>
+          <p:cNvPr id="18" name="Rectangle 17"/>
           <p:cNvSpPr/>
           <p:nvPr/>
         </p:nvSpPr>
         <p:spPr>
           <a:xfrm>
-            <a:off x="4343400" y="4251960"/>
-            <a:ext cx="3474720" cy="2057400"/>
+            <a:off x="4343400" y="4206240"/>
+            <a:ext cx="3429000" cy="2057400"/>
           </a:xfrm>
           <a:prstGeom prst="rect">
             <a:avLst/>
@@ -10643,14 +10861,14 @@
       </p:sp>
       <p:sp>
         <p:nvSpPr>
-          <p:cNvPr id="20" name="TextBox 19"/>
+          <p:cNvPr id="19" name="TextBox 18"/>
           <p:cNvSpPr txBox="1"/>
           <p:nvPr/>
         </p:nvSpPr>
         <p:spPr>
           <a:xfrm>
-            <a:off x="4526280" y="4416552"/>
-            <a:ext cx="3108960" cy="1691640"/>
+            <a:off x="4526280" y="4370832"/>
+            <a:ext cx="3063240" cy="1691640"/>
           </a:xfrm>
           <a:prstGeom prst="rect">
             <a:avLst/>
@@ -10658,13 +10876,13 @@
           <a:noFill/>
         </p:spPr>
         <p:txBody>
-          <a:bodyPr wrap="square">
+          <a:bodyPr wrap="square" tIns="25400" bIns="25400" lIns="25400" rIns="25400">
             <a:spAutoFit/>
           </a:bodyPr>
           <a:lstStyle/>
           <a:p>
             <a:pPr>
-              <a:defRPr sz="1700" b="1">
+              <a:defRPr sz="1400" b="1">
                 <a:solidFill>
                   <a:srgbClr val="111111"/>
                 </a:solidFill>
@@ -10678,9 +10896,9 @@
           <a:p>
             <a:pPr>
               <a:spcBef>
-                <a:spcPts val="600"/>
+                <a:spcPts val="400"/>
               </a:spcBef>
-              <a:defRPr sz="1350">
+              <a:defRPr sz="1100">
                 <a:solidFill>
                   <a:srgbClr val="1E293B"/>
                 </a:solidFill>
@@ -10688,21 +10906,21 @@
               </a:defRPr>
             </a:pPr>
             <a:r>
-              <a:t>Mini 0.96-inch screen on the pod showing live pulse, Wi-Fi IP, and motion status at I2C address 0x3C.</a:t>
-            </a:r>
-          </a:p>
-        </p:txBody>
-      </p:sp>
-      <p:sp>
-        <p:nvSpPr>
-          <p:cNvPr id="21" name="Rectangle 20"/>
+              <a:t>Mini 0.96-inch display on the pod showing live pulse, Wi-Fi IP, and motion status at I2C address 0x3C.</a:t>
+            </a:r>
+          </a:p>
+        </p:txBody>
+      </p:sp>
+      <p:sp>
+        <p:nvSpPr>
+          <p:cNvPr id="20" name="Rectangle 19"/>
           <p:cNvSpPr/>
           <p:nvPr/>
         </p:nvSpPr>
         <p:spPr>
           <a:xfrm>
-            <a:off x="8010144" y="4306824"/>
-            <a:ext cx="3474720" cy="2057400"/>
+            <a:off x="8010144" y="4261104"/>
+            <a:ext cx="3429000" cy="2057400"/>
           </a:xfrm>
           <a:prstGeom prst="rect">
             <a:avLst/>
@@ -10738,14 +10956,14 @@
       </p:sp>
       <p:sp>
         <p:nvSpPr>
-          <p:cNvPr id="22" name="Rectangle 21"/>
+          <p:cNvPr id="21" name="Rectangle 20"/>
           <p:cNvSpPr/>
           <p:nvPr/>
         </p:nvSpPr>
         <p:spPr>
           <a:xfrm>
-            <a:off x="7955280" y="4251960"/>
-            <a:ext cx="3474720" cy="2057400"/>
+            <a:off x="7955280" y="4206240"/>
+            <a:ext cx="3429000" cy="2057400"/>
           </a:xfrm>
           <a:prstGeom prst="rect">
             <a:avLst/>
@@ -10783,14 +11001,14 @@
       </p:sp>
       <p:sp>
         <p:nvSpPr>
-          <p:cNvPr id="23" name="TextBox 22"/>
+          <p:cNvPr id="22" name="TextBox 21"/>
           <p:cNvSpPr txBox="1"/>
           <p:nvPr/>
         </p:nvSpPr>
         <p:spPr>
           <a:xfrm>
-            <a:off x="8138160" y="4416552"/>
-            <a:ext cx="3108960" cy="1691640"/>
+            <a:off x="8138160" y="4370832"/>
+            <a:ext cx="3063240" cy="1691640"/>
           </a:xfrm>
           <a:prstGeom prst="rect">
             <a:avLst/>
@@ -10798,13 +11016,13 @@
           <a:noFill/>
         </p:spPr>
         <p:txBody>
-          <a:bodyPr wrap="square">
+          <a:bodyPr wrap="square" tIns="25400" bIns="25400" lIns="25400" rIns="25400">
             <a:spAutoFit/>
           </a:bodyPr>
           <a:lstStyle/>
           <a:p>
             <a:pPr>
-              <a:defRPr sz="1700" b="1">
+              <a:defRPr sz="1400" b="1">
                 <a:solidFill>
                   <a:srgbClr val="111111"/>
                 </a:solidFill>
@@ -10812,15 +11030,15 @@
               </a:defRPr>
             </a:pPr>
             <a:r>
-              <a:t>Wi-Fi + USB Dual Link</a:t>
+              <a:t>Dual Wi-Fi + USB Link</a:t>
             </a:r>
           </a:p>
           <a:p>
             <a:pPr>
               <a:spcBef>
-                <a:spcPts val="600"/>
+                <a:spcPts val="400"/>
               </a:spcBef>
-              <a:defRPr sz="1350">
+              <a:defRPr sz="1100">
                 <a:solidFill>
                   <a:srgbClr val="1E293B"/>
                 </a:solidFill>
@@ -10828,7 +11046,7 @@
               </a:defRPr>
             </a:pPr>
             <a:r>
-              <a:t>Can stream over local Wi-Fi (IP: 172.20.168.254:80) or direct USB cable with zero configuration.</a:t>
+              <a:t>Streams over local Wi-Fi (IP: 10.201.146.254:80) or direct USB cable with zero configuration required.</a:t>
             </a:r>
           </a:p>
         </p:txBody>
@@ -10902,8 +11120,8 @@
         </p:nvSpPr>
         <p:spPr>
           <a:xfrm>
-            <a:off x="731520" y="365760"/>
-            <a:ext cx="1956816" cy="384048"/>
+            <a:off x="731520" y="320040"/>
+            <a:ext cx="1664207" cy="320040"/>
           </a:xfrm>
           <a:prstGeom prst="rect">
             <a:avLst/>
@@ -10932,11 +11150,11 @@
           </a:fontRef>
         </p:style>
         <p:txBody>
-          <a:bodyPr rtlCol="0" anchor="ctr"/>
+          <a:bodyPr rtlCol="0" anchor="ctr" wrap="none" tIns="25400" bIns="25400" lIns="50800" rIns="50800"/>
           <a:lstStyle/>
           <a:p>
             <a:pPr algn="ctr">
-              <a:defRPr sz="1100" b="1">
+              <a:defRPr sz="1050" b="1">
                 <a:solidFill>
                   <a:srgbClr val="111111"/>
                 </a:solidFill>
@@ -10957,8 +11175,8 @@
         </p:nvSpPr>
         <p:spPr>
           <a:xfrm>
-            <a:off x="731520" y="804672"/>
-            <a:ext cx="10698480" cy="594360"/>
+            <a:off x="731520" y="713232"/>
+            <a:ext cx="10728655" cy="1143000"/>
           </a:xfrm>
           <a:prstGeom prst="rect">
             <a:avLst/>
@@ -10966,13 +11184,13 @@
           <a:noFill/>
         </p:spPr>
         <p:txBody>
-          <a:bodyPr wrap="square">
+          <a:bodyPr wrap="square" tIns="0" bIns="0" lIns="0" rIns="0">
             <a:spAutoFit/>
           </a:bodyPr>
           <a:lstStyle/>
           <a:p>
             <a:pPr>
-              <a:defRPr sz="2800" b="1">
+              <a:defRPr sz="2400" b="1">
                 <a:solidFill>
                   <a:srgbClr val="111111"/>
                 </a:solidFill>
@@ -10983,32 +11201,12 @@
               <a:t>How We Stopped False Alarms &amp; Constant Beeping</a:t>
             </a:r>
           </a:p>
-        </p:txBody>
-      </p:sp>
-      <p:sp>
-        <p:nvSpPr>
-          <p:cNvPr id="5" name="TextBox 4"/>
-          <p:cNvSpPr txBox="1"/>
-          <p:nvPr/>
-        </p:nvSpPr>
-        <p:spPr>
-          <a:xfrm>
-            <a:off x="731520" y="1371600"/>
-            <a:ext cx="10698480" cy="411480"/>
-          </a:xfrm>
-          <a:prstGeom prst="rect">
-            <a:avLst/>
-          </a:prstGeom>
-          <a:noFill/>
-        </p:spPr>
-        <p:txBody>
-          <a:bodyPr wrap="square">
-            <a:spAutoFit/>
-          </a:bodyPr>
-          <a:lstStyle/>
-          <a:p>
-            <a:pPr>
-              <a:defRPr sz="1500">
+          <a:p>
+            <a:pPr>
+              <a:spcBef>
+                <a:spcPts val="300"/>
+              </a:spcBef>
+              <a:defRPr sz="1300">
                 <a:solidFill>
                   <a:srgbClr val="1E293B"/>
                 </a:solidFill>
@@ -11023,14 +11221,14 @@
       </p:sp>
       <p:sp>
         <p:nvSpPr>
-          <p:cNvPr id="6" name="Rectangle 5"/>
+          <p:cNvPr id="5" name="Rectangle 4"/>
           <p:cNvSpPr/>
           <p:nvPr/>
         </p:nvSpPr>
         <p:spPr>
           <a:xfrm>
-            <a:off x="786384" y="2066544"/>
-            <a:ext cx="5303520" cy="4114800"/>
+            <a:off x="786384" y="2020824"/>
+            <a:ext cx="5257800" cy="4389120"/>
           </a:xfrm>
           <a:prstGeom prst="rect">
             <a:avLst/>
@@ -11066,14 +11264,14 @@
       </p:sp>
       <p:sp>
         <p:nvSpPr>
-          <p:cNvPr id="7" name="Rectangle 6"/>
+          <p:cNvPr id="6" name="Rectangle 5"/>
           <p:cNvSpPr/>
           <p:nvPr/>
         </p:nvSpPr>
         <p:spPr>
           <a:xfrm>
-            <a:off x="731520" y="2011680"/>
-            <a:ext cx="5303520" cy="4114800"/>
+            <a:off x="731520" y="1965960"/>
+            <a:ext cx="5257800" cy="4389120"/>
           </a:xfrm>
           <a:prstGeom prst="rect">
             <a:avLst/>
@@ -11111,14 +11309,14 @@
       </p:sp>
       <p:sp>
         <p:nvSpPr>
-          <p:cNvPr id="8" name="TextBox 7"/>
+          <p:cNvPr id="7" name="TextBox 6"/>
           <p:cNvSpPr txBox="1"/>
           <p:nvPr/>
         </p:nvSpPr>
         <p:spPr>
           <a:xfrm>
-            <a:off x="960120" y="2194560"/>
-            <a:ext cx="4846320" cy="3749039"/>
+            <a:off x="932688" y="2148840"/>
+            <a:ext cx="4846320" cy="4023360"/>
           </a:xfrm>
           <a:prstGeom prst="rect">
             <a:avLst/>
@@ -11126,13 +11324,13 @@
           <a:noFill/>
         </p:spPr>
         <p:txBody>
-          <a:bodyPr wrap="square">
+          <a:bodyPr wrap="square" tIns="25400" bIns="25400" lIns="25400" rIns="25400">
             <a:spAutoFit/>
           </a:bodyPr>
           <a:lstStyle/>
           <a:p>
             <a:pPr>
-              <a:defRPr sz="2000" b="1">
+              <a:defRPr sz="1600" b="1">
                 <a:solidFill>
                   <a:srgbClr val="111111"/>
                 </a:solidFill>
@@ -11144,9 +11342,27 @@
             </a:r>
           </a:p>
           <a:p>
-            <a:br/>
-            <a:pPr>
-              <a:defRPr sz="1400">
+            <a:pPr>
+              <a:spcBef>
+                <a:spcPts val="800"/>
+              </a:spcBef>
+              <a:defRPr sz="1200" b="1">
+                <a:solidFill>
+                  <a:srgbClr val="111111"/>
+                </a:solidFill>
+                <a:latin typeface="Arial"/>
+              </a:defRPr>
+            </a:pPr>
+            <a:r>
+              <a:t>1. CASE A: Fast Pulse + MOVING (Walking / Stairs)</a:t>
+            </a:r>
+          </a:p>
+          <a:p>
+            <a:pPr>
+              <a:spcBef>
+                <a:spcPts val="200"/>
+              </a:spcBef>
+              <a:defRPr sz="1100">
                 <a:solidFill>
                   <a:srgbClr val="1E293B"/>
                 </a:solidFill>
@@ -11154,50 +11370,117 @@
               </a:defRPr>
             </a:pPr>
             <a:r>
-              <a:t>1. CASE A: Fast Pulse + MOVING (Walking / Stairs)</a:t>
-            </a:r>
-            <a:br/>
-            <a:r>
-              <a:t>   → Classification: Healthy Physical Exertion.</a:t>
-            </a:r>
-            <a:br/>
-            <a:r>
-              <a:t>   → Action: SILENCE! Do not disturb the user.</a:t>
-            </a:r>
-            <a:br/>
-            <a:r>
-              <a:t>   → Mascot: Turns Golden Amber (Active Mode).</a:t>
-            </a:r>
-            <a:br/>
-            <a:br/>
+              <a:t>→ Classification: Healthy Physical Exertion.</a:t>
+            </a:r>
+          </a:p>
+          <a:p>
+            <a:pPr>
+              <a:spcBef>
+                <a:spcPts val="200"/>
+              </a:spcBef>
+              <a:defRPr sz="1100">
+                <a:solidFill>
+                  <a:srgbClr val="1E293B"/>
+                </a:solidFill>
+                <a:latin typeface="Arial"/>
+              </a:defRPr>
+            </a:pPr>
+            <a:r>
+              <a:t>→ Action: SILENCE! Do not disturb the user.</a:t>
+            </a:r>
+          </a:p>
+          <a:p>
+            <a:pPr>
+              <a:spcBef>
+                <a:spcPts val="200"/>
+              </a:spcBef>
+              <a:defRPr sz="1100">
+                <a:solidFill>
+                  <a:srgbClr val="1E293B"/>
+                </a:solidFill>
+                <a:latin typeface="Arial"/>
+              </a:defRPr>
+            </a:pPr>
+            <a:r>
+              <a:t>→ Mascot: Turns Golden Amber (Active Mode).</a:t>
+            </a:r>
+          </a:p>
+          <a:p>
+            <a:pPr>
+              <a:spcBef>
+                <a:spcPts val="800"/>
+              </a:spcBef>
+              <a:defRPr sz="1200" b="1">
+                <a:solidFill>
+                  <a:srgbClr val="111111"/>
+                </a:solidFill>
+                <a:latin typeface="Arial"/>
+              </a:defRPr>
+            </a:pPr>
             <a:r>
               <a:t>2. CASE B: Fast Pulse + SITTING STILL (No Motion)</a:t>
             </a:r>
-            <a:br/>
-            <a:r>
-              <a:t>   → Classification: Possible Emotional Stress or Panic.</a:t>
-            </a:r>
-            <a:br/>
-            <a:r>
-              <a:t>   → Action: Gentle check-in: 'Are you feeling okay?'</a:t>
-            </a:r>
-            <a:br/>
-            <a:r>
-              <a:t>   → Mascot: Turns Caring Amber + offers 4-7-8 breathing.</a:t>
-            </a:r>
-          </a:p>
-        </p:txBody>
-      </p:sp>
-      <p:sp>
-        <p:nvSpPr>
-          <p:cNvPr id="9" name="Rectangle 8"/>
+          </a:p>
+          <a:p>
+            <a:pPr>
+              <a:spcBef>
+                <a:spcPts val="200"/>
+              </a:spcBef>
+              <a:defRPr sz="1100">
+                <a:solidFill>
+                  <a:srgbClr val="1E293B"/>
+                </a:solidFill>
+                <a:latin typeface="Arial"/>
+              </a:defRPr>
+            </a:pPr>
+            <a:r>
+              <a:t>→ Classification: Possible Emotional Stress or Panic.</a:t>
+            </a:r>
+          </a:p>
+          <a:p>
+            <a:pPr>
+              <a:spcBef>
+                <a:spcPts val="200"/>
+              </a:spcBef>
+              <a:defRPr sz="1100">
+                <a:solidFill>
+                  <a:srgbClr val="1E293B"/>
+                </a:solidFill>
+                <a:latin typeface="Arial"/>
+              </a:defRPr>
+            </a:pPr>
+            <a:r>
+              <a:t>→ Action: Gentle check-in: 'Are you feeling okay?'</a:t>
+            </a:r>
+          </a:p>
+          <a:p>
+            <a:pPr>
+              <a:spcBef>
+                <a:spcPts val="200"/>
+              </a:spcBef>
+              <a:defRPr sz="1100">
+                <a:solidFill>
+                  <a:srgbClr val="1E293B"/>
+                </a:solidFill>
+                <a:latin typeface="Arial"/>
+              </a:defRPr>
+            </a:pPr>
+            <a:r>
+              <a:t>→ Mascot: Turns Caring Amber + offers 4-7-8 breathing.</a:t>
+            </a:r>
+          </a:p>
+        </p:txBody>
+      </p:sp>
+      <p:sp>
+        <p:nvSpPr>
+          <p:cNvPr id="8" name="Rectangle 7"/>
           <p:cNvSpPr/>
           <p:nvPr/>
         </p:nvSpPr>
         <p:spPr>
           <a:xfrm>
-            <a:off x="6272784" y="2066544"/>
-            <a:ext cx="5212080" cy="4114800"/>
+            <a:off x="6272784" y="2020824"/>
+            <a:ext cx="5257800" cy="4389120"/>
           </a:xfrm>
           <a:prstGeom prst="rect">
             <a:avLst/>
@@ -11233,14 +11516,14 @@
       </p:sp>
       <p:sp>
         <p:nvSpPr>
-          <p:cNvPr id="10" name="Rectangle 9"/>
+          <p:cNvPr id="9" name="Rectangle 8"/>
           <p:cNvSpPr/>
           <p:nvPr/>
         </p:nvSpPr>
         <p:spPr>
           <a:xfrm>
-            <a:off x="6217920" y="2011680"/>
-            <a:ext cx="5212080" cy="4114800"/>
+            <a:off x="6217920" y="1965960"/>
+            <a:ext cx="5257800" cy="4389120"/>
           </a:xfrm>
           <a:prstGeom prst="rect">
             <a:avLst/>
@@ -11278,14 +11561,14 @@
       </p:sp>
       <p:sp>
         <p:nvSpPr>
-          <p:cNvPr id="11" name="TextBox 10"/>
+          <p:cNvPr id="10" name="TextBox 9"/>
           <p:cNvSpPr txBox="1"/>
           <p:nvPr/>
         </p:nvSpPr>
         <p:spPr>
           <a:xfrm>
-            <a:off x="6446520" y="2194560"/>
-            <a:ext cx="4754880" cy="3749039"/>
+            <a:off x="6419088" y="2148840"/>
+            <a:ext cx="4846320" cy="4023360"/>
           </a:xfrm>
           <a:prstGeom prst="rect">
             <a:avLst/>
@@ -11293,13 +11576,13 @@
           <a:noFill/>
         </p:spPr>
         <p:txBody>
-          <a:bodyPr wrap="square">
+          <a:bodyPr wrap="square" tIns="25400" bIns="25400" lIns="25400" rIns="25400">
             <a:spAutoFit/>
           </a:bodyPr>
           <a:lstStyle/>
           <a:p>
             <a:pPr>
-              <a:defRPr sz="2000" b="1">
+              <a:defRPr sz="1600" b="1">
                 <a:solidFill>
                   <a:srgbClr val="111111"/>
                 </a:solidFill>
@@ -11311,9 +11594,27 @@
             </a:r>
           </a:p>
           <a:p>
-            <a:br/>
-            <a:pPr>
-              <a:defRPr sz="1400">
+            <a:pPr>
+              <a:spcBef>
+                <a:spcPts val="800"/>
+              </a:spcBef>
+              <a:defRPr sz="1200" b="1">
+                <a:solidFill>
+                  <a:srgbClr val="111111"/>
+                </a:solidFill>
+                <a:latin typeface="Arial"/>
+              </a:defRPr>
+            </a:pPr>
+            <a:r>
+              <a:t>• Why Did Buzzers Usually Keep Beeping?</a:t>
+            </a:r>
+          </a:p>
+          <a:p>
+            <a:pPr>
+              <a:spcBef>
+                <a:spcPts val="200"/>
+              </a:spcBef>
+              <a:defRPr sz="1100">
                 <a:solidFill>
                   <a:srgbClr val="1E293B"/>
                 </a:solidFill>
@@ -11321,28 +11622,71 @@
               </a:defRPr>
             </a:pPr>
             <a:r>
-              <a:t>• Why Did Buzzers Usually Keep Beeping?</a:t>
-            </a:r>
-            <a:br/>
-            <a:r>
-              <a:t>  When heart rate rises, it takes several minutes to settle down. A normal loop would beep every single second!</a:t>
-            </a:r>
-            <a:br/>
-            <a:br/>
+              <a:t>When heart rate rises, it takes several minutes to settle down. A normal loop would beep every single second!</a:t>
+            </a:r>
+          </a:p>
+          <a:p>
+            <a:pPr>
+              <a:spcBef>
+                <a:spcPts val="800"/>
+              </a:spcBef>
+              <a:defRPr sz="1200" b="1">
+                <a:solidFill>
+                  <a:srgbClr val="111111"/>
+                </a:solidFill>
+                <a:latin typeface="Arial"/>
+              </a:defRPr>
+            </a:pPr>
             <a:r>
               <a:t>• How We Fixed It:</a:t>
             </a:r>
-            <a:br/>
-            <a:r>
-              <a:t>  1. Hardware Lockout: The firmware enforces a 60-second cooldown so the buzzer cannot beep again.</a:t>
-            </a:r>
-            <a:br/>
-            <a:r>
-              <a:t>  2. Frontend Audio Debounce: The web chime has a 3-minute cooldown.</a:t>
-            </a:r>
-            <a:br/>
-            <a:r>
-              <a:t>  3. Non-Alarmist Phrasing: Never says 'You are sick', only offers calm support.</a:t>
+          </a:p>
+          <a:p>
+            <a:pPr>
+              <a:spcBef>
+                <a:spcPts val="200"/>
+              </a:spcBef>
+              <a:defRPr sz="1100">
+                <a:solidFill>
+                  <a:srgbClr val="1E293B"/>
+                </a:solidFill>
+                <a:latin typeface="Arial"/>
+              </a:defRPr>
+            </a:pPr>
+            <a:r>
+              <a:t>1. Hardware Lockout: Firmware enforces 60s cooldown so buzzer cannot beep repeatedly.</a:t>
+            </a:r>
+          </a:p>
+          <a:p>
+            <a:pPr>
+              <a:spcBef>
+                <a:spcPts val="200"/>
+              </a:spcBef>
+              <a:defRPr sz="1100">
+                <a:solidFill>
+                  <a:srgbClr val="1E293B"/>
+                </a:solidFill>
+                <a:latin typeface="Arial"/>
+              </a:defRPr>
+            </a:pPr>
+            <a:r>
+              <a:t>2. Frontend Audio Debounce: Web audio chime enforces a 3-minute cooldown.</a:t>
+            </a:r>
+          </a:p>
+          <a:p>
+            <a:pPr>
+              <a:spcBef>
+                <a:spcPts val="200"/>
+              </a:spcBef>
+              <a:defRPr sz="1100">
+                <a:solidFill>
+                  <a:srgbClr val="1E293B"/>
+                </a:solidFill>
+                <a:latin typeface="Arial"/>
+              </a:defRPr>
+            </a:pPr>
+            <a:r>
+              <a:t>3. Non-Alarmist Phrasing: Never says 'You are sick', only offers supportive calm.</a:t>
             </a:r>
           </a:p>
         </p:txBody>
@@ -11416,8 +11760,8 @@
         </p:nvSpPr>
         <p:spPr>
           <a:xfrm>
-            <a:off x="731520" y="365760"/>
-            <a:ext cx="3493008" cy="384048"/>
+            <a:off x="731520" y="320040"/>
+            <a:ext cx="2980944" cy="320040"/>
           </a:xfrm>
           <a:prstGeom prst="rect">
             <a:avLst/>
@@ -11446,11 +11790,11 @@
           </a:fontRef>
         </p:style>
         <p:txBody>
-          <a:bodyPr rtlCol="0" anchor="ctr"/>
+          <a:bodyPr rtlCol="0" anchor="ctr" wrap="none" tIns="25400" bIns="25400" lIns="50800" rIns="50800"/>
           <a:lstStyle/>
           <a:p>
             <a:pPr algn="ctr">
-              <a:defRPr sz="1100" b="1">
+              <a:defRPr sz="1050" b="1">
                 <a:solidFill>
                   <a:srgbClr val="111111"/>
                 </a:solidFill>
@@ -11471,8 +11815,8 @@
         </p:nvSpPr>
         <p:spPr>
           <a:xfrm>
-            <a:off x="731520" y="804672"/>
-            <a:ext cx="10698480" cy="594360"/>
+            <a:off x="731520" y="713232"/>
+            <a:ext cx="10728655" cy="1143000"/>
           </a:xfrm>
           <a:prstGeom prst="rect">
             <a:avLst/>
@@ -11480,13 +11824,13 @@
           <a:noFill/>
         </p:spPr>
         <p:txBody>
-          <a:bodyPr wrap="square">
+          <a:bodyPr wrap="square" tIns="0" bIns="0" lIns="0" rIns="0">
             <a:spAutoFit/>
           </a:bodyPr>
           <a:lstStyle/>
           <a:p>
             <a:pPr>
-              <a:defRPr sz="2800" b="1">
+              <a:defRPr sz="2400" b="1">
                 <a:solidFill>
                   <a:srgbClr val="111111"/>
                 </a:solidFill>
@@ -11497,32 +11841,12 @@
               <a:t>The Math Behind Personal Normal (Made Simple)</a:t>
             </a:r>
           </a:p>
-        </p:txBody>
-      </p:sp>
-      <p:sp>
-        <p:nvSpPr>
-          <p:cNvPr id="5" name="TextBox 4"/>
-          <p:cNvSpPr txBox="1"/>
-          <p:nvPr/>
-        </p:nvSpPr>
-        <p:spPr>
-          <a:xfrm>
-            <a:off x="731520" y="1371600"/>
-            <a:ext cx="10698480" cy="411480"/>
-          </a:xfrm>
-          <a:prstGeom prst="rect">
-            <a:avLst/>
-          </a:prstGeom>
-          <a:noFill/>
-        </p:spPr>
-        <p:txBody>
-          <a:bodyPr wrap="square">
-            <a:spAutoFit/>
-          </a:bodyPr>
-          <a:lstStyle/>
-          <a:p>
-            <a:pPr>
-              <a:defRPr sz="1500">
+          <a:p>
+            <a:pPr>
+              <a:spcBef>
+                <a:spcPts val="300"/>
+              </a:spcBef>
+              <a:defRPr sz="1300">
                 <a:solidFill>
                   <a:srgbClr val="1E293B"/>
                 </a:solidFill>
@@ -11537,14 +11861,14 @@
       </p:sp>
       <p:sp>
         <p:nvSpPr>
-          <p:cNvPr id="6" name="Rectangle 5"/>
+          <p:cNvPr id="5" name="Rectangle 4"/>
           <p:cNvSpPr/>
           <p:nvPr/>
         </p:nvSpPr>
         <p:spPr>
           <a:xfrm>
-            <a:off x="786384" y="2066544"/>
-            <a:ext cx="3383280" cy="4114800"/>
+            <a:off x="786384" y="2020824"/>
+            <a:ext cx="3383280" cy="4389120"/>
           </a:xfrm>
           <a:prstGeom prst="rect">
             <a:avLst/>
@@ -11580,14 +11904,14 @@
       </p:sp>
       <p:sp>
         <p:nvSpPr>
-          <p:cNvPr id="7" name="Rectangle 6"/>
+          <p:cNvPr id="6" name="Rectangle 5"/>
           <p:cNvSpPr/>
           <p:nvPr/>
         </p:nvSpPr>
         <p:spPr>
           <a:xfrm>
-            <a:off x="731520" y="2011680"/>
-            <a:ext cx="3383280" cy="4114800"/>
+            <a:off x="731520" y="1965960"/>
+            <a:ext cx="3383280" cy="4389120"/>
           </a:xfrm>
           <a:prstGeom prst="rect">
             <a:avLst/>
@@ -11625,14 +11949,14 @@
       </p:sp>
       <p:sp>
         <p:nvSpPr>
-          <p:cNvPr id="8" name="TextBox 7"/>
+          <p:cNvPr id="7" name="TextBox 6"/>
           <p:cNvSpPr txBox="1"/>
           <p:nvPr/>
         </p:nvSpPr>
         <p:spPr>
           <a:xfrm>
-            <a:off x="960120" y="2240280"/>
-            <a:ext cx="2926080" cy="3657600"/>
+            <a:off x="932688" y="2167128"/>
+            <a:ext cx="2980944" cy="3986784"/>
           </a:xfrm>
           <a:prstGeom prst="rect">
             <a:avLst/>
@@ -11640,13 +11964,13 @@
           <a:noFill/>
         </p:spPr>
         <p:txBody>
-          <a:bodyPr wrap="square">
+          <a:bodyPr wrap="square" tIns="50800" bIns="50800" lIns="50800" rIns="50800">
             <a:spAutoFit/>
           </a:bodyPr>
           <a:lstStyle/>
           <a:p>
             <a:pPr>
-              <a:defRPr sz="1800" b="1">
+              <a:defRPr sz="1600" b="1">
                 <a:solidFill>
                   <a:srgbClr val="111111"/>
                 </a:solidFill>
@@ -11660,9 +11984,9 @@
           <a:p>
             <a:pPr>
               <a:spcBef>
-                <a:spcPts val="1400"/>
+                <a:spcPts val="800"/>
               </a:spcBef>
-              <a:defRPr sz="1450">
+              <a:defRPr sz="1200">
                 <a:solidFill>
                   <a:srgbClr val="1E293B"/>
                 </a:solidFill>
@@ -11672,29 +11996,51 @@
             <a:r>
               <a:t>The mathematical center of YOUR quiet resting state.</a:t>
             </a:r>
-            <a:br/>
-            <a:br/>
-            <a:r>
-              <a:t>  μ = Average of your resting readings</a:t>
-            </a:r>
-            <a:br/>
-            <a:br/>
-            <a:r>
-              <a:t>Continuously updates as your cardiovascular fitness improves or changes.</a:t>
-            </a:r>
-          </a:p>
-        </p:txBody>
-      </p:sp>
-      <p:sp>
-        <p:nvSpPr>
-          <p:cNvPr id="9" name="Rectangle 8"/>
+          </a:p>
+          <a:p>
+            <a:pPr>
+              <a:spcBef>
+                <a:spcPts val="800"/>
+              </a:spcBef>
+              <a:defRPr sz="1250" b="1">
+                <a:solidFill>
+                  <a:srgbClr val="111111"/>
+                </a:solidFill>
+                <a:latin typeface="Arial"/>
+              </a:defRPr>
+            </a:pPr>
+            <a:r>
+              <a:t>Formula: μ = Average of your resting readings</a:t>
+            </a:r>
+          </a:p>
+          <a:p>
+            <a:pPr>
+              <a:spcBef>
+                <a:spcPts val="800"/>
+              </a:spcBef>
+              <a:defRPr sz="1150">
+                <a:solidFill>
+                  <a:srgbClr val="1E293B"/>
+                </a:solidFill>
+                <a:latin typeface="Arial"/>
+              </a:defRPr>
+            </a:pPr>
+            <a:r>
+              <a:t>Continuously updates as your cardiovascular fitness improves or routines change.</a:t>
+            </a:r>
+          </a:p>
+        </p:txBody>
+      </p:sp>
+      <p:sp>
+        <p:nvSpPr>
+          <p:cNvPr id="8" name="Rectangle 7"/>
           <p:cNvSpPr/>
           <p:nvPr/>
         </p:nvSpPr>
         <p:spPr>
           <a:xfrm>
-            <a:off x="4443984" y="2066544"/>
-            <a:ext cx="3383280" cy="4114800"/>
+            <a:off x="4443984" y="2020824"/>
+            <a:ext cx="3383280" cy="4389120"/>
           </a:xfrm>
           <a:prstGeom prst="rect">
             <a:avLst/>
@@ -11730,14 +12076,14 @@
       </p:sp>
       <p:sp>
         <p:nvSpPr>
-          <p:cNvPr id="10" name="Rectangle 9"/>
+          <p:cNvPr id="9" name="Rectangle 8"/>
           <p:cNvSpPr/>
           <p:nvPr/>
         </p:nvSpPr>
         <p:spPr>
           <a:xfrm>
-            <a:off x="4389120" y="2011680"/>
-            <a:ext cx="3383280" cy="4114800"/>
+            <a:off x="4389120" y="1965960"/>
+            <a:ext cx="3383280" cy="4389120"/>
           </a:xfrm>
           <a:prstGeom prst="rect">
             <a:avLst/>
@@ -11775,14 +12121,14 @@
       </p:sp>
       <p:sp>
         <p:nvSpPr>
-          <p:cNvPr id="11" name="TextBox 10"/>
+          <p:cNvPr id="10" name="TextBox 9"/>
           <p:cNvSpPr txBox="1"/>
           <p:nvPr/>
         </p:nvSpPr>
         <p:spPr>
           <a:xfrm>
-            <a:off x="4617720" y="2240280"/>
-            <a:ext cx="2926080" cy="3657600"/>
+            <a:off x="4590288" y="2167128"/>
+            <a:ext cx="2980944" cy="3986784"/>
           </a:xfrm>
           <a:prstGeom prst="rect">
             <a:avLst/>
@@ -11790,13 +12136,13 @@
           <a:noFill/>
         </p:spPr>
         <p:txBody>
-          <a:bodyPr wrap="square">
+          <a:bodyPr wrap="square" tIns="50800" bIns="50800" lIns="50800" rIns="50800">
             <a:spAutoFit/>
           </a:bodyPr>
           <a:lstStyle/>
           <a:p>
             <a:pPr>
-              <a:defRPr sz="1800" b="1">
+              <a:defRPr sz="1600" b="1">
                 <a:solidFill>
                   <a:srgbClr val="111111"/>
                 </a:solidFill>
@@ -11810,9 +12156,9 @@
           <a:p>
             <a:pPr>
               <a:spcBef>
-                <a:spcPts val="1400"/>
+                <a:spcPts val="800"/>
               </a:spcBef>
-              <a:defRPr sz="1450">
+              <a:defRPr sz="1200">
                 <a:solidFill>
                   <a:srgbClr val="1E293B"/>
                 </a:solidFill>
@@ -11822,24 +12168,51 @@
             <a:r>
               <a:t>Measures how much your pulse naturally swings up and down during calm periods.</a:t>
             </a:r>
-            <a:br/>
-            <a:br/>
-            <a:r>
-              <a:t>Some people naturally fluctuate by ±3 BPM; others naturally fluctuate by ±7 BPM.</a:t>
-            </a:r>
-          </a:p>
-        </p:txBody>
-      </p:sp>
-      <p:sp>
-        <p:nvSpPr>
-          <p:cNvPr id="12" name="Rectangle 11"/>
+          </a:p>
+          <a:p>
+            <a:pPr>
+              <a:spcBef>
+                <a:spcPts val="800"/>
+              </a:spcBef>
+              <a:defRPr sz="1250" b="1">
+                <a:solidFill>
+                  <a:srgbClr val="111111"/>
+                </a:solidFill>
+                <a:latin typeface="Arial"/>
+              </a:defRPr>
+            </a:pPr>
+            <a:r>
+              <a:t>Individual Baseline Range: ±3 to ±7 BPM</a:t>
+            </a:r>
+          </a:p>
+          <a:p>
+            <a:pPr>
+              <a:spcBef>
+                <a:spcPts val="800"/>
+              </a:spcBef>
+              <a:defRPr sz="1150">
+                <a:solidFill>
+                  <a:srgbClr val="1E293B"/>
+                </a:solidFill>
+                <a:latin typeface="Arial"/>
+              </a:defRPr>
+            </a:pPr>
+            <a:r>
+              <a:t>Some people naturally fluctuate by ±3 BPM; others naturally fluctuate by ±7 BPM. Captures individual autonomic nervous tone.</a:t>
+            </a:r>
+          </a:p>
+        </p:txBody>
+      </p:sp>
+      <p:sp>
+        <p:nvSpPr>
+          <p:cNvPr id="11" name="Rectangle 10"/>
           <p:cNvSpPr/>
           <p:nvPr/>
         </p:nvSpPr>
         <p:spPr>
           <a:xfrm>
-            <a:off x="8101584" y="2066544"/>
-            <a:ext cx="3383280" cy="4114800"/>
+            <a:off x="8101584" y="2020824"/>
+            <a:ext cx="3383280" cy="4389120"/>
           </a:xfrm>
           <a:prstGeom prst="rect">
             <a:avLst/>
@@ -11875,14 +12248,14 @@
       </p:sp>
       <p:sp>
         <p:nvSpPr>
-          <p:cNvPr id="13" name="Rectangle 12"/>
+          <p:cNvPr id="12" name="Rectangle 11"/>
           <p:cNvSpPr/>
           <p:nvPr/>
         </p:nvSpPr>
         <p:spPr>
           <a:xfrm>
-            <a:off x="8046720" y="2011680"/>
-            <a:ext cx="3383280" cy="4114800"/>
+            <a:off x="8046720" y="1965960"/>
+            <a:ext cx="3383280" cy="4389120"/>
           </a:xfrm>
           <a:prstGeom prst="rect">
             <a:avLst/>
@@ -11920,14 +12293,14 @@
       </p:sp>
       <p:sp>
         <p:nvSpPr>
-          <p:cNvPr id="14" name="TextBox 13"/>
+          <p:cNvPr id="13" name="TextBox 12"/>
           <p:cNvSpPr txBox="1"/>
           <p:nvPr/>
         </p:nvSpPr>
         <p:spPr>
           <a:xfrm>
-            <a:off x="8275320" y="2240280"/>
-            <a:ext cx="2926080" cy="3657600"/>
+            <a:off x="8247888" y="2167128"/>
+            <a:ext cx="2980944" cy="3986784"/>
           </a:xfrm>
           <a:prstGeom prst="rect">
             <a:avLst/>
@@ -11935,13 +12308,13 @@
           <a:noFill/>
         </p:spPr>
         <p:txBody>
-          <a:bodyPr wrap="square">
+          <a:bodyPr wrap="square" tIns="50800" bIns="50800" lIns="50800" rIns="50800">
             <a:spAutoFit/>
           </a:bodyPr>
           <a:lstStyle/>
           <a:p>
             <a:pPr>
-              <a:defRPr sz="1800" b="1">
+              <a:defRPr sz="1600" b="1">
                 <a:solidFill>
                   <a:srgbClr val="111111"/>
                 </a:solidFill>
@@ -11955,9 +12328,9 @@
           <a:p>
             <a:pPr>
               <a:spcBef>
-                <a:spcPts val="1400"/>
+                <a:spcPts val="800"/>
               </a:spcBef>
-              <a:defRPr sz="1450">
+              <a:defRPr sz="1200">
                 <a:solidFill>
                   <a:srgbClr val="1E293B"/>
                 </a:solidFill>
@@ -11965,15 +12338,37 @@
               </a:defRPr>
             </a:pPr>
             <a:r>
-              <a:t>Your personalized safe zone is:</a:t>
-            </a:r>
-            <a:br/>
-            <a:br/>
-            <a:r>
-              <a:t>  [ Average - 2σ , Average + 2σ ]</a:t>
-            </a:r>
-            <a:br/>
-            <a:br/>
+              <a:t>Your personalized safe zone corridor:</a:t>
+            </a:r>
+          </a:p>
+          <a:p>
+            <a:pPr>
+              <a:spcBef>
+                <a:spcPts val="800"/>
+              </a:spcBef>
+              <a:defRPr sz="1250" b="1">
+                <a:solidFill>
+                  <a:srgbClr val="111111"/>
+                </a:solidFill>
+                <a:latin typeface="Arial"/>
+              </a:defRPr>
+            </a:pPr>
+            <a:r>
+              <a:t>Band: [ μ - 2σ , μ + 2σ ]</a:t>
+            </a:r>
+          </a:p>
+          <a:p>
+            <a:pPr>
+              <a:spcBef>
+                <a:spcPts val="800"/>
+              </a:spcBef>
+              <a:defRPr sz="1150">
+                <a:solidFill>
+                  <a:srgbClr val="1E293B"/>
+                </a:solidFill>
+                <a:latin typeface="Arial"/>
+              </a:defRPr>
+            </a:pPr>
             <a:r>
               <a:t>In statistics, 95.45% of your normal resting readings fall inside this band. Only true anomalies lie outside!</a:t>
             </a:r>
@@ -12049,8 +12444,8 @@
         </p:nvSpPr>
         <p:spPr>
           <a:xfrm>
-            <a:off x="731520" y="365760"/>
-            <a:ext cx="2468880" cy="384048"/>
+            <a:off x="731520" y="320040"/>
+            <a:ext cx="2103120" cy="320040"/>
           </a:xfrm>
           <a:prstGeom prst="rect">
             <a:avLst/>
@@ -12079,11 +12474,11 @@
           </a:fontRef>
         </p:style>
         <p:txBody>
-          <a:bodyPr rtlCol="0" anchor="ctr"/>
+          <a:bodyPr rtlCol="0" anchor="ctr" wrap="none" tIns="25400" bIns="25400" lIns="50800" rIns="50800"/>
           <a:lstStyle/>
           <a:p>
             <a:pPr algn="ctr">
-              <a:defRPr sz="1100" b="1">
+              <a:defRPr sz="1050" b="1">
                 <a:solidFill>
                   <a:srgbClr val="111111"/>
                 </a:solidFill>
@@ -12104,8 +12499,8 @@
         </p:nvSpPr>
         <p:spPr>
           <a:xfrm>
-            <a:off x="731520" y="804672"/>
-            <a:ext cx="10698480" cy="594360"/>
+            <a:off x="731520" y="713232"/>
+            <a:ext cx="10728655" cy="1143000"/>
           </a:xfrm>
           <a:prstGeom prst="rect">
             <a:avLst/>
@@ -12113,13 +12508,13 @@
           <a:noFill/>
         </p:spPr>
         <p:txBody>
-          <a:bodyPr wrap="square">
+          <a:bodyPr wrap="square" tIns="0" bIns="0" lIns="0" rIns="0">
             <a:spAutoFit/>
           </a:bodyPr>
           <a:lstStyle/>
           <a:p>
             <a:pPr>
-              <a:defRPr sz="2800" b="1">
+              <a:defRPr sz="2400" b="1">
                 <a:solidFill>
                   <a:srgbClr val="111111"/>
                 </a:solidFill>
@@ -12130,32 +12525,12 @@
               <a:t>FastAPI Local Microservice &amp; Isolation Forest AI</a:t>
             </a:r>
           </a:p>
-        </p:txBody>
-      </p:sp>
-      <p:sp>
-        <p:nvSpPr>
-          <p:cNvPr id="5" name="TextBox 4"/>
-          <p:cNvSpPr txBox="1"/>
-          <p:nvPr/>
-        </p:nvSpPr>
-        <p:spPr>
-          <a:xfrm>
-            <a:off x="731520" y="1371600"/>
-            <a:ext cx="10698480" cy="411480"/>
-          </a:xfrm>
-          <a:prstGeom prst="rect">
-            <a:avLst/>
-          </a:prstGeom>
-          <a:noFill/>
-        </p:spPr>
-        <p:txBody>
-          <a:bodyPr wrap="square">
-            <a:spAutoFit/>
-          </a:bodyPr>
-          <a:lstStyle/>
-          <a:p>
-            <a:pPr>
-              <a:defRPr sz="1500">
+          <a:p>
+            <a:pPr>
+              <a:spcBef>
+                <a:spcPts val="300"/>
+              </a:spcBef>
+              <a:defRPr sz="1300">
                 <a:solidFill>
                   <a:srgbClr val="1E293B"/>
                 </a:solidFill>
@@ -12170,14 +12545,14 @@
       </p:sp>
       <p:sp>
         <p:nvSpPr>
-          <p:cNvPr id="6" name="Rectangle 5"/>
+          <p:cNvPr id="5" name="Rectangle 4"/>
           <p:cNvSpPr/>
           <p:nvPr/>
         </p:nvSpPr>
         <p:spPr>
           <a:xfrm>
-            <a:off x="786384" y="2066544"/>
-            <a:ext cx="3383280" cy="4114800"/>
+            <a:off x="786384" y="2020824"/>
+            <a:ext cx="3383280" cy="4389120"/>
           </a:xfrm>
           <a:prstGeom prst="rect">
             <a:avLst/>
@@ -12213,14 +12588,14 @@
       </p:sp>
       <p:sp>
         <p:nvSpPr>
-          <p:cNvPr id="7" name="Rectangle 6"/>
+          <p:cNvPr id="6" name="Rectangle 5"/>
           <p:cNvSpPr/>
           <p:nvPr/>
         </p:nvSpPr>
         <p:spPr>
           <a:xfrm>
-            <a:off x="731520" y="2011680"/>
-            <a:ext cx="3383280" cy="4114800"/>
+            <a:off x="731520" y="1965960"/>
+            <a:ext cx="3383280" cy="4389120"/>
           </a:xfrm>
           <a:prstGeom prst="rect">
             <a:avLst/>
@@ -12258,14 +12633,14 @@
       </p:sp>
       <p:sp>
         <p:nvSpPr>
-          <p:cNvPr id="8" name="TextBox 7"/>
+          <p:cNvPr id="7" name="TextBox 6"/>
           <p:cNvSpPr txBox="1"/>
           <p:nvPr/>
         </p:nvSpPr>
         <p:spPr>
           <a:xfrm>
-            <a:off x="960120" y="2240280"/>
-            <a:ext cx="2926080" cy="3657600"/>
+            <a:off x="932688" y="2167128"/>
+            <a:ext cx="2980944" cy="3986784"/>
           </a:xfrm>
           <a:prstGeom prst="rect">
             <a:avLst/>
@@ -12273,13 +12648,13 @@
           <a:noFill/>
         </p:spPr>
         <p:txBody>
-          <a:bodyPr wrap="square">
+          <a:bodyPr wrap="square" tIns="50800" bIns="50800" lIns="50800" rIns="50800">
             <a:spAutoFit/>
           </a:bodyPr>
           <a:lstStyle/>
           <a:p>
             <a:pPr>
-              <a:defRPr sz="1800" b="1">
+              <a:defRPr sz="1600" b="1">
                 <a:solidFill>
                   <a:srgbClr val="111111"/>
                 </a:solidFill>
@@ -12293,9 +12668,9 @@
           <a:p>
             <a:pPr>
               <a:spcBef>
-                <a:spcPts val="1200"/>
+                <a:spcPts val="600"/>
               </a:spcBef>
-              <a:defRPr sz="1400">
+              <a:defRPr sz="1150">
                 <a:solidFill>
                   <a:srgbClr val="1E293B"/>
                 </a:solidFill>
@@ -12305,15 +12680,51 @@
             <a:r>
               <a:t>• High-speed local Python server on Port 8000.</a:t>
             </a:r>
-            <a:br/>
+          </a:p>
+          <a:p>
+            <a:pPr>
+              <a:spcBef>
+                <a:spcPts val="600"/>
+              </a:spcBef>
+              <a:defRPr sz="1150">
+                <a:solidFill>
+                  <a:srgbClr val="1E293B"/>
+                </a:solidFill>
+                <a:latin typeface="Arial"/>
+              </a:defRPr>
+            </a:pPr>
             <a:r>
               <a:t>• Polls the ESP32 sensor pod automatically.</a:t>
             </a:r>
-            <a:br/>
-            <a:r>
-              <a:t>• Instant response times under 5 milliseconds.</a:t>
-            </a:r>
-            <a:br/>
+          </a:p>
+          <a:p>
+            <a:pPr>
+              <a:spcBef>
+                <a:spcPts val="600"/>
+              </a:spcBef>
+              <a:defRPr sz="1150">
+                <a:solidFill>
+                  <a:srgbClr val="1E293B"/>
+                </a:solidFill>
+                <a:latin typeface="Arial"/>
+              </a:defRPr>
+            </a:pPr>
+            <a:r>
+              <a:t>• Ultra-low response latency under 5 milliseconds.</a:t>
+            </a:r>
+          </a:p>
+          <a:p>
+            <a:pPr>
+              <a:spcBef>
+                <a:spcPts val="600"/>
+              </a:spcBef>
+              <a:defRPr sz="1150">
+                <a:solidFill>
+                  <a:srgbClr val="1E293B"/>
+                </a:solidFill>
+                <a:latin typeface="Arial"/>
+              </a:defRPr>
+            </a:pPr>
             <a:r>
               <a:t>• Interactive API docs available at /docs.</a:t>
             </a:r>
@@ -12322,14 +12733,14 @@
       </p:sp>
       <p:sp>
         <p:nvSpPr>
-          <p:cNvPr id="9" name="Rectangle 8"/>
+          <p:cNvPr id="8" name="Rectangle 7"/>
           <p:cNvSpPr/>
           <p:nvPr/>
         </p:nvSpPr>
         <p:spPr>
           <a:xfrm>
-            <a:off x="4443984" y="2066544"/>
-            <a:ext cx="3383280" cy="4114800"/>
+            <a:off x="4443984" y="2020824"/>
+            <a:ext cx="3383280" cy="4389120"/>
           </a:xfrm>
           <a:prstGeom prst="rect">
             <a:avLst/>
@@ -12365,14 +12776,14 @@
       </p:sp>
       <p:sp>
         <p:nvSpPr>
-          <p:cNvPr id="10" name="Rectangle 9"/>
+          <p:cNvPr id="9" name="Rectangle 8"/>
           <p:cNvSpPr/>
           <p:nvPr/>
         </p:nvSpPr>
         <p:spPr>
           <a:xfrm>
-            <a:off x="4389120" y="2011680"/>
-            <a:ext cx="3383280" cy="4114800"/>
+            <a:off x="4389120" y="1965960"/>
+            <a:ext cx="3383280" cy="4389120"/>
           </a:xfrm>
           <a:prstGeom prst="rect">
             <a:avLst/>
@@ -12410,14 +12821,14 @@
       </p:sp>
       <p:sp>
         <p:nvSpPr>
-          <p:cNvPr id="11" name="TextBox 10"/>
+          <p:cNvPr id="10" name="TextBox 9"/>
           <p:cNvSpPr txBox="1"/>
           <p:nvPr/>
         </p:nvSpPr>
         <p:spPr>
           <a:xfrm>
-            <a:off x="4617720" y="2240280"/>
-            <a:ext cx="2926080" cy="3657600"/>
+            <a:off x="4590288" y="2167128"/>
+            <a:ext cx="2980944" cy="3986784"/>
           </a:xfrm>
           <a:prstGeom prst="rect">
             <a:avLst/>
@@ -12425,13 +12836,13 @@
           <a:noFill/>
         </p:spPr>
         <p:txBody>
-          <a:bodyPr wrap="square">
+          <a:bodyPr wrap="square" tIns="50800" bIns="50800" lIns="50800" rIns="50800">
             <a:spAutoFit/>
           </a:bodyPr>
           <a:lstStyle/>
           <a:p>
             <a:pPr>
-              <a:defRPr sz="1800" b="1">
+              <a:defRPr sz="1600" b="1">
                 <a:solidFill>
                   <a:srgbClr val="111111"/>
                 </a:solidFill>
@@ -12445,9 +12856,9 @@
           <a:p>
             <a:pPr>
               <a:spcBef>
-                <a:spcPts val="1200"/>
+                <a:spcPts val="600"/>
               </a:spcBef>
-              <a:defRPr sz="1400">
+              <a:defRPr sz="1150">
                 <a:solidFill>
                   <a:srgbClr val="1E293B"/>
                 </a:solidFill>
@@ -12455,29 +12866,69 @@
               </a:defRPr>
             </a:pPr>
             <a:r>
-              <a:t>• Unsupervised Machine Learning from Scikit-Learn.</a:t>
-            </a:r>
-            <a:br/>
-            <a:r>
-              <a:t>• Learns your normal biometrics without doctors needing to label anything.</a:t>
-            </a:r>
-            <a:br/>
+              <a:t>• Unsupervised Machine Learning via Scikit-Learn.</a:t>
+            </a:r>
+          </a:p>
+          <a:p>
+            <a:pPr>
+              <a:spcBef>
+                <a:spcPts val="600"/>
+              </a:spcBef>
+              <a:defRPr sz="1150">
+                <a:solidFill>
+                  <a:srgbClr val="1E293B"/>
+                </a:solidFill>
+                <a:latin typeface="Arial"/>
+              </a:defRPr>
+            </a:pPr>
+            <a:r>
+              <a:t>• Learns your normal patterns without manual labeling.</a:t>
+            </a:r>
+          </a:p>
+          <a:p>
+            <a:pPr>
+              <a:spcBef>
+                <a:spcPts val="600"/>
+              </a:spcBef>
+              <a:defRPr sz="1150">
+                <a:solidFill>
+                  <a:srgbClr val="1E293B"/>
+                </a:solidFill>
+                <a:latin typeface="Arial"/>
+              </a:defRPr>
+            </a:pPr>
             <a:r>
               <a:t>• Spots multi-dimensional anomalies (HR + SpO2 + Temp + Motion).</a:t>
             </a:r>
           </a:p>
-        </p:txBody>
-      </p:sp>
-      <p:sp>
-        <p:nvSpPr>
-          <p:cNvPr id="12" name="Rectangle 11"/>
+          <a:p>
+            <a:pPr>
+              <a:spcBef>
+                <a:spcPts val="600"/>
+              </a:spcBef>
+              <a:defRPr sz="1150">
+                <a:solidFill>
+                  <a:srgbClr val="1E293B"/>
+                </a:solidFill>
+                <a:latin typeface="Arial"/>
+              </a:defRPr>
+            </a:pPr>
+            <a:r>
+              <a:t>• Calibrated dynamically during observation mode.</a:t>
+            </a:r>
+          </a:p>
+        </p:txBody>
+      </p:sp>
+      <p:sp>
+        <p:nvSpPr>
+          <p:cNvPr id="11" name="Rectangle 10"/>
           <p:cNvSpPr/>
           <p:nvPr/>
         </p:nvSpPr>
         <p:spPr>
           <a:xfrm>
-            <a:off x="8101584" y="2066544"/>
-            <a:ext cx="3383280" cy="4114800"/>
+            <a:off x="8101584" y="2020824"/>
+            <a:ext cx="3383280" cy="4389120"/>
           </a:xfrm>
           <a:prstGeom prst="rect">
             <a:avLst/>
@@ -12513,14 +12964,14 @@
       </p:sp>
       <p:sp>
         <p:nvSpPr>
-          <p:cNvPr id="13" name="Rectangle 12"/>
+          <p:cNvPr id="12" name="Rectangle 11"/>
           <p:cNvSpPr/>
           <p:nvPr/>
         </p:nvSpPr>
         <p:spPr>
           <a:xfrm>
-            <a:off x="8046720" y="2011680"/>
-            <a:ext cx="3383280" cy="4114800"/>
+            <a:off x="8046720" y="1965960"/>
+            <a:ext cx="3383280" cy="4389120"/>
           </a:xfrm>
           <a:prstGeom prst="rect">
             <a:avLst/>
@@ -12558,14 +13009,14 @@
       </p:sp>
       <p:sp>
         <p:nvSpPr>
-          <p:cNvPr id="14" name="TextBox 13"/>
+          <p:cNvPr id="13" name="TextBox 12"/>
           <p:cNvSpPr txBox="1"/>
           <p:nvPr/>
         </p:nvSpPr>
         <p:spPr>
           <a:xfrm>
-            <a:off x="8275320" y="2240280"/>
-            <a:ext cx="2926080" cy="3657600"/>
+            <a:off x="8247888" y="2167128"/>
+            <a:ext cx="2980944" cy="3986784"/>
           </a:xfrm>
           <a:prstGeom prst="rect">
             <a:avLst/>
@@ -12573,13 +13024,13 @@
           <a:noFill/>
         </p:spPr>
         <p:txBody>
-          <a:bodyPr wrap="square">
+          <a:bodyPr wrap="square" tIns="50800" bIns="50800" lIns="50800" rIns="50800">
             <a:spAutoFit/>
           </a:bodyPr>
           <a:lstStyle/>
           <a:p>
             <a:pPr>
-              <a:defRPr sz="1800" b="1">
+              <a:defRPr sz="1600" b="1">
                 <a:solidFill>
                   <a:srgbClr val="111111"/>
                 </a:solidFill>
@@ -12593,9 +13044,9 @@
           <a:p>
             <a:pPr>
               <a:spcBef>
-                <a:spcPts val="1200"/>
+                <a:spcPts val="600"/>
               </a:spcBef>
-              <a:defRPr sz="1400">
+              <a:defRPr sz="1150">
                 <a:solidFill>
                   <a:srgbClr val="1E293B"/>
                 </a:solidFill>
@@ -12603,15 +13054,55 @@
               </a:defRPr>
             </a:pPr>
             <a:r>
-              <a:t>• Embedded database: backend/awen.db.</a:t>
-            </a:r>
-            <a:br/>
-            <a:r>
-              <a:t>• Write-Ahead Logging (WAL) mode enables high-speed reading and writing simultaneously.</a:t>
-            </a:r>
-            <a:br/>
-            <a:r>
-              <a:t>• 100% offline, zero internet required.</a:t>
+              <a:t>• Embedded local database: backend/awen.db.</a:t>
+            </a:r>
+          </a:p>
+          <a:p>
+            <a:pPr>
+              <a:spcBef>
+                <a:spcPts val="600"/>
+              </a:spcBef>
+              <a:defRPr sz="1150">
+                <a:solidFill>
+                  <a:srgbClr val="1E293B"/>
+                </a:solidFill>
+                <a:latin typeface="Arial"/>
+              </a:defRPr>
+            </a:pPr>
+            <a:r>
+              <a:t>• Write-Ahead Logging (WAL) enables high concurrency.</a:t>
+            </a:r>
+          </a:p>
+          <a:p>
+            <a:pPr>
+              <a:spcBef>
+                <a:spcPts val="600"/>
+              </a:spcBef>
+              <a:defRPr sz="1150">
+                <a:solidFill>
+                  <a:srgbClr val="1E293B"/>
+                </a:solidFill>
+                <a:latin typeface="Arial"/>
+              </a:defRPr>
+            </a:pPr>
+            <a:r>
+              <a:t>• Complete patient privacy with PBKDF2 authentication.</a:t>
+            </a:r>
+          </a:p>
+          <a:p>
+            <a:pPr>
+              <a:spcBef>
+                <a:spcPts val="600"/>
+              </a:spcBef>
+              <a:defRPr sz="1150">
+                <a:solidFill>
+                  <a:srgbClr val="1E293B"/>
+                </a:solidFill>
+                <a:latin typeface="Arial"/>
+              </a:defRPr>
+            </a:pPr>
+            <a:r>
+              <a:t>• 100% offline, zero cloud reliance.</a:t>
             </a:r>
           </a:p>
         </p:txBody>
@@ -12685,8 +13176,8 @@
         </p:nvSpPr>
         <p:spPr>
           <a:xfrm>
-            <a:off x="731520" y="365760"/>
-            <a:ext cx="2468880" cy="384048"/>
+            <a:off x="731520" y="320040"/>
+            <a:ext cx="2103120" cy="320040"/>
           </a:xfrm>
           <a:prstGeom prst="rect">
             <a:avLst/>
@@ -12715,11 +13206,11 @@
           </a:fontRef>
         </p:style>
         <p:txBody>
-          <a:bodyPr rtlCol="0" anchor="ctr"/>
+          <a:bodyPr rtlCol="0" anchor="ctr" wrap="none" tIns="25400" bIns="25400" lIns="50800" rIns="50800"/>
           <a:lstStyle/>
           <a:p>
             <a:pPr algn="ctr">
-              <a:defRPr sz="1100" b="1">
+              <a:defRPr sz="1050" b="1">
                 <a:solidFill>
                   <a:srgbClr val="111111"/>
                 </a:solidFill>
@@ -12740,8 +13231,8 @@
         </p:nvSpPr>
         <p:spPr>
           <a:xfrm>
-            <a:off x="731520" y="804672"/>
-            <a:ext cx="10698480" cy="594360"/>
+            <a:off x="731520" y="713232"/>
+            <a:ext cx="10728655" cy="1143000"/>
           </a:xfrm>
           <a:prstGeom prst="rect">
             <a:avLst/>
@@ -12749,13 +13240,13 @@
           <a:noFill/>
         </p:spPr>
         <p:txBody>
-          <a:bodyPr wrap="square">
+          <a:bodyPr wrap="square" tIns="0" bIns="0" lIns="0" rIns="0">
             <a:spAutoFit/>
           </a:bodyPr>
           <a:lstStyle/>
           <a:p>
             <a:pPr>
-              <a:defRPr sz="2800" b="1">
+              <a:defRPr sz="2400" b="1">
                 <a:solidFill>
                   <a:srgbClr val="111111"/>
                 </a:solidFill>
@@ -12766,32 +13257,12 @@
               <a:t>React 19, Tailwind &amp; High-Contrast Neo-Brutalism</a:t>
             </a:r>
           </a:p>
-        </p:txBody>
-      </p:sp>
-      <p:sp>
-        <p:nvSpPr>
-          <p:cNvPr id="5" name="TextBox 4"/>
-          <p:cNvSpPr txBox="1"/>
-          <p:nvPr/>
-        </p:nvSpPr>
-        <p:spPr>
-          <a:xfrm>
-            <a:off x="731520" y="1371600"/>
-            <a:ext cx="10698480" cy="411480"/>
-          </a:xfrm>
-          <a:prstGeom prst="rect">
-            <a:avLst/>
-          </a:prstGeom>
-          <a:noFill/>
-        </p:spPr>
-        <p:txBody>
-          <a:bodyPr wrap="square">
-            <a:spAutoFit/>
-          </a:bodyPr>
-          <a:lstStyle/>
-          <a:p>
-            <a:pPr>
-              <a:defRPr sz="1500">
+          <a:p>
+            <a:pPr>
+              <a:spcBef>
+                <a:spcPts val="300"/>
+              </a:spcBef>
+              <a:defRPr sz="1300">
                 <a:solidFill>
                   <a:srgbClr val="1E293B"/>
                 </a:solidFill>
@@ -12806,13 +13277,13 @@
       </p:sp>
       <p:sp>
         <p:nvSpPr>
-          <p:cNvPr id="6" name="Rectangle 5"/>
+          <p:cNvPr id="5" name="Rectangle 4"/>
           <p:cNvSpPr/>
           <p:nvPr/>
         </p:nvSpPr>
         <p:spPr>
           <a:xfrm>
-            <a:off x="786384" y="2066544"/>
+            <a:off x="786384" y="2020824"/>
             <a:ext cx="5257800" cy="2057400"/>
           </a:xfrm>
           <a:prstGeom prst="rect">
@@ -12849,13 +13320,13 @@
       </p:sp>
       <p:sp>
         <p:nvSpPr>
-          <p:cNvPr id="7" name="Rectangle 6"/>
+          <p:cNvPr id="6" name="Rectangle 5"/>
           <p:cNvSpPr/>
           <p:nvPr/>
         </p:nvSpPr>
         <p:spPr>
           <a:xfrm>
-            <a:off x="731520" y="2011680"/>
+            <a:off x="731520" y="1965960"/>
             <a:ext cx="5257800" cy="2057400"/>
           </a:xfrm>
           <a:prstGeom prst="rect">
@@ -12894,14 +13365,14 @@
       </p:sp>
       <p:sp>
         <p:nvSpPr>
-          <p:cNvPr id="8" name="TextBox 7"/>
+          <p:cNvPr id="7" name="TextBox 6"/>
           <p:cNvSpPr txBox="1"/>
           <p:nvPr/>
         </p:nvSpPr>
         <p:spPr>
           <a:xfrm>
-            <a:off x="1005840" y="2194560"/>
-            <a:ext cx="4709160" cy="1691640"/>
+            <a:off x="960120" y="2148840"/>
+            <a:ext cx="4800600" cy="1691640"/>
           </a:xfrm>
           <a:prstGeom prst="rect">
             <a:avLst/>
@@ -12909,13 +13380,13 @@
           <a:noFill/>
         </p:spPr>
         <p:txBody>
-          <a:bodyPr wrap="square">
+          <a:bodyPr wrap="square" tIns="25400" bIns="25400" lIns="25400" rIns="25400">
             <a:spAutoFit/>
           </a:bodyPr>
           <a:lstStyle/>
           <a:p>
             <a:pPr>
-              <a:defRPr sz="1800" b="1">
+              <a:defRPr sz="1500" b="1">
                 <a:solidFill>
                   <a:srgbClr val="111111"/>
                 </a:solidFill>
@@ -12929,9 +13400,9 @@
           <a:p>
             <a:pPr>
               <a:spcBef>
-                <a:spcPts val="800"/>
+                <a:spcPts val="500"/>
               </a:spcBef>
-              <a:defRPr sz="1400">
+              <a:defRPr sz="1150">
                 <a:solidFill>
                   <a:srgbClr val="1E293B"/>
                 </a:solidFill>
@@ -12939,20 +13410,20 @@
               </a:defRPr>
             </a:pPr>
             <a:r>
-              <a:t>Built with modern React hooks and lightning-fast Vite bundling. Instant updates and zero page lag.</a:t>
-            </a:r>
-          </a:p>
-        </p:txBody>
-      </p:sp>
-      <p:sp>
-        <p:nvSpPr>
-          <p:cNvPr id="9" name="Rectangle 8"/>
+              <a:t>Built with modern React hooks and lightning-fast Vite bundling. Instant state transitions and zero interface lag.</a:t>
+            </a:r>
+          </a:p>
+        </p:txBody>
+      </p:sp>
+      <p:sp>
+        <p:nvSpPr>
+          <p:cNvPr id="8" name="Rectangle 7"/>
           <p:cNvSpPr/>
           <p:nvPr/>
         </p:nvSpPr>
         <p:spPr>
           <a:xfrm>
-            <a:off x="6227064" y="2066544"/>
+            <a:off x="6227064" y="2020824"/>
             <a:ext cx="5257800" cy="2057400"/>
           </a:xfrm>
           <a:prstGeom prst="rect">
@@ -12989,13 +13460,13 @@
       </p:sp>
       <p:sp>
         <p:nvSpPr>
-          <p:cNvPr id="10" name="Rectangle 9"/>
+          <p:cNvPr id="9" name="Rectangle 8"/>
           <p:cNvSpPr/>
           <p:nvPr/>
         </p:nvSpPr>
         <p:spPr>
           <a:xfrm>
-            <a:off x="6172200" y="2011680"/>
+            <a:off x="6172200" y="1965960"/>
             <a:ext cx="5257800" cy="2057400"/>
           </a:xfrm>
           <a:prstGeom prst="rect">
@@ -13034,14 +13505,14 @@
       </p:sp>
       <p:sp>
         <p:nvSpPr>
-          <p:cNvPr id="11" name="TextBox 10"/>
+          <p:cNvPr id="10" name="TextBox 9"/>
           <p:cNvSpPr txBox="1"/>
           <p:nvPr/>
         </p:nvSpPr>
         <p:spPr>
           <a:xfrm>
-            <a:off x="6446520" y="2194560"/>
-            <a:ext cx="4709160" cy="1691640"/>
+            <a:off x="6400800" y="2148840"/>
+            <a:ext cx="4800600" cy="1691640"/>
           </a:xfrm>
           <a:prstGeom prst="rect">
             <a:avLst/>
@@ -13049,13 +13520,13 @@
           <a:noFill/>
         </p:spPr>
         <p:txBody>
-          <a:bodyPr wrap="square">
+          <a:bodyPr wrap="square" tIns="25400" bIns="25400" lIns="25400" rIns="25400">
             <a:spAutoFit/>
           </a:bodyPr>
           <a:lstStyle/>
           <a:p>
             <a:pPr>
-              <a:defRPr sz="1800" b="1">
+              <a:defRPr sz="1500" b="1">
                 <a:solidFill>
                   <a:srgbClr val="111111"/>
                 </a:solidFill>
@@ -13069,9 +13540,9 @@
           <a:p>
             <a:pPr>
               <a:spcBef>
-                <a:spcPts val="800"/>
+                <a:spcPts val="500"/>
               </a:spcBef>
-              <a:defRPr sz="1400">
+              <a:defRPr sz="1150">
                 <a:solidFill>
                   <a:srgbClr val="1E293B"/>
                 </a:solidFill>
@@ -13086,13 +13557,13 @@
       </p:sp>
       <p:sp>
         <p:nvSpPr>
-          <p:cNvPr id="12" name="Rectangle 11"/>
+          <p:cNvPr id="11" name="Rectangle 10"/>
           <p:cNvSpPr/>
           <p:nvPr/>
         </p:nvSpPr>
         <p:spPr>
           <a:xfrm>
-            <a:off x="786384" y="4306824"/>
+            <a:off x="786384" y="4261104"/>
             <a:ext cx="5257800" cy="2057400"/>
           </a:xfrm>
           <a:prstGeom prst="rect">
@@ -13129,13 +13600,13 @@
       </p:sp>
       <p:sp>
         <p:nvSpPr>
-          <p:cNvPr id="13" name="Rectangle 12"/>
+          <p:cNvPr id="12" name="Rectangle 11"/>
           <p:cNvSpPr/>
           <p:nvPr/>
         </p:nvSpPr>
         <p:spPr>
           <a:xfrm>
-            <a:off x="731520" y="4251960"/>
+            <a:off x="731520" y="4206240"/>
             <a:ext cx="5257800" cy="2057400"/>
           </a:xfrm>
           <a:prstGeom prst="rect">
@@ -13174,14 +13645,14 @@
       </p:sp>
       <p:sp>
         <p:nvSpPr>
-          <p:cNvPr id="14" name="TextBox 13"/>
+          <p:cNvPr id="13" name="TextBox 12"/>
           <p:cNvSpPr txBox="1"/>
           <p:nvPr/>
         </p:nvSpPr>
         <p:spPr>
           <a:xfrm>
-            <a:off x="1005840" y="4434840"/>
-            <a:ext cx="4709160" cy="1691640"/>
+            <a:off x="960120" y="4389120"/>
+            <a:ext cx="4800600" cy="1691640"/>
           </a:xfrm>
           <a:prstGeom prst="rect">
             <a:avLst/>
@@ -13189,13 +13660,13 @@
           <a:noFill/>
         </p:spPr>
         <p:txBody>
-          <a:bodyPr wrap="square">
+          <a:bodyPr wrap="square" tIns="25400" bIns="25400" lIns="25400" rIns="25400">
             <a:spAutoFit/>
           </a:bodyPr>
           <a:lstStyle/>
           <a:p>
             <a:pPr>
-              <a:defRPr sz="1800" b="1">
+              <a:defRPr sz="1500" b="1">
                 <a:solidFill>
                   <a:srgbClr val="111111"/>
                 </a:solidFill>
@@ -13209,9 +13680,9 @@
           <a:p>
             <a:pPr>
               <a:spcBef>
-                <a:spcPts val="800"/>
+                <a:spcPts val="500"/>
               </a:spcBef>
-              <a:defRPr sz="1400">
+              <a:defRPr sz="1150">
                 <a:solidFill>
                   <a:srgbClr val="1E293B"/>
                 </a:solidFill>
@@ -13226,13 +13697,13 @@
       </p:sp>
       <p:sp>
         <p:nvSpPr>
-          <p:cNvPr id="15" name="Rectangle 14"/>
+          <p:cNvPr id="14" name="Rectangle 13"/>
           <p:cNvSpPr/>
           <p:nvPr/>
         </p:nvSpPr>
         <p:spPr>
           <a:xfrm>
-            <a:off x="6227064" y="4306824"/>
+            <a:off x="6227064" y="4261104"/>
             <a:ext cx="5257800" cy="2057400"/>
           </a:xfrm>
           <a:prstGeom prst="rect">
@@ -13269,13 +13740,13 @@
       </p:sp>
       <p:sp>
         <p:nvSpPr>
-          <p:cNvPr id="16" name="Rectangle 15"/>
+          <p:cNvPr id="15" name="Rectangle 14"/>
           <p:cNvSpPr/>
           <p:nvPr/>
         </p:nvSpPr>
         <p:spPr>
           <a:xfrm>
-            <a:off x="6172200" y="4251960"/>
+            <a:off x="6172200" y="4206240"/>
             <a:ext cx="5257800" cy="2057400"/>
           </a:xfrm>
           <a:prstGeom prst="rect">
@@ -13314,14 +13785,14 @@
       </p:sp>
       <p:sp>
         <p:nvSpPr>
-          <p:cNvPr id="17" name="TextBox 16"/>
+          <p:cNvPr id="16" name="TextBox 15"/>
           <p:cNvSpPr txBox="1"/>
           <p:nvPr/>
         </p:nvSpPr>
         <p:spPr>
           <a:xfrm>
-            <a:off x="6446520" y="4434840"/>
-            <a:ext cx="4709160" cy="1691640"/>
+            <a:off x="6400800" y="4389120"/>
+            <a:ext cx="4800600" cy="1691640"/>
           </a:xfrm>
           <a:prstGeom prst="rect">
             <a:avLst/>
@@ -13329,13 +13800,13 @@
           <a:noFill/>
         </p:spPr>
         <p:txBody>
-          <a:bodyPr wrap="square">
+          <a:bodyPr wrap="square" tIns="25400" bIns="25400" lIns="25400" rIns="25400">
             <a:spAutoFit/>
           </a:bodyPr>
           <a:lstStyle/>
           <a:p>
             <a:pPr>
-              <a:defRPr sz="1800" b="1">
+              <a:defRPr sz="1500" b="1">
                 <a:solidFill>
                   <a:srgbClr val="111111"/>
                 </a:solidFill>
@@ -13349,9 +13820,9 @@
           <a:p>
             <a:pPr>
               <a:spcBef>
-                <a:spcPts val="800"/>
+                <a:spcPts val="500"/>
               </a:spcBef>
-              <a:defRPr sz="1400">
+              <a:defRPr sz="1150">
                 <a:solidFill>
                   <a:srgbClr val="1E293B"/>
                 </a:solidFill>
@@ -13359,7 +13830,7 @@
               </a:defRPr>
             </a:pPr>
             <a:r>
-              <a:t>Plug in the USB cable and click 'Connect' — works directly inside Chrome or Edge with zero driver installs.</a:t>
+              <a:t>Plug in the USB cable and click 'Connect' — communicates directly inside Chrome or Edge with zero driver installs.</a:t>
             </a:r>
           </a:p>
         </p:txBody>

--- a/AWEN_Final_Presentation_AF52.pptx
+++ b/AWEN_Final_Presentation_AF52.pptx
@@ -3807,6 +3807,87 @@
             </a:pPr>
             <a:r>
               <a:t>Saved right on your own laptop in local SQLite. Zero biometric data leaves your machine.</a:t>
+            </a:r>
+          </a:p>
+        </p:txBody>
+      </p:sp>
+      <p:sp>
+        <p:nvSpPr>
+          <p:cNvPr id="17" name="Rectangle 16"/>
+          <p:cNvSpPr/>
+          <p:nvPr/>
+        </p:nvSpPr>
+        <p:spPr>
+          <a:xfrm>
+            <a:off x="731520" y="6236208"/>
+            <a:ext cx="10728655" cy="438912"/>
+          </a:xfrm>
+          <a:prstGeom prst="rect">
+            <a:avLst/>
+          </a:prstGeom>
+          <a:solidFill>
+            <a:srgbClr val="FFFFFF"/>
+          </a:solidFill>
+          <a:ln w="31750">
+            <a:solidFill>
+              <a:srgbClr val="111111"/>
+            </a:solidFill>
+          </a:ln>
+        </p:spPr>
+        <p:style>
+          <a:lnRef idx="1">
+            <a:schemeClr val="accent1"/>
+          </a:lnRef>
+          <a:fillRef idx="3">
+            <a:schemeClr val="accent1"/>
+          </a:fillRef>
+          <a:effectRef idx="2">
+            <a:schemeClr val="accent1"/>
+          </a:effectRef>
+          <a:fontRef idx="minor">
+            <a:schemeClr val="lt1"/>
+          </a:fontRef>
+        </p:style>
+        <p:txBody>
+          <a:bodyPr rtlCol="0" anchor="ctr"/>
+          <a:lstStyle/>
+          <a:p>
+            <a:pPr algn="ctr"/>
+          </a:p>
+        </p:txBody>
+      </p:sp>
+      <p:sp>
+        <p:nvSpPr>
+          <p:cNvPr id="18" name="TextBox 17"/>
+          <p:cNvSpPr txBox="1"/>
+          <p:nvPr/>
+        </p:nvSpPr>
+        <p:spPr>
+          <a:xfrm>
+            <a:off x="822960" y="6254496"/>
+            <a:ext cx="10545775" cy="402336"/>
+          </a:xfrm>
+          <a:prstGeom prst="rect">
+            <a:avLst/>
+          </a:prstGeom>
+          <a:noFill/>
+        </p:spPr>
+        <p:txBody>
+          <a:bodyPr wrap="square" tIns="25400" bIns="25400">
+            <a:spAutoFit/>
+          </a:bodyPr>
+          <a:lstStyle/>
+          <a:p>
+            <a:pPr>
+              <a:defRPr sz="950" b="1">
+                <a:solidFill>
+                  <a:srgbClr val="111111"/>
+                </a:solidFill>
+                <a:latin typeface="Arial"/>
+              </a:defRPr>
+            </a:pPr>
+            <a:r>
+              <a:t>TEAM AF52: Diya Singh (Lead &amp; System Architect · EU1258014), Parth Topale (EU1258058), Nishtha Lokhande (EU1258019), Swara Patil (EU1258011) | Guide: Prof. Sachin Sase</a:t>
             </a:r>
           </a:p>
         </p:txBody>

--- a/AWEN_Final_Presentation_AF52.pptx
+++ b/AWEN_Final_Presentation_AF52.pptx
@@ -3153,7 +3153,7 @@
         <p:spPr>
           <a:xfrm>
             <a:off x="731520" y="502920"/>
-            <a:ext cx="2926080" cy="365760"/>
+            <a:ext cx="3474720" cy="365760"/>
           </a:xfrm>
           <a:prstGeom prst="rect">
             <a:avLst/>
@@ -3194,7 +3194,7 @@
               </a:defRPr>
             </a:pPr>
             <a:r>
-              <a:t>CAPSTONE | B.TECH CSE</a:t>
+              <a:t>3RD SEMESTER | CSE (DATA SCIENCE)</a:t>
             </a:r>
           </a:p>
         </p:txBody>
@@ -3887,7 +3887,7 @@
               </a:defRPr>
             </a:pPr>
             <a:r>
-              <a:t>TEAM AF52: Diya Singh (Lead &amp; System Architect · EU1258014), Parth Topale (EU1258058), Nishtha Lokhande (EU1258019), Swara Patil (EU1258011) | Guide: Prof. Sachin Sase</a:t>
+              <a:t>TEAM: Diya Singh (Project Lead · EU1258014), Parth Topale (EU1258058), Nishtha Lokhande (EU1258019), Swara Patil (EU1258011) | Guide: Prof. Sachin Sase</a:t>
             </a:r>
           </a:p>
         </p:txBody>
